--- a/presentations/BasedMarketLab-How-It-Works.pptx
+++ b/presentations/BasedMarketLab-How-It-Works.pptx
@@ -2037,7 +2037,7 @@
                 <a:ea typeface="Arial" pitchFamily="34" charset="-122"/>
                 <a:cs typeface="Arial" pitchFamily="34" charset="-120"/>
               </a:rPr>
-              <a:t>Product walkthrough for demos, partners &amp; Base ecosystem</a:t>
+              <a:t>Product walkthrough · closed product · payments on Base mainnet</a:t>
             </a:r>
             <a:endParaRPr lang="en-US" sz="1200" dirty="0"/>
           </a:p>
@@ -2971,7 +2971,7 @@
                 <a:ea typeface="Arial" pitchFamily="34" charset="-122"/>
                 <a:cs typeface="Arial" pitchFamily="34" charset="-120"/>
               </a:rPr>
-              <a:t>Mainnet or Sepolia demo</a:t>
+              <a:t>Base mainnet only</a:t>
             </a:r>
             <a:endParaRPr lang="en-US" sz="1200" dirty="0"/>
           </a:p>
@@ -3071,7 +3071,7 @@
                 <a:ea typeface="Arial" pitchFamily="34" charset="-122"/>
                 <a:cs typeface="Arial" pitchFamily="34" charset="-120"/>
               </a:rPr>
-              <a:t>AI keys never leave the user’s browser · Research prompts stay on the server · Payment is verified on-chain before generate unlock · Desktop app is for you; public host is for customers later.</a:t>
+              <a:t>AI keys stay with the user · Research prompts stay on the server · $0.10 USDC verified on Base mainnet before unlock · Product source stays private (closed) · GitHub site is presentations only.</a:t>
             </a:r>
             <a:endParaRPr lang="en-US" sz="1200" dirty="0"/>
           </a:p>
@@ -3331,7 +3331,7 @@
                 <a:ea typeface="Arial" pitchFamily="34" charset="-122"/>
                 <a:cs typeface="Arial" pitchFamily="34" charset="-120"/>
               </a:rPr>
-              <a:t>Demo path: free example → COIN generate → confirm → pay/unlock → Company / Full / Chart tabs.</a:t>
+              <a:t>Path: ticker → research → confirm → pay $0.10 USDC on Base → Company / Full / Chart tabs.</a:t>
             </a:r>
             <a:endParaRPr lang="en-US" sz="1400" dirty="0"/>
           </a:p>
@@ -3370,7 +3370,7 @@
                 <a:ea typeface="Arial" pitchFamily="34" charset="-122"/>
                 <a:cs typeface="Arial" pitchFamily="34" charset="-120"/>
               </a:rPr>
-              <a:t>Built on Base  ·  Local app today  ·  Hosted product next</a:t>
+              <a:t>Built on Base  ·  Closed product  ·  Public presentations only</a:t>
             </a:r>
             <a:endParaRPr lang="en-US" sz="1300" dirty="0"/>
           </a:p>
@@ -3518,7 +3518,7 @@
                 <a:ea typeface="Arial" pitchFamily="34" charset="-122"/>
                 <a:cs typeface="Arial" pitchFamily="34" charset="-120"/>
               </a:rPr>
-              <a:t>BasedMarketLab turns a stock ticker into a clear company research report — what the business does, strengths, risks, and longer-term story — then unlocks the full package for $0.50 USDC on Base.</a:t>
+              <a:t>BasedMarketLab turns a stock ticker into a clear company research report — what the business does, strengths, risks, and longer-term story — then unlocks the full package for $0.10 USDC on Base.</a:t>
             </a:r>
             <a:endParaRPr lang="en-US" sz="1500" dirty="0"/>
           </a:p>
@@ -3899,7 +3899,7 @@
                 <a:ea typeface="Arial" pitchFamily="34" charset="-122"/>
                 <a:cs typeface="Arial" pitchFamily="34" charset="-120"/>
               </a:rPr>
-              <a:t>Pay with USDC on Base (or Base Sepolia for demos). Wallet connect included.</a:t>
+              <a:t>Pay $0.10 USDC on Base mainnet. Wallet connect · real on-chain unlock.</a:t>
             </a:r>
             <a:endParaRPr lang="en-US" sz="1300" dirty="0"/>
           </a:p>
@@ -4714,7 +4714,7 @@
                 <a:ea typeface="Arial" pitchFamily="34" charset="-122"/>
                 <a:cs typeface="Arial" pitchFamily="34" charset="-120"/>
               </a:rPr>
-              <a:t>$0.50 USDC on Base (or testnet for demos).</a:t>
+              <a:t>$0.10 USDC on Base mainnet (real USDC only).</a:t>
             </a:r>
             <a:endParaRPr lang="en-US" sz="1400" dirty="0"/>
           </a:p>
@@ -4851,7 +4851,7 @@
                 <a:ea typeface="Arial" pitchFamily="34" charset="-122"/>
                 <a:cs typeface="Arial" pitchFamily="34" charset="-120"/>
               </a:rPr>
-              <a:t>Company · Full · Chart · Predictions · PDF / library.</a:t>
+              <a:t>Company · Full · one Price chart · Predictions · PDF / library.</a:t>
             </a:r>
             <a:endParaRPr lang="en-US" sz="1400" dirty="0"/>
           </a:p>
@@ -5184,7 +5184,7 @@
                 <a:ea typeface="Arial" pitchFamily="34" charset="-122"/>
                 <a:cs typeface="Arial" pitchFamily="34" charset="-120"/>
               </a:rPr>
-              <a:t>•  Yahoo / market feeds + company blurbs</a:t>
+              <a:t>•  Public market feeds + company context</a:t>
             </a:r>
             <a:endParaRPr lang="en-US" sz="1300" dirty="0"/>
           </a:p>
@@ -5223,7 +5223,7 @@
                 <a:ea typeface="Arial" pitchFamily="34" charset="-122"/>
                 <a:cs typeface="Arial" pitchFamily="34" charset="-120"/>
               </a:rPr>
-              <a:t>•  Charts &amp; structure still build</a:t>
+              <a:t>•  One full-history chart still builds</a:t>
             </a:r>
             <a:endParaRPr lang="en-US" sz="1300" dirty="0"/>
           </a:p>
@@ -5340,7 +5340,7 @@
                 <a:ea typeface="Arial" pitchFamily="34" charset="-122"/>
                 <a:cs typeface="Arial" pitchFamily="34" charset="-120"/>
               </a:rPr>
-              <a:t>•  Works offline from free APIs</a:t>
+              <a:t>•  No AI key required for this path</a:t>
             </a:r>
             <a:endParaRPr lang="en-US" sz="1300" dirty="0"/>
           </a:p>
@@ -5861,7 +5861,7 @@
                 <a:ea typeface="Arial" pitchFamily="34" charset="-122"/>
                 <a:cs typeface="Arial" pitchFamily="34" charset="-120"/>
               </a:rPr>
-              <a:t>Ticker · optional AI key · Generate · $0.50 USDC</a:t>
+              <a:t>Ticker · optional AI key · Generate · $0.10 USDC</a:t>
             </a:r>
             <a:endParaRPr lang="en-US" sz="1100" dirty="0"/>
           </a:p>
@@ -6285,7 +6285,7 @@
                 <a:ea typeface="Arial" pitchFamily="34" charset="-122"/>
                 <a:cs typeface="Arial" pitchFamily="34" charset="-120"/>
               </a:rPr>
-              <a:t>MetaMask / Coinbase Wallet on Base (or Base Sepolia for demos).</a:t>
+              <a:t>MetaMask / Coinbase Wallet on Base mainnet (chain 8453).</a:t>
             </a:r>
             <a:endParaRPr lang="en-US" sz="1300" dirty="0"/>
           </a:p>
@@ -6353,7 +6353,7 @@
                 <a:ea typeface="Arial" pitchFamily="34" charset="-122"/>
                 <a:cs typeface="Arial" pitchFamily="34" charset="-120"/>
               </a:rPr>
-              <a:t>Pay $0.50 USDC</a:t>
+              <a:t>Pay $0.10 USDC</a:t>
             </a:r>
             <a:endParaRPr lang="en-US" sz="1500" dirty="0"/>
           </a:p>
@@ -6392,7 +6392,7 @@
                 <a:ea typeface="Arial" pitchFamily="34" charset="-122"/>
                 <a:cs typeface="Arial" pitchFamily="34" charset="-120"/>
               </a:rPr>
-              <a:t>On-chain transfer to your shop address. App verifies the tx, then unlocks.</a:t>
+              <a:t>Real USDC transfer to your shop address. App verifies the tx on Base, then unlocks.</a:t>
             </a:r>
             <a:endParaRPr lang="en-US" sz="1300" dirty="0"/>
           </a:p>
@@ -6460,7 +6460,7 @@
                 <a:ea typeface="Arial" pitchFamily="34" charset="-122"/>
                 <a:cs typeface="Arial" pitchFamily="34" charset="-120"/>
               </a:rPr>
-              <a:t>Demo modes</a:t>
+              <a:t>No free skip</a:t>
             </a:r>
             <a:endParaRPr lang="en-US" sz="1500" dirty="0"/>
           </a:p>
@@ -6499,7 +6499,7 @@
                 <a:ea typeface="Arial" pitchFamily="34" charset="-122"/>
                 <a:cs typeface="Arial" pitchFamily="34" charset="-120"/>
               </a:rPr>
-              <a:t>Testnet + free unlock available for presentations without real money.</a:t>
+              <a:t>Testnet and free unlock are off — production path is mainnet USDC only.</a:t>
             </a:r>
             <a:endParaRPr lang="en-US" sz="1300" dirty="0"/>
           </a:p>
@@ -6725,7 +6725,7 @@
                 <a:ea typeface="Arial" pitchFamily="34" charset="-122"/>
                 <a:cs typeface="Arial" pitchFamily="34" charset="-120"/>
               </a:rPr>
-              <a:t>Confirm company → connect MetaMask / Coinbase Wallet → pay $0.50 USDC on Base</a:t>
+              <a:t>Confirm company → connect MetaMask / Coinbase Wallet → pay $0.10 USDC on Base</a:t>
             </a:r>
             <a:endParaRPr lang="en-US" sz="1200" dirty="0"/>
           </a:p>
@@ -7235,7 +7235,7 @@
                 <a:ea typeface="Arial" pitchFamily="34" charset="-122"/>
                 <a:cs typeface="Arial" pitchFamily="34" charset="-120"/>
               </a:rPr>
-              <a:t>Tape, grades, zones — explicit secondary context, not the main product.</a:t>
+              <a:t>One full-history chart with buy/sell marks — secondary context, not the main product.</a:t>
             </a:r>
             <a:endParaRPr lang="en-US" sz="1300" dirty="0"/>
           </a:p>

--- a/presentations/BasedMarketLab-How-It-Works.pptx
+++ b/presentations/BasedMarketLab-How-It-Works.pptx
@@ -17,9 +17,11 @@
     <p:sldId id="265" r:id="rId11"/>
     <p:sldId id="266" r:id="rId12"/>
     <p:sldId id="267" r:id="rId13"/>
+    <p:sldId id="268" r:id="rId14"/>
+    <p:sldId id="269" r:id="rId15"/>
   </p:sldIdLst>
   <p:notesMasterIdLst>
-    <p:notesMasterId r:id="rId14"/>
+    <p:notesMasterId r:id="rId16"/>
   </p:notesMasterIdLst>
   <p:sldSz cx="9144000" cy="5143500"/>
   <p:notesSz cx="5143500" cy="9144000"/>
@@ -801,6 +803,182 @@
             <a:fld id="{F7021451-1387-4CA6-816F-3879F97B5CBC}" type="slidenum">
               <a:rPr lang="en-US"/>
               <a:t>12</a:t>
+            </a:fld>
+            <a:endParaRPr lang="en-US"/>
+          </a:p>
+        </p:txBody>
+      </p:sp>
+    </p:spTree>
+    <p:extLst>
+      <p:ext uri="{BB962C8B-B14F-4D97-AF65-F5344CB8AC3E}">
+        <p14:creationId xmlns:p14="http://schemas.microsoft.com/office/powerpoint/2010/main" val="1024086991"/>
+      </p:ext>
+    </p:extLst>
+  </p:cSld>
+  <p:clrMapOvr>
+    <a:masterClrMapping/>
+  </p:clrMapOvr>
+</p:notes>
+</file>
+
+<file path=ppt/notesSlides/notesSlide13.xml><?xml version="1.0" encoding="utf-8"?>
+<p:notes xmlns:a="http://schemas.openxmlformats.org/drawingml/2006/main" xmlns:r="http://schemas.openxmlformats.org/officeDocument/2006/relationships" xmlns:p="http://schemas.openxmlformats.org/presentationml/2006/main">
+  <p:cSld>
+    <p:spTree>
+      <p:nvGrpSpPr>
+        <p:cNvPr id="1" name=""/>
+        <p:cNvGrpSpPr/>
+        <p:nvPr/>
+      </p:nvGrpSpPr>
+      <p:grpSpPr>
+        <a:xfrm>
+          <a:off x="0" y="0"/>
+          <a:ext cx="0" cy="0"/>
+          <a:chOff x="0" y="0"/>
+          <a:chExt cx="0" cy="0"/>
+        </a:xfrm>
+      </p:grpSpPr>
+      <p:sp>
+        <p:nvSpPr>
+          <p:cNvPr id="2" name="Slide Image Placeholder 1"/>
+          <p:cNvSpPr>
+            <a:spLocks noGrp="1" noRot="1" noChangeAspect="1"/>
+          </p:cNvSpPr>
+          <p:nvPr>
+            <p:ph type="sldImg"/>
+          </p:nvPr>
+        </p:nvSpPr>
+        <p:spPr/>
+      </p:sp>
+      <p:sp>
+        <p:nvSpPr>
+          <p:cNvPr id="3" name="Notes Placeholder 2"/>
+          <p:cNvSpPr>
+            <a:spLocks noGrp="1"/>
+          </p:cNvSpPr>
+          <p:nvPr>
+            <p:ph type="body" idx="1"/>
+          </p:nvPr>
+        </p:nvSpPr>
+        <p:spPr/>
+        <p:txBody>
+          <a:bodyPr/>
+          <a:lstStyle/>
+          <a:p>
+            <a:r>
+              <a:rPr lang="en-US" dirty="0"/>
+              <a:t/>
+            </a:r>
+            <a:endParaRPr lang="en-US" dirty="0"/>
+          </a:p>
+        </p:txBody>
+      </p:sp>
+      <p:sp>
+        <p:nvSpPr>
+          <p:cNvPr id="4" name="Slide Number Placeholder 3"/>
+          <p:cNvSpPr>
+            <a:spLocks noGrp="1"/>
+          </p:cNvSpPr>
+          <p:nvPr>
+            <p:ph type="sldNum" sz="quarter" idx="10"/>
+          </p:nvPr>
+        </p:nvSpPr>
+        <p:spPr/>
+        <p:txBody>
+          <a:bodyPr/>
+          <a:lstStyle/>
+          <a:p>
+            <a:fld id="{F7021451-1387-4CA6-816F-3879F97B5CBC}" type="slidenum">
+              <a:rPr lang="en-US"/>
+              <a:t>13</a:t>
+            </a:fld>
+            <a:endParaRPr lang="en-US"/>
+          </a:p>
+        </p:txBody>
+      </p:sp>
+    </p:spTree>
+    <p:extLst>
+      <p:ext uri="{BB962C8B-B14F-4D97-AF65-F5344CB8AC3E}">
+        <p14:creationId xmlns:p14="http://schemas.microsoft.com/office/powerpoint/2010/main" val="1024086991"/>
+      </p:ext>
+    </p:extLst>
+  </p:cSld>
+  <p:clrMapOvr>
+    <a:masterClrMapping/>
+  </p:clrMapOvr>
+</p:notes>
+</file>
+
+<file path=ppt/notesSlides/notesSlide14.xml><?xml version="1.0" encoding="utf-8"?>
+<p:notes xmlns:a="http://schemas.openxmlformats.org/drawingml/2006/main" xmlns:r="http://schemas.openxmlformats.org/officeDocument/2006/relationships" xmlns:p="http://schemas.openxmlformats.org/presentationml/2006/main">
+  <p:cSld>
+    <p:spTree>
+      <p:nvGrpSpPr>
+        <p:cNvPr id="1" name=""/>
+        <p:cNvGrpSpPr/>
+        <p:nvPr/>
+      </p:nvGrpSpPr>
+      <p:grpSpPr>
+        <a:xfrm>
+          <a:off x="0" y="0"/>
+          <a:ext cx="0" cy="0"/>
+          <a:chOff x="0" y="0"/>
+          <a:chExt cx="0" cy="0"/>
+        </a:xfrm>
+      </p:grpSpPr>
+      <p:sp>
+        <p:nvSpPr>
+          <p:cNvPr id="2" name="Slide Image Placeholder 1"/>
+          <p:cNvSpPr>
+            <a:spLocks noGrp="1" noRot="1" noChangeAspect="1"/>
+          </p:cNvSpPr>
+          <p:nvPr>
+            <p:ph type="sldImg"/>
+          </p:nvPr>
+        </p:nvSpPr>
+        <p:spPr/>
+      </p:sp>
+      <p:sp>
+        <p:nvSpPr>
+          <p:cNvPr id="3" name="Notes Placeholder 2"/>
+          <p:cNvSpPr>
+            <a:spLocks noGrp="1"/>
+          </p:cNvSpPr>
+          <p:nvPr>
+            <p:ph type="body" idx="1"/>
+          </p:nvPr>
+        </p:nvSpPr>
+        <p:spPr/>
+        <p:txBody>
+          <a:bodyPr/>
+          <a:lstStyle/>
+          <a:p>
+            <a:r>
+              <a:rPr lang="en-US" dirty="0"/>
+              <a:t/>
+            </a:r>
+            <a:endParaRPr lang="en-US" dirty="0"/>
+          </a:p>
+        </p:txBody>
+      </p:sp>
+      <p:sp>
+        <p:nvSpPr>
+          <p:cNvPr id="4" name="Slide Number Placeholder 3"/>
+          <p:cNvSpPr>
+            <a:spLocks noGrp="1"/>
+          </p:cNvSpPr>
+          <p:nvPr>
+            <p:ph type="sldNum" sz="quarter" idx="10"/>
+          </p:nvPr>
+        </p:nvSpPr>
+        <p:spPr/>
+        <p:txBody>
+          <a:bodyPr/>
+          <a:lstStyle/>
+          <a:p>
+            <a:fld id="{F7021451-1387-4CA6-816F-3879F97B5CBC}" type="slidenum">
+              <a:rPr lang="en-US"/>
+              <a:t>14</a:t>
             </a:fld>
             <a:endParaRPr lang="en-US"/>
           </a:p>
@@ -1895,7 +2073,7 @@
         </p:nvSpPr>
         <p:spPr>
           <a:xfrm>
-            <a:off x="640080" y="1371600"/>
+            <a:off x="640080" y="1234440"/>
             <a:ext cx="7772400" cy="365760"/>
           </a:xfrm>
           <a:prstGeom prst="rect">
@@ -1934,7 +2112,7 @@
         </p:nvSpPr>
         <p:spPr>
           <a:xfrm>
-            <a:off x="640080" y="1828800"/>
+            <a:off x="640080" y="1691640"/>
             <a:ext cx="7772400" cy="640080"/>
           </a:xfrm>
           <a:prstGeom prst="rect">
@@ -1973,24 +2151,24 @@
         </p:nvSpPr>
         <p:spPr>
           <a:xfrm>
-            <a:off x="640080" y="2606040"/>
-            <a:ext cx="7772400" cy="365760"/>
-          </a:xfrm>
-          <a:prstGeom prst="rect">
-            <a:avLst/>
-          </a:prstGeom>
-          <a:noFill/>
-          <a:ln/>
-        </p:spPr>
-        <p:txBody>
-          <a:bodyPr wrap="square" rtlCol="0" anchor="ctr"/>
-          <a:lstStyle/>
-          <a:p>
-            <a:pPr indent="0" marL="0">
-              <a:buNone/>
-            </a:pPr>
-            <a:r>
-              <a:rPr lang="en-US" sz="1600" dirty="0">
+            <a:off x="640080" y="2468880"/>
+            <a:ext cx="7772400" cy="411480"/>
+          </a:xfrm>
+          <a:prstGeom prst="rect">
+            <a:avLst/>
+          </a:prstGeom>
+          <a:noFill/>
+          <a:ln/>
+        </p:spPr>
+        <p:txBody>
+          <a:bodyPr wrap="square" rtlCol="0" anchor="ctr"/>
+          <a:lstStyle/>
+          <a:p>
+            <a:pPr indent="0" marL="0">
+              <a:buNone/>
+            </a:pPr>
+            <a:r>
+              <a:rPr lang="en-US" sz="1500" dirty="0">
                 <a:solidFill>
                   <a:srgbClr val="A1A1AA"/>
                 </a:solidFill>
@@ -1998,9 +2176,9 @@
                 <a:ea typeface="Arial" pitchFamily="34" charset="-122"/>
                 <a:cs typeface="Arial" pitchFamily="34" charset="-120"/>
               </a:rPr>
-              <a:t>Company-first market research · optional AI · unlock with USDC on Base</a:t>
-            </a:r>
-            <a:endParaRPr lang="en-US" sz="1600" dirty="0"/>
+              <a:t>Company-first research · latest SEC 10-K / 10-Q · multi-model AI · unlock with USDC on Base</a:t>
+            </a:r>
+            <a:endParaRPr lang="en-US" sz="1500" dirty="0"/>
           </a:p>
         </p:txBody>
       </p:sp>
@@ -2012,8 +2190,47 @@
         </p:nvSpPr>
         <p:spPr>
           <a:xfrm>
-            <a:off x="640080" y="4206240"/>
-            <a:ext cx="7315200" cy="274320"/>
+            <a:off x="640080" y="3017520"/>
+            <a:ext cx="7772400" cy="320040"/>
+          </a:xfrm>
+          <a:prstGeom prst="rect">
+            <a:avLst/>
+          </a:prstGeom>
+          <a:noFill/>
+          <a:ln/>
+        </p:spPr>
+        <p:txBody>
+          <a:bodyPr wrap="square" rtlCol="0" anchor="ctr"/>
+          <a:lstStyle/>
+          <a:p>
+            <a:pPr indent="0" marL="0">
+              <a:buNone/>
+            </a:pPr>
+            <a:r>
+              <a:rPr lang="en-US" sz="1300" dirty="0">
+                <a:solidFill>
+                  <a:srgbClr val="E4E4E7"/>
+                </a:solidFill>
+                <a:latin typeface="Arial" pitchFamily="34" charset="0"/>
+                <a:ea typeface="Arial" pitchFamily="34" charset="-122"/>
+                <a:cs typeface="Arial" pitchFamily="34" charset="-120"/>
+              </a:rPr>
+              <a:t>Pay: test 0.00001 Sepolia · real $0.10 Base · agent  ·  Host: Vercel HTTPS (Farcaster) · private engine</a:t>
+            </a:r>
+            <a:endParaRPr lang="en-US" sz="1300" dirty="0"/>
+          </a:p>
+        </p:txBody>
+      </p:sp>
+      <p:sp>
+        <p:nvSpPr>
+          <p:cNvPr id="8" name="Text 6"/>
+          <p:cNvSpPr/>
+          <p:nvPr/>
+        </p:nvSpPr>
+        <p:spPr>
+          <a:xfrm>
+            <a:off x="640080" y="4160520"/>
+            <a:ext cx="7772400" cy="274320"/>
           </a:xfrm>
           <a:prstGeom prst="rect">
             <a:avLst/>
@@ -2037,7 +2254,7 @@
                 <a:ea typeface="Arial" pitchFamily="34" charset="-122"/>
                 <a:cs typeface="Arial" pitchFamily="34" charset="-120"/>
               </a:rPr>
-              <a:t>Product walkthrough · closed product · payments on Base mainnet</a:t>
+              <a:t>Closed source · public presentations only · free example frozen: COIN · 23 Jul 2026</a:t>
             </a:r>
             <a:endParaRPr lang="en-US" sz="1200" dirty="0"/>
           </a:p>
@@ -2121,24 +2338,24 @@
         </p:nvSpPr>
         <p:spPr>
           <a:xfrm>
-            <a:off x="365760" y="146304"/>
-            <a:ext cx="6858000" cy="256032"/>
-          </a:xfrm>
-          <a:prstGeom prst="rect">
-            <a:avLst/>
-          </a:prstGeom>
-          <a:noFill/>
-          <a:ln/>
-        </p:spPr>
-        <p:txBody>
-          <a:bodyPr wrap="square" rtlCol="0" anchor="ctr"/>
-          <a:lstStyle/>
-          <a:p>
-            <a:pPr indent="0" marL="0">
-              <a:buNone/>
-            </a:pPr>
-            <a:r>
-              <a:rPr lang="en-US" sz="1800" b="1" dirty="0">
+            <a:off x="457200" y="274320"/>
+            <a:ext cx="8229600" cy="365760"/>
+          </a:xfrm>
+          <a:prstGeom prst="rect">
+            <a:avLst/>
+          </a:prstGeom>
+          <a:noFill/>
+          <a:ln/>
+        </p:spPr>
+        <p:txBody>
+          <a:bodyPr wrap="square" rtlCol="0" anchor="ctr"/>
+          <a:lstStyle/>
+          <a:p>
+            <a:pPr indent="0" marL="0">
+              <a:buNone/>
+            </a:pPr>
+            <a:r>
+              <a:rPr lang="en-US" sz="2600" b="1" dirty="0">
                 <a:solidFill>
                   <a:srgbClr val="18181B"/>
                 </a:solidFill>
@@ -2146,38 +2363,99 @@
                 <a:ea typeface="Arial" pitchFamily="34" charset="-122"/>
                 <a:cs typeface="Arial" pitchFamily="34" charset="-120"/>
               </a:rPr>
-              <a:t>Price chart — context only</a:t>
-            </a:r>
-            <a:endParaRPr lang="en-US" sz="1800" dirty="0"/>
-          </a:p>
-        </p:txBody>
-      </p:sp>
-      <p:sp>
-        <p:nvSpPr>
-          <p:cNvPr id="5" name="Text 3"/>
-          <p:cNvSpPr/>
-          <p:nvPr/>
-        </p:nvSpPr>
-        <p:spPr>
-          <a:xfrm>
-            <a:off x="365760" y="384048"/>
-            <a:ext cx="8229600" cy="201168"/>
-          </a:xfrm>
-          <a:prstGeom prst="rect">
-            <a:avLst/>
-          </a:prstGeom>
-          <a:noFill/>
-          <a:ln/>
-        </p:spPr>
-        <p:txBody>
-          <a:bodyPr wrap="square" rtlCol="0" anchor="ctr"/>
-          <a:lstStyle/>
-          <a:p>
-            <a:pPr indent="0" marL="0">
-              <a:buNone/>
-            </a:pPr>
-            <a:r>
-              <a:rPr lang="en-US" sz="1100" dirty="0">
+              <a:t>What the buyer gets</a:t>
+            </a:r>
+            <a:endParaRPr lang="en-US" sz="2600" dirty="0"/>
+          </a:p>
+        </p:txBody>
+      </p:sp>
+      <p:sp>
+        <p:nvSpPr>
+          <p:cNvPr id="5" name="Shape 3"/>
+          <p:cNvSpPr/>
+          <p:nvPr/>
+        </p:nvSpPr>
+        <p:spPr>
+          <a:xfrm>
+            <a:off x="457200" y="822960"/>
+            <a:ext cx="8229600" cy="594360"/>
+          </a:xfrm>
+          <a:prstGeom prst="roundRect">
+            <a:avLst>
+              <a:gd name="adj" fmla="val 12308"/>
+            </a:avLst>
+          </a:prstGeom>
+          <a:solidFill>
+            <a:srgbClr val="FFFFFF"/>
+          </a:solidFill>
+          <a:ln/>
+        </p:spPr>
+      </p:sp>
+      <p:sp>
+        <p:nvSpPr>
+          <p:cNvPr id="6" name="Text 4"/>
+          <p:cNvSpPr/>
+          <p:nvPr/>
+        </p:nvSpPr>
+        <p:spPr>
+          <a:xfrm>
+            <a:off x="640080" y="932688"/>
+            <a:ext cx="2377440" cy="365760"/>
+          </a:xfrm>
+          <a:prstGeom prst="rect">
+            <a:avLst/>
+          </a:prstGeom>
+          <a:noFill/>
+          <a:ln/>
+        </p:spPr>
+        <p:txBody>
+          <a:bodyPr wrap="square" rtlCol="0" anchor="ctr"/>
+          <a:lstStyle/>
+          <a:p>
+            <a:pPr indent="0" marL="0">
+              <a:buNone/>
+            </a:pPr>
+            <a:r>
+              <a:rPr lang="en-US" sz="1400" b="1" dirty="0">
+                <a:solidFill>
+                  <a:srgbClr val="0052FF"/>
+                </a:solidFill>
+                <a:latin typeface="Arial" pitchFamily="34" charset="0"/>
+                <a:ea typeface="Arial" pitchFamily="34" charset="-122"/>
+                <a:cs typeface="Arial" pitchFamily="34" charset="-120"/>
+              </a:rPr>
+              <a:t>Company</a:t>
+            </a:r>
+            <a:endParaRPr lang="en-US" sz="1400" dirty="0"/>
+          </a:p>
+        </p:txBody>
+      </p:sp>
+      <p:sp>
+        <p:nvSpPr>
+          <p:cNvPr id="7" name="Text 5"/>
+          <p:cNvSpPr/>
+          <p:nvPr/>
+        </p:nvSpPr>
+        <p:spPr>
+          <a:xfrm>
+            <a:off x="3108960" y="932688"/>
+            <a:ext cx="5394960" cy="411480"/>
+          </a:xfrm>
+          <a:prstGeom prst="rect">
+            <a:avLst/>
+          </a:prstGeom>
+          <a:noFill/>
+          <a:ln/>
+        </p:spPr>
+        <p:txBody>
+          <a:bodyPr wrap="square" rtlCol="0" anchor="ctr"/>
+          <a:lstStyle/>
+          <a:p>
+            <a:pPr indent="0" marL="0">
+              <a:buNone/>
+            </a:pPr>
+            <a:r>
+              <a:rPr lang="en-US" sz="1300" dirty="0">
                 <a:solidFill>
                   <a:srgbClr val="52525B"/>
                 </a:solidFill>
@@ -2185,45 +2463,422 @@
                 <a:ea typeface="Arial" pitchFamily="34" charset="-122"/>
                 <a:cs typeface="Arial" pitchFamily="34" charset="-120"/>
               </a:rPr>
-              <a:t>Supports the company story — not a day-trading terminal</a:t>
-            </a:r>
-            <a:endParaRPr lang="en-US" sz="1100" dirty="0"/>
-          </a:p>
-        </p:txBody>
-      </p:sp>
-      <p:pic>
-        <p:nvPicPr>
-          <p:cNvPr id="6" name="Image 0" descr="C:\Users\Kevin\OneDrive\Desktop\BasedMarketLab\live\screenshots\pptx_crops\slide10_zoom.png">    </p:cNvPr>
-          <p:cNvPicPr>
-            <a:picLocks noChangeAspect="1"/>
-          </p:cNvPicPr>
-          <p:nvPr/>
-        </p:nvPicPr>
-        <p:blipFill>
-          <a:blip r:embed="rId1"/>
-          <a:srcRect l="0" r="0" t="0" b="0"/>
-          <a:stretch/>
-        </p:blipFill>
-        <p:spPr>
-          <a:xfrm>
-            <a:off x="320040" y="621792"/>
-            <a:ext cx="8503920" cy="3886200"/>
-          </a:xfrm>
-          <a:prstGeom prst="rect">
-            <a:avLst/>
-          </a:prstGeom>
-        </p:spPr>
-      </p:pic>
-      <p:sp>
-        <p:nvSpPr>
-          <p:cNvPr id="7" name="Text 4"/>
+              <a:t>Bottom line, business, strong / weak, watch-outs, market phase, word guide.</a:t>
+            </a:r>
+            <a:endParaRPr lang="en-US" sz="1300" dirty="0"/>
+          </a:p>
+        </p:txBody>
+      </p:sp>
+      <p:sp>
+        <p:nvSpPr>
+          <p:cNvPr id="8" name="Shape 6"/>
+          <p:cNvSpPr/>
+          <p:nvPr/>
+        </p:nvSpPr>
+        <p:spPr>
+          <a:xfrm>
+            <a:off x="457200" y="1508760"/>
+            <a:ext cx="8229600" cy="594360"/>
+          </a:xfrm>
+          <a:prstGeom prst="roundRect">
+            <a:avLst>
+              <a:gd name="adj" fmla="val 12308"/>
+            </a:avLst>
+          </a:prstGeom>
+          <a:solidFill>
+            <a:srgbClr val="EEF2FF"/>
+          </a:solidFill>
+          <a:ln/>
+        </p:spPr>
+      </p:sp>
+      <p:sp>
+        <p:nvSpPr>
+          <p:cNvPr id="9" name="Text 7"/>
+          <p:cNvSpPr/>
+          <p:nvPr/>
+        </p:nvSpPr>
+        <p:spPr>
+          <a:xfrm>
+            <a:off x="640080" y="1618488"/>
+            <a:ext cx="2377440" cy="365760"/>
+          </a:xfrm>
+          <a:prstGeom prst="rect">
+            <a:avLst/>
+          </a:prstGeom>
+          <a:noFill/>
+          <a:ln/>
+        </p:spPr>
+        <p:txBody>
+          <a:bodyPr wrap="square" rtlCol="0" anchor="ctr"/>
+          <a:lstStyle/>
+          <a:p>
+            <a:pPr indent="0" marL="0">
+              <a:buNone/>
+            </a:pPr>
+            <a:r>
+              <a:rPr lang="en-US" sz="1400" b="1" dirty="0">
+                <a:solidFill>
+                  <a:srgbClr val="0052FF"/>
+                </a:solidFill>
+                <a:latin typeface="Arial" pitchFamily="34" charset="0"/>
+                <a:ea typeface="Arial" pitchFamily="34" charset="-122"/>
+                <a:cs typeface="Arial" pitchFamily="34" charset="-120"/>
+              </a:rPr>
+              <a:t>Full company report</a:t>
+            </a:r>
+            <a:endParaRPr lang="en-US" sz="1400" dirty="0"/>
+          </a:p>
+        </p:txBody>
+      </p:sp>
+      <p:sp>
+        <p:nvSpPr>
+          <p:cNvPr id="10" name="Text 8"/>
+          <p:cNvSpPr/>
+          <p:nvPr/>
+        </p:nvSpPr>
+        <p:spPr>
+          <a:xfrm>
+            <a:off x="3108960" y="1618488"/>
+            <a:ext cx="5394960" cy="411480"/>
+          </a:xfrm>
+          <a:prstGeom prst="rect">
+            <a:avLst/>
+          </a:prstGeom>
+          <a:noFill/>
+          <a:ln/>
+        </p:spPr>
+        <p:txBody>
+          <a:bodyPr wrap="square" rtlCol="0" anchor="ctr"/>
+          <a:lstStyle/>
+          <a:p>
+            <a:pPr indent="0" marL="0">
+              <a:buNone/>
+            </a:pPr>
+            <a:r>
+              <a:rPr lang="en-US" sz="1300" dirty="0">
+                <a:solidFill>
+                  <a:srgbClr val="52525B"/>
+                </a:solidFill>
+                <a:latin typeface="Arial" pitchFamily="34" charset="0"/>
+                <a:ea typeface="Arial" pitchFamily="34" charset="-122"/>
+                <a:cs typeface="Arial" pitchFamily="34" charset="-120"/>
+              </a:rPr>
+              <a:t>Glance → what they do → opportunity → how business is doing → risks → put-together.</a:t>
+            </a:r>
+            <a:endParaRPr lang="en-US" sz="1300" dirty="0"/>
+          </a:p>
+        </p:txBody>
+      </p:sp>
+      <p:sp>
+        <p:nvSpPr>
+          <p:cNvPr id="11" name="Shape 9"/>
+          <p:cNvSpPr/>
+          <p:nvPr/>
+        </p:nvSpPr>
+        <p:spPr>
+          <a:xfrm>
+            <a:off x="457200" y="2194560"/>
+            <a:ext cx="8229600" cy="594360"/>
+          </a:xfrm>
+          <a:prstGeom prst="roundRect">
+            <a:avLst>
+              <a:gd name="adj" fmla="val 12308"/>
+            </a:avLst>
+          </a:prstGeom>
+          <a:solidFill>
+            <a:srgbClr val="FFFFFF"/>
+          </a:solidFill>
+          <a:ln/>
+        </p:spPr>
+      </p:sp>
+      <p:sp>
+        <p:nvSpPr>
+          <p:cNvPr id="12" name="Text 10"/>
+          <p:cNvSpPr/>
+          <p:nvPr/>
+        </p:nvSpPr>
+        <p:spPr>
+          <a:xfrm>
+            <a:off x="640080" y="2304288"/>
+            <a:ext cx="2377440" cy="365760"/>
+          </a:xfrm>
+          <a:prstGeom prst="rect">
+            <a:avLst/>
+          </a:prstGeom>
+          <a:noFill/>
+          <a:ln/>
+        </p:spPr>
+        <p:txBody>
+          <a:bodyPr wrap="square" rtlCol="0" anchor="ctr"/>
+          <a:lstStyle/>
+          <a:p>
+            <a:pPr indent="0" marL="0">
+              <a:buNone/>
+            </a:pPr>
+            <a:r>
+              <a:rPr lang="en-US" sz="1400" b="1" dirty="0">
+                <a:solidFill>
+                  <a:srgbClr val="0052FF"/>
+                </a:solidFill>
+                <a:latin typeface="Arial" pitchFamily="34" charset="0"/>
+                <a:ea typeface="Arial" pitchFamily="34" charset="-122"/>
+                <a:cs typeface="Arial" pitchFamily="34" charset="-120"/>
+              </a:rPr>
+              <a:t>Price chart</a:t>
+            </a:r>
+            <a:endParaRPr lang="en-US" sz="1400" dirty="0"/>
+          </a:p>
+        </p:txBody>
+      </p:sp>
+      <p:sp>
+        <p:nvSpPr>
+          <p:cNvPr id="13" name="Text 11"/>
+          <p:cNvSpPr/>
+          <p:nvPr/>
+        </p:nvSpPr>
+        <p:spPr>
+          <a:xfrm>
+            <a:off x="3108960" y="2304288"/>
+            <a:ext cx="5394960" cy="411480"/>
+          </a:xfrm>
+          <a:prstGeom prst="rect">
+            <a:avLst/>
+          </a:prstGeom>
+          <a:noFill/>
+          <a:ln/>
+        </p:spPr>
+        <p:txBody>
+          <a:bodyPr wrap="square" rtlCol="0" anchor="ctr"/>
+          <a:lstStyle/>
+          <a:p>
+            <a:pPr indent="0" marL="0">
+              <a:buNone/>
+            </a:pPr>
+            <a:r>
+              <a:rPr lang="en-US" sz="1300" dirty="0">
+                <a:solidFill>
+                  <a:srgbClr val="52525B"/>
+                </a:solidFill>
+                <a:latin typeface="Arial" pitchFamily="34" charset="0"/>
+                <a:ea typeface="Arial" pitchFamily="34" charset="-122"/>
+                <a:cs typeface="Arial" pitchFamily="34" charset="-120"/>
+              </a:rPr>
+              <a:t>Full-history chart with buy/sell marks — secondary context, not the main product.</a:t>
+            </a:r>
+            <a:endParaRPr lang="en-US" sz="1300" dirty="0"/>
+          </a:p>
+        </p:txBody>
+      </p:sp>
+      <p:sp>
+        <p:nvSpPr>
+          <p:cNvPr id="14" name="Shape 12"/>
+          <p:cNvSpPr/>
+          <p:nvPr/>
+        </p:nvSpPr>
+        <p:spPr>
+          <a:xfrm>
+            <a:off x="457200" y="2880360"/>
+            <a:ext cx="8229600" cy="594360"/>
+          </a:xfrm>
+          <a:prstGeom prst="roundRect">
+            <a:avLst>
+              <a:gd name="adj" fmla="val 12308"/>
+            </a:avLst>
+          </a:prstGeom>
+          <a:solidFill>
+            <a:srgbClr val="EEF2FF"/>
+          </a:solidFill>
+          <a:ln/>
+        </p:spPr>
+      </p:sp>
+      <p:sp>
+        <p:nvSpPr>
+          <p:cNvPr id="15" name="Text 13"/>
+          <p:cNvSpPr/>
+          <p:nvPr/>
+        </p:nvSpPr>
+        <p:spPr>
+          <a:xfrm>
+            <a:off x="640080" y="2990088"/>
+            <a:ext cx="2377440" cy="365760"/>
+          </a:xfrm>
+          <a:prstGeom prst="rect">
+            <a:avLst/>
+          </a:prstGeom>
+          <a:noFill/>
+          <a:ln/>
+        </p:spPr>
+        <p:txBody>
+          <a:bodyPr wrap="square" rtlCol="0" anchor="ctr"/>
+          <a:lstStyle/>
+          <a:p>
+            <a:pPr indent="0" marL="0">
+              <a:buNone/>
+            </a:pPr>
+            <a:r>
+              <a:rPr lang="en-US" sz="1400" b="1" dirty="0">
+                <a:solidFill>
+                  <a:srgbClr val="0052FF"/>
+                </a:solidFill>
+                <a:latin typeface="Arial" pitchFamily="34" charset="0"/>
+                <a:ea typeface="Arial" pitchFamily="34" charset="-122"/>
+                <a:cs typeface="Arial" pitchFamily="34" charset="-120"/>
+              </a:rPr>
+              <a:t>Prediction markets</a:t>
+            </a:r>
+            <a:endParaRPr lang="en-US" sz="1400" dirty="0"/>
+          </a:p>
+        </p:txBody>
+      </p:sp>
+      <p:sp>
+        <p:nvSpPr>
+          <p:cNvPr id="16" name="Text 14"/>
+          <p:cNvSpPr/>
+          <p:nvPr/>
+        </p:nvSpPr>
+        <p:spPr>
+          <a:xfrm>
+            <a:off x="3108960" y="2990088"/>
+            <a:ext cx="5394960" cy="411480"/>
+          </a:xfrm>
+          <a:prstGeom prst="rect">
+            <a:avLst/>
+          </a:prstGeom>
+          <a:noFill/>
+          <a:ln/>
+        </p:spPr>
+        <p:txBody>
+          <a:bodyPr wrap="square" rtlCol="0" anchor="ctr"/>
+          <a:lstStyle/>
+          <a:p>
+            <a:pPr indent="0" marL="0">
+              <a:buNone/>
+            </a:pPr>
+            <a:r>
+              <a:rPr lang="en-US" sz="1300" dirty="0">
+                <a:solidFill>
+                  <a:srgbClr val="52525B"/>
+                </a:solidFill>
+                <a:latin typeface="Arial" pitchFamily="34" charset="0"/>
+                <a:ea typeface="Arial" pitchFamily="34" charset="-122"/>
+                <a:cs typeface="Arial" pitchFamily="34" charset="-120"/>
+              </a:rPr>
+              <a:t>Side context cards (company / macro-style questions).</a:t>
+            </a:r>
+            <a:endParaRPr lang="en-US" sz="1300" dirty="0"/>
+          </a:p>
+        </p:txBody>
+      </p:sp>
+      <p:sp>
+        <p:nvSpPr>
+          <p:cNvPr id="17" name="Shape 15"/>
+          <p:cNvSpPr/>
+          <p:nvPr/>
+        </p:nvSpPr>
+        <p:spPr>
+          <a:xfrm>
+            <a:off x="457200" y="3566160"/>
+            <a:ext cx="8229600" cy="594360"/>
+          </a:xfrm>
+          <a:prstGeom prst="roundRect">
+            <a:avLst>
+              <a:gd name="adj" fmla="val 12308"/>
+            </a:avLst>
+          </a:prstGeom>
+          <a:solidFill>
+            <a:srgbClr val="FFFFFF"/>
+          </a:solidFill>
+          <a:ln/>
+        </p:spPr>
+      </p:sp>
+      <p:sp>
+        <p:nvSpPr>
+          <p:cNvPr id="18" name="Text 16"/>
+          <p:cNvSpPr/>
+          <p:nvPr/>
+        </p:nvSpPr>
+        <p:spPr>
+          <a:xfrm>
+            <a:off x="640080" y="3675888"/>
+            <a:ext cx="2377440" cy="365760"/>
+          </a:xfrm>
+          <a:prstGeom prst="rect">
+            <a:avLst/>
+          </a:prstGeom>
+          <a:noFill/>
+          <a:ln/>
+        </p:spPr>
+        <p:txBody>
+          <a:bodyPr wrap="square" rtlCol="0" anchor="ctr"/>
+          <a:lstStyle/>
+          <a:p>
+            <a:pPr indent="0" marL="0">
+              <a:buNone/>
+            </a:pPr>
+            <a:r>
+              <a:rPr lang="en-US" sz="1400" b="1" dirty="0">
+                <a:solidFill>
+                  <a:srgbClr val="0052FF"/>
+                </a:solidFill>
+                <a:latin typeface="Arial" pitchFamily="34" charset="0"/>
+                <a:ea typeface="Arial" pitchFamily="34" charset="-122"/>
+                <a:cs typeface="Arial" pitchFamily="34" charset="-120"/>
+              </a:rPr>
+              <a:t>PDF &amp; library</a:t>
+            </a:r>
+            <a:endParaRPr lang="en-US" sz="1400" dirty="0"/>
+          </a:p>
+        </p:txBody>
+      </p:sp>
+      <p:sp>
+        <p:nvSpPr>
+          <p:cNvPr id="19" name="Text 17"/>
+          <p:cNvSpPr/>
+          <p:nvPr/>
+        </p:nvSpPr>
+        <p:spPr>
+          <a:xfrm>
+            <a:off x="3108960" y="3675888"/>
+            <a:ext cx="5394960" cy="411480"/>
+          </a:xfrm>
+          <a:prstGeom prst="rect">
+            <a:avLst/>
+          </a:prstGeom>
+          <a:noFill/>
+          <a:ln/>
+        </p:spPr>
+        <p:txBody>
+          <a:bodyPr wrap="square" rtlCol="0" anchor="ctr"/>
+          <a:lstStyle/>
+          <a:p>
+            <a:pPr indent="0" marL="0">
+              <a:buNone/>
+            </a:pPr>
+            <a:r>
+              <a:rPr lang="en-US" sz="1300" dirty="0">
+                <a:solidFill>
+                  <a:srgbClr val="52525B"/>
+                </a:solidFill>
+                <a:latin typeface="Arial" pitchFamily="34" charset="0"/>
+                <a:ea typeface="Arial" pitchFamily="34" charset="-122"/>
+                <a:cs typeface="Arial" pitchFamily="34" charset="-120"/>
+              </a:rPr>
+              <a:t>Download PDF; re-open saved reports anytime from Your reports.</a:t>
+            </a:r>
+            <a:endParaRPr lang="en-US" sz="1300" dirty="0"/>
+          </a:p>
+        </p:txBody>
+      </p:sp>
+      <p:sp>
+        <p:nvSpPr>
+          <p:cNvPr id="20" name="Text 18"/>
           <p:cNvSpPr/>
           <p:nvPr/>
         </p:nvSpPr>
         <p:spPr>
           <a:xfrm>
             <a:off x="457200" y="4709160"/>
-            <a:ext cx="6400800" cy="256032"/>
+            <a:ext cx="6583680" cy="256032"/>
           </a:xfrm>
           <a:prstGeom prst="rect">
             <a:avLst/>
@@ -2247,7 +2902,7 @@
                 <a:ea typeface="Arial" pitchFamily="34" charset="-122"/>
                 <a:cs typeface="Arial" pitchFamily="34" charset="-120"/>
               </a:rPr>
-              <a:t>BasedMarketLab · Built on Base</a:t>
+              <a:t>BasedMarketLab · Built on Base · Closed product</a:t>
             </a:r>
             <a:endParaRPr lang="en-US" sz="1000" dirty="0"/>
           </a:p>
@@ -2255,7 +2910,7 @@
       </p:sp>
       <p:sp>
         <p:nvSpPr>
-          <p:cNvPr id="8" name="Text 5"/>
+          <p:cNvPr id="21" name="Text 19"/>
           <p:cNvSpPr/>
           <p:nvPr/>
         </p:nvSpPr>
@@ -2286,7 +2941,7 @@
                 <a:ea typeface="Arial" pitchFamily="34" charset="-122"/>
                 <a:cs typeface="Arial" pitchFamily="34" charset="-120"/>
               </a:rPr>
-              <a:t>10 / 12</a:t>
+              <a:t>10 / 14</a:t>
             </a:r>
             <a:endParaRPr lang="en-US" sz="1000" dirty="0"/>
           </a:p>
@@ -2370,24 +3025,24 @@
         </p:nvSpPr>
         <p:spPr>
           <a:xfrm>
-            <a:off x="457200" y="274320"/>
-            <a:ext cx="8229600" cy="365760"/>
-          </a:xfrm>
-          <a:prstGeom prst="rect">
-            <a:avLst/>
-          </a:prstGeom>
-          <a:noFill/>
-          <a:ln/>
-        </p:spPr>
-        <p:txBody>
-          <a:bodyPr wrap="square" rtlCol="0" anchor="ctr"/>
-          <a:lstStyle/>
-          <a:p>
-            <a:pPr indent="0" marL="0">
-              <a:buNone/>
-            </a:pPr>
-            <a:r>
-              <a:rPr lang="en-US" sz="2600" b="1" dirty="0">
+            <a:off x="457200" y="201168"/>
+            <a:ext cx="5943600" cy="292608"/>
+          </a:xfrm>
+          <a:prstGeom prst="rect">
+            <a:avLst/>
+          </a:prstGeom>
+          <a:noFill/>
+          <a:ln/>
+        </p:spPr>
+        <p:txBody>
+          <a:bodyPr wrap="square" rtlCol="0" anchor="ctr"/>
+          <a:lstStyle/>
+          <a:p>
+            <a:pPr indent="0" marL="0">
+              <a:buNone/>
+            </a:pPr>
+            <a:r>
+              <a:rPr lang="en-US" sz="2000" b="1" dirty="0">
                 <a:solidFill>
                   <a:srgbClr val="18181B"/>
                 </a:solidFill>
@@ -2395,95 +3050,34 @@
                 <a:ea typeface="Arial" pitchFamily="34" charset="-122"/>
                 <a:cs typeface="Arial" pitchFamily="34" charset="-120"/>
               </a:rPr>
-              <a:t>Under the hood</a:t>
-            </a:r>
-            <a:endParaRPr lang="en-US" sz="2600" dirty="0"/>
-          </a:p>
-        </p:txBody>
-      </p:sp>
-      <p:sp>
-        <p:nvSpPr>
-          <p:cNvPr id="5" name="Shape 3"/>
-          <p:cNvSpPr/>
-          <p:nvPr/>
-        </p:nvSpPr>
-        <p:spPr>
-          <a:xfrm>
-            <a:off x="411480" y="1005840"/>
-            <a:ext cx="2011680" cy="2011680"/>
-          </a:xfrm>
-          <a:prstGeom prst="roundRect">
-            <a:avLst>
-              <a:gd name="adj" fmla="val 4545"/>
-            </a:avLst>
-          </a:prstGeom>
-          <a:solidFill>
-            <a:srgbClr val="FFFFFF"/>
-          </a:solidFill>
-          <a:ln/>
-        </p:spPr>
-      </p:sp>
-      <p:sp>
-        <p:nvSpPr>
-          <p:cNvPr id="6" name="Text 4"/>
-          <p:cNvSpPr/>
-          <p:nvPr/>
-        </p:nvSpPr>
-        <p:spPr>
-          <a:xfrm>
-            <a:off x="521208" y="1234440"/>
-            <a:ext cx="1783080" cy="365760"/>
-          </a:xfrm>
-          <a:prstGeom prst="rect">
-            <a:avLst/>
-          </a:prstGeom>
-          <a:noFill/>
-          <a:ln/>
-        </p:spPr>
-        <p:txBody>
-          <a:bodyPr wrap="square" rtlCol="0" anchor="ctr"/>
-          <a:lstStyle/>
-          <a:p>
-            <a:pPr algn="ctr" indent="0" marL="0">
-              <a:buNone/>
-            </a:pPr>
-            <a:r>
-              <a:rPr lang="en-US" sz="1400" b="1" dirty="0">
-                <a:solidFill>
-                  <a:srgbClr val="0052FF"/>
-                </a:solidFill>
-                <a:latin typeface="Arial" pitchFamily="34" charset="0"/>
-                <a:ea typeface="Arial" pitchFamily="34" charset="-122"/>
-                <a:cs typeface="Arial" pitchFamily="34" charset="-120"/>
-              </a:rPr>
-              <a:t>Browser UI</a:t>
-            </a:r>
-            <a:endParaRPr lang="en-US" sz="1400" dirty="0"/>
-          </a:p>
-        </p:txBody>
-      </p:sp>
-      <p:sp>
-        <p:nvSpPr>
-          <p:cNvPr id="7" name="Text 5"/>
-          <p:cNvSpPr/>
-          <p:nvPr/>
-        </p:nvSpPr>
-        <p:spPr>
-          <a:xfrm>
-            <a:off x="521208" y="1737360"/>
-            <a:ext cx="1783080" cy="1005840"/>
-          </a:xfrm>
-          <a:prstGeom prst="rect">
-            <a:avLst/>
-          </a:prstGeom>
-          <a:noFill/>
-          <a:ln/>
-        </p:spPr>
-        <p:txBody>
-          <a:bodyPr wrap="square" rtlCol="0" anchor="ctr"/>
-          <a:lstStyle/>
-          <a:p>
-            <a:pPr algn="ctr" indent="0" marL="0">
+              <a:t>Sample report — Company tab</a:t>
+            </a:r>
+            <a:endParaRPr lang="en-US" sz="2000" dirty="0"/>
+          </a:p>
+        </p:txBody>
+      </p:sp>
+      <p:sp>
+        <p:nvSpPr>
+          <p:cNvPr id="5" name="Text 3"/>
+          <p:cNvSpPr/>
+          <p:nvPr/>
+        </p:nvSpPr>
+        <p:spPr>
+          <a:xfrm>
+            <a:off x="457200" y="475488"/>
+            <a:ext cx="8229600" cy="228600"/>
+          </a:xfrm>
+          <a:prstGeom prst="rect">
+            <a:avLst/>
+          </a:prstGeom>
+          <a:noFill/>
+          <a:ln/>
+        </p:spPr>
+        <p:txBody>
+          <a:bodyPr wrap="square" rtlCol="0" anchor="ctr"/>
+          <a:lstStyle/>
+          <a:p>
+            <a:pPr indent="0" marL="0">
               <a:buNone/>
             </a:pPr>
             <a:r>
@@ -2495,598 +3089,45 @@
                 <a:ea typeface="Arial" pitchFamily="34" charset="-122"/>
                 <a:cs typeface="Arial" pitchFamily="34" charset="-120"/>
               </a:rPr>
-              <a:t>static/index.html</a:t>
+              <a:t>Bottom line · business · strengths / watch-outs · market phase</a:t>
             </a:r>
             <a:endParaRPr lang="en-US" sz="1200" dirty="0"/>
           </a:p>
-          <a:p>
-            <a:pPr algn="ctr" indent="0" marL="0">
-              <a:buNone/>
-            </a:pPr>
-            <a:r>
-              <a:rPr lang="en-US" sz="1200" dirty="0">
-                <a:solidFill>
-                  <a:srgbClr val="52525B"/>
-                </a:solidFill>
-                <a:latin typeface="Arial" pitchFamily="34" charset="0"/>
-                <a:ea typeface="Arial" pitchFamily="34" charset="-122"/>
-                <a:cs typeface="Arial" pitchFamily="34" charset="-120"/>
-              </a:rPr>
-              <a:t>Wallet connect, tabs, PDF</a:t>
-            </a:r>
-            <a:endParaRPr lang="en-US" sz="1200" dirty="0"/>
-          </a:p>
-        </p:txBody>
-      </p:sp>
-      <p:sp>
-        <p:nvSpPr>
-          <p:cNvPr id="8" name="Text 6"/>
-          <p:cNvSpPr/>
-          <p:nvPr/>
-        </p:nvSpPr>
-        <p:spPr>
-          <a:xfrm>
-            <a:off x="2286000" y="1783080"/>
-            <a:ext cx="320040" cy="365760"/>
-          </a:xfrm>
-          <a:prstGeom prst="rect">
-            <a:avLst/>
-          </a:prstGeom>
-          <a:noFill/>
-          <a:ln/>
-        </p:spPr>
-        <p:txBody>
-          <a:bodyPr wrap="square" rtlCol="0" anchor="ctr"/>
-          <a:lstStyle/>
-          <a:p>
-            <a:pPr indent="0" marL="0">
-              <a:buNone/>
-            </a:pPr>
-            <a:r>
-              <a:rPr lang="en-US" sz="1800" b="1" dirty="0">
-                <a:solidFill>
-                  <a:srgbClr val="0052FF"/>
-                </a:solidFill>
-              </a:rPr>
-              <a:t>→</a:t>
-            </a:r>
-            <a:endParaRPr lang="en-US" sz="1800" dirty="0"/>
-          </a:p>
-        </p:txBody>
-      </p:sp>
-      <p:sp>
-        <p:nvSpPr>
-          <p:cNvPr id="9" name="Shape 7"/>
-          <p:cNvSpPr/>
-          <p:nvPr/>
-        </p:nvSpPr>
-        <p:spPr>
-          <a:xfrm>
-            <a:off x="2606040" y="1005840"/>
-            <a:ext cx="2011680" cy="2011680"/>
-          </a:xfrm>
-          <a:prstGeom prst="roundRect">
-            <a:avLst>
-              <a:gd name="adj" fmla="val 4545"/>
-            </a:avLst>
-          </a:prstGeom>
-          <a:solidFill>
-            <a:srgbClr val="FFFFFF"/>
-          </a:solidFill>
-          <a:ln/>
-        </p:spPr>
-      </p:sp>
-      <p:sp>
-        <p:nvSpPr>
-          <p:cNvPr id="10" name="Text 8"/>
-          <p:cNvSpPr/>
-          <p:nvPr/>
-        </p:nvSpPr>
-        <p:spPr>
-          <a:xfrm>
-            <a:off x="2715768" y="1234440"/>
-            <a:ext cx="1783080" cy="365760"/>
-          </a:xfrm>
-          <a:prstGeom prst="rect">
-            <a:avLst/>
-          </a:prstGeom>
-          <a:noFill/>
-          <a:ln/>
-        </p:spPr>
-        <p:txBody>
-          <a:bodyPr wrap="square" rtlCol="0" anchor="ctr"/>
-          <a:lstStyle/>
-          <a:p>
-            <a:pPr algn="ctr" indent="0" marL="0">
-              <a:buNone/>
-            </a:pPr>
-            <a:r>
-              <a:rPr lang="en-US" sz="1400" b="1" dirty="0">
-                <a:solidFill>
-                  <a:srgbClr val="0052FF"/>
-                </a:solidFill>
-                <a:latin typeface="Arial" pitchFamily="34" charset="0"/>
-                <a:ea typeface="Arial" pitchFamily="34" charset="-122"/>
-                <a:cs typeface="Arial" pitchFamily="34" charset="-120"/>
-              </a:rPr>
-              <a:t>Local server</a:t>
-            </a:r>
-            <a:endParaRPr lang="en-US" sz="1400" dirty="0"/>
-          </a:p>
-        </p:txBody>
-      </p:sp>
-      <p:sp>
-        <p:nvSpPr>
-          <p:cNvPr id="11" name="Text 9"/>
-          <p:cNvSpPr/>
-          <p:nvPr/>
-        </p:nvSpPr>
-        <p:spPr>
-          <a:xfrm>
-            <a:off x="2715768" y="1737360"/>
-            <a:ext cx="1783080" cy="1005840"/>
-          </a:xfrm>
-          <a:prstGeom prst="rect">
-            <a:avLst/>
-          </a:prstGeom>
-          <a:noFill/>
-          <a:ln/>
-        </p:spPr>
-        <p:txBody>
-          <a:bodyPr wrap="square" rtlCol="0" anchor="ctr"/>
-          <a:lstStyle/>
-          <a:p>
-            <a:pPr algn="ctr" indent="0" marL="0">
-              <a:buNone/>
-            </a:pPr>
-            <a:r>
-              <a:rPr lang="en-US" sz="1200" dirty="0">
-                <a:solidFill>
-                  <a:srgbClr val="52525B"/>
-                </a:solidFill>
-                <a:latin typeface="Arial" pitchFamily="34" charset="0"/>
-                <a:ea typeface="Arial" pitchFamily="34" charset="-122"/>
-                <a:cs typeface="Arial" pitchFamily="34" charset="-120"/>
-              </a:rPr>
-              <a:t>Python FastAPI</a:t>
-            </a:r>
-            <a:endParaRPr lang="en-US" sz="1200" dirty="0"/>
-          </a:p>
-          <a:p>
-            <a:pPr algn="ctr" indent="0" marL="0">
-              <a:buNone/>
-            </a:pPr>
-            <a:r>
-              <a:rPr lang="en-US" sz="1200" dirty="0">
-                <a:solidFill>
-                  <a:srgbClr val="52525B"/>
-                </a:solidFill>
-                <a:latin typeface="Arial" pitchFamily="34" charset="0"/>
-                <a:ea typeface="Arial" pitchFamily="34" charset="-122"/>
-                <a:cs typeface="Arial" pitchFamily="34" charset="-120"/>
-              </a:rPr>
-              <a:t>Prep · seal · generate · pay</a:t>
-            </a:r>
-            <a:endParaRPr lang="en-US" sz="1200" dirty="0"/>
-          </a:p>
-        </p:txBody>
-      </p:sp>
-      <p:sp>
-        <p:nvSpPr>
-          <p:cNvPr id="12" name="Text 10"/>
-          <p:cNvSpPr/>
-          <p:nvPr/>
-        </p:nvSpPr>
-        <p:spPr>
-          <a:xfrm>
-            <a:off x="4480560" y="1783080"/>
-            <a:ext cx="320040" cy="365760"/>
-          </a:xfrm>
-          <a:prstGeom prst="rect">
-            <a:avLst/>
-          </a:prstGeom>
-          <a:noFill/>
-          <a:ln/>
-        </p:spPr>
-        <p:txBody>
-          <a:bodyPr wrap="square" rtlCol="0" anchor="ctr"/>
-          <a:lstStyle/>
-          <a:p>
-            <a:pPr indent="0" marL="0">
-              <a:buNone/>
-            </a:pPr>
-            <a:r>
-              <a:rPr lang="en-US" sz="1800" b="1" dirty="0">
-                <a:solidFill>
-                  <a:srgbClr val="0052FF"/>
-                </a:solidFill>
-              </a:rPr>
-              <a:t>→</a:t>
-            </a:r>
-            <a:endParaRPr lang="en-US" sz="1800" dirty="0"/>
-          </a:p>
-        </p:txBody>
-      </p:sp>
-      <p:sp>
-        <p:nvSpPr>
-          <p:cNvPr id="13" name="Shape 11"/>
-          <p:cNvSpPr/>
-          <p:nvPr/>
-        </p:nvSpPr>
-        <p:spPr>
-          <a:xfrm>
-            <a:off x="4800600" y="1005840"/>
-            <a:ext cx="2011680" cy="2011680"/>
-          </a:xfrm>
-          <a:prstGeom prst="roundRect">
-            <a:avLst>
-              <a:gd name="adj" fmla="val 4545"/>
-            </a:avLst>
-          </a:prstGeom>
-          <a:solidFill>
-            <a:srgbClr val="FFFFFF"/>
-          </a:solidFill>
-          <a:ln/>
-        </p:spPr>
-      </p:sp>
-      <p:sp>
-        <p:nvSpPr>
-          <p:cNvPr id="14" name="Text 12"/>
-          <p:cNvSpPr/>
-          <p:nvPr/>
-        </p:nvSpPr>
-        <p:spPr>
-          <a:xfrm>
-            <a:off x="4910328" y="1234440"/>
-            <a:ext cx="1783080" cy="365760"/>
-          </a:xfrm>
-          <a:prstGeom prst="rect">
-            <a:avLst/>
-          </a:prstGeom>
-          <a:noFill/>
-          <a:ln/>
-        </p:spPr>
-        <p:txBody>
-          <a:bodyPr wrap="square" rtlCol="0" anchor="ctr"/>
-          <a:lstStyle/>
-          <a:p>
-            <a:pPr algn="ctr" indent="0" marL="0">
-              <a:buNone/>
-            </a:pPr>
-            <a:r>
-              <a:rPr lang="en-US" sz="1400" b="1" dirty="0">
-                <a:solidFill>
-                  <a:srgbClr val="0052FF"/>
-                </a:solidFill>
-                <a:latin typeface="Arial" pitchFamily="34" charset="0"/>
-                <a:ea typeface="Arial" pitchFamily="34" charset="-122"/>
-                <a:cs typeface="Arial" pitchFamily="34" charset="-120"/>
-              </a:rPr>
-              <a:t>Research</a:t>
-            </a:r>
-            <a:endParaRPr lang="en-US" sz="1400" dirty="0"/>
-          </a:p>
-        </p:txBody>
-      </p:sp>
-      <p:sp>
-        <p:nvSpPr>
-          <p:cNvPr id="15" name="Text 13"/>
-          <p:cNvSpPr/>
-          <p:nvPr/>
-        </p:nvSpPr>
-        <p:spPr>
-          <a:xfrm>
-            <a:off x="4910328" y="1737360"/>
-            <a:ext cx="1783080" cy="1005840"/>
-          </a:xfrm>
-          <a:prstGeom prst="rect">
-            <a:avLst/>
-          </a:prstGeom>
-          <a:noFill/>
-          <a:ln/>
-        </p:spPr>
-        <p:txBody>
-          <a:bodyPr wrap="square" rtlCol="0" anchor="ctr"/>
-          <a:lstStyle/>
-          <a:p>
-            <a:pPr algn="ctr" indent="0" marL="0">
-              <a:buNone/>
-            </a:pPr>
-            <a:r>
-              <a:rPr lang="en-US" sz="1200" dirty="0">
-                <a:solidFill>
-                  <a:srgbClr val="52525B"/>
-                </a:solidFill>
-                <a:latin typeface="Arial" pitchFamily="34" charset="0"/>
-                <a:ea typeface="Arial" pitchFamily="34" charset="-122"/>
-                <a:cs typeface="Arial" pitchFamily="34" charset="-120"/>
-              </a:rPr>
-              <a:t>Web feeds and/or</a:t>
-            </a:r>
-            <a:endParaRPr lang="en-US" sz="1200" dirty="0"/>
-          </a:p>
-          <a:p>
-            <a:pPr algn="ctr" indent="0" marL="0">
-              <a:buNone/>
-            </a:pPr>
-            <a:r>
-              <a:rPr lang="en-US" sz="1200" dirty="0">
-                <a:solidFill>
-                  <a:srgbClr val="52525B"/>
-                </a:solidFill>
-                <a:latin typeface="Arial" pitchFamily="34" charset="0"/>
-                <a:ea typeface="Arial" pitchFamily="34" charset="-122"/>
-                <a:cs typeface="Arial" pitchFamily="34" charset="-120"/>
-              </a:rPr>
-              <a:t>BYO AI (Gemini, Groq…)</a:t>
-            </a:r>
-            <a:endParaRPr lang="en-US" sz="1200" dirty="0"/>
-          </a:p>
-        </p:txBody>
-      </p:sp>
-      <p:sp>
-        <p:nvSpPr>
-          <p:cNvPr id="16" name="Text 14"/>
-          <p:cNvSpPr/>
-          <p:nvPr/>
-        </p:nvSpPr>
-        <p:spPr>
-          <a:xfrm>
-            <a:off x="6675120" y="1783080"/>
-            <a:ext cx="320040" cy="365760"/>
-          </a:xfrm>
-          <a:prstGeom prst="rect">
-            <a:avLst/>
-          </a:prstGeom>
-          <a:noFill/>
-          <a:ln/>
-        </p:spPr>
-        <p:txBody>
-          <a:bodyPr wrap="square" rtlCol="0" anchor="ctr"/>
-          <a:lstStyle/>
-          <a:p>
-            <a:pPr indent="0" marL="0">
-              <a:buNone/>
-            </a:pPr>
-            <a:r>
-              <a:rPr lang="en-US" sz="1800" b="1" dirty="0">
-                <a:solidFill>
-                  <a:srgbClr val="0052FF"/>
-                </a:solidFill>
-              </a:rPr>
-              <a:t>→</a:t>
-            </a:r>
-            <a:endParaRPr lang="en-US" sz="1800" dirty="0"/>
-          </a:p>
-        </p:txBody>
-      </p:sp>
-      <p:sp>
-        <p:nvSpPr>
-          <p:cNvPr id="17" name="Shape 15"/>
-          <p:cNvSpPr/>
-          <p:nvPr/>
-        </p:nvSpPr>
-        <p:spPr>
-          <a:xfrm>
-            <a:off x="6995160" y="1005840"/>
-            <a:ext cx="2011680" cy="2011680"/>
-          </a:xfrm>
-          <a:prstGeom prst="roundRect">
-            <a:avLst>
-              <a:gd name="adj" fmla="val 4545"/>
-            </a:avLst>
-          </a:prstGeom>
-          <a:solidFill>
-            <a:srgbClr val="0A0B0D"/>
-          </a:solidFill>
-          <a:ln/>
-        </p:spPr>
-      </p:sp>
-      <p:sp>
-        <p:nvSpPr>
-          <p:cNvPr id="18" name="Text 16"/>
-          <p:cNvSpPr/>
-          <p:nvPr/>
-        </p:nvSpPr>
-        <p:spPr>
-          <a:xfrm>
-            <a:off x="7104888" y="1234440"/>
-            <a:ext cx="1783080" cy="365760"/>
-          </a:xfrm>
-          <a:prstGeom prst="rect">
-            <a:avLst/>
-          </a:prstGeom>
-          <a:noFill/>
-          <a:ln/>
-        </p:spPr>
-        <p:txBody>
-          <a:bodyPr wrap="square" rtlCol="0" anchor="ctr"/>
-          <a:lstStyle/>
-          <a:p>
-            <a:pPr algn="ctr" indent="0" marL="0">
-              <a:buNone/>
-            </a:pPr>
-            <a:r>
-              <a:rPr lang="en-US" sz="1400" b="1" dirty="0">
-                <a:solidFill>
-                  <a:srgbClr val="FFFFFF"/>
-                </a:solidFill>
-                <a:latin typeface="Arial" pitchFamily="34" charset="0"/>
-                <a:ea typeface="Arial" pitchFamily="34" charset="-122"/>
-                <a:cs typeface="Arial" pitchFamily="34" charset="-120"/>
-              </a:rPr>
-              <a:t>Base</a:t>
-            </a:r>
-            <a:endParaRPr lang="en-US" sz="1400" dirty="0"/>
-          </a:p>
-        </p:txBody>
-      </p:sp>
-      <p:sp>
-        <p:nvSpPr>
-          <p:cNvPr id="19" name="Text 17"/>
-          <p:cNvSpPr/>
-          <p:nvPr/>
-        </p:nvSpPr>
-        <p:spPr>
-          <a:xfrm>
-            <a:off x="7104888" y="1737360"/>
-            <a:ext cx="1783080" cy="1005840"/>
-          </a:xfrm>
-          <a:prstGeom prst="rect">
-            <a:avLst/>
-          </a:prstGeom>
-          <a:noFill/>
-          <a:ln/>
-        </p:spPr>
-        <p:txBody>
-          <a:bodyPr wrap="square" rtlCol="0" anchor="ctr"/>
-          <a:lstStyle/>
-          <a:p>
-            <a:pPr algn="ctr" indent="0" marL="0">
-              <a:buNone/>
-            </a:pPr>
-            <a:r>
-              <a:rPr lang="en-US" sz="1200" dirty="0">
-                <a:solidFill>
-                  <a:srgbClr val="E4E4E7"/>
-                </a:solidFill>
-                <a:latin typeface="Arial" pitchFamily="34" charset="0"/>
-                <a:ea typeface="Arial" pitchFamily="34" charset="-122"/>
-                <a:cs typeface="Arial" pitchFamily="34" charset="-120"/>
-              </a:rPr>
-              <a:t>USDC verify on-chain</a:t>
-            </a:r>
-            <a:endParaRPr lang="en-US" sz="1200" dirty="0"/>
-          </a:p>
-          <a:p>
-            <a:pPr algn="ctr" indent="0" marL="0">
-              <a:buNone/>
-            </a:pPr>
-            <a:r>
-              <a:rPr lang="en-US" sz="1200" dirty="0">
-                <a:solidFill>
-                  <a:srgbClr val="E4E4E7"/>
-                </a:solidFill>
-                <a:latin typeface="Arial" pitchFamily="34" charset="0"/>
-                <a:ea typeface="Arial" pitchFamily="34" charset="-122"/>
-                <a:cs typeface="Arial" pitchFamily="34" charset="-120"/>
-              </a:rPr>
-              <a:t>Base mainnet only</a:t>
-            </a:r>
-            <a:endParaRPr lang="en-US" sz="1200" dirty="0"/>
-          </a:p>
-        </p:txBody>
-      </p:sp>
-      <p:sp>
-        <p:nvSpPr>
-          <p:cNvPr id="20" name="Shape 18"/>
-          <p:cNvSpPr/>
-          <p:nvPr/>
-        </p:nvSpPr>
-        <p:spPr>
-          <a:xfrm>
-            <a:off x="457200" y="3291840"/>
-            <a:ext cx="8229600" cy="1051560"/>
-          </a:xfrm>
-          <a:prstGeom prst="roundRect">
-            <a:avLst>
-              <a:gd name="adj" fmla="val 8696"/>
-            </a:avLst>
-          </a:prstGeom>
-          <a:solidFill>
-            <a:srgbClr val="FFFFFF"/>
-          </a:solidFill>
-          <a:ln/>
-        </p:spPr>
-      </p:sp>
-      <p:sp>
-        <p:nvSpPr>
-          <p:cNvPr id="21" name="Text 19"/>
-          <p:cNvSpPr/>
-          <p:nvPr/>
-        </p:nvSpPr>
-        <p:spPr>
-          <a:xfrm>
-            <a:off x="685800" y="3429000"/>
-            <a:ext cx="7772400" cy="274320"/>
-          </a:xfrm>
-          <a:prstGeom prst="rect">
-            <a:avLst/>
-          </a:prstGeom>
-          <a:noFill/>
-          <a:ln/>
-        </p:spPr>
-        <p:txBody>
-          <a:bodyPr wrap="square" rtlCol="0" anchor="ctr"/>
-          <a:lstStyle/>
-          <a:p>
-            <a:pPr indent="0" marL="0">
-              <a:buNone/>
-            </a:pPr>
-            <a:r>
-              <a:rPr lang="en-US" sz="1300" b="1" dirty="0">
-                <a:solidFill>
-                  <a:srgbClr val="18181B"/>
-                </a:solidFill>
-                <a:latin typeface="Arial" pitchFamily="34" charset="0"/>
-                <a:ea typeface="Arial" pitchFamily="34" charset="-122"/>
-                <a:cs typeface="Arial" pitchFamily="34" charset="-120"/>
-              </a:rPr>
-              <a:t>Key design choices</a:t>
-            </a:r>
-            <a:endParaRPr lang="en-US" sz="1300" dirty="0"/>
-          </a:p>
-        </p:txBody>
-      </p:sp>
-      <p:sp>
-        <p:nvSpPr>
-          <p:cNvPr id="22" name="Text 20"/>
-          <p:cNvSpPr/>
-          <p:nvPr/>
-        </p:nvSpPr>
-        <p:spPr>
-          <a:xfrm>
-            <a:off x="685800" y="3749040"/>
-            <a:ext cx="7772400" cy="457200"/>
-          </a:xfrm>
-          <a:prstGeom prst="rect">
-            <a:avLst/>
-          </a:prstGeom>
-          <a:noFill/>
-          <a:ln/>
-        </p:spPr>
-        <p:txBody>
-          <a:bodyPr wrap="square" rtlCol="0" anchor="ctr"/>
-          <a:lstStyle/>
-          <a:p>
-            <a:pPr indent="0" marL="0">
-              <a:buNone/>
-            </a:pPr>
-            <a:r>
-              <a:rPr lang="en-US" sz="1200" dirty="0">
-                <a:solidFill>
-                  <a:srgbClr val="52525B"/>
-                </a:solidFill>
-                <a:latin typeface="Arial" pitchFamily="34" charset="0"/>
-                <a:ea typeface="Arial" pitchFamily="34" charset="-122"/>
-                <a:cs typeface="Arial" pitchFamily="34" charset="-120"/>
-              </a:rPr>
-              <a:t>AI keys stay with the user · Research prompts stay on the server · $0.10 USDC verified on Base mainnet before unlock · Product source stays private (closed) · GitHub site is presentations only.</a:t>
-            </a:r>
-            <a:endParaRPr lang="en-US" sz="1200" dirty="0"/>
-          </a:p>
-        </p:txBody>
-      </p:sp>
-      <p:sp>
-        <p:nvSpPr>
-          <p:cNvPr id="23" name="Text 21"/>
+        </p:txBody>
+      </p:sp>
+      <p:pic>
+        <p:nvPicPr>
+          <p:cNvPr id="6" name="Image 0" descr="C:\Users\Kevin\OneDrive\Desktop\BasedMarketLab\live\screenshots\101_report_api_top.png">    </p:cNvPr>
+          <p:cNvPicPr>
+            <a:picLocks noChangeAspect="1"/>
+          </p:cNvPicPr>
+          <p:nvPr/>
+        </p:nvPicPr>
+        <p:blipFill>
+          <a:blip r:embed="rId1"/>
+          <a:srcRect l="0" r="0" t="0" b="0"/>
+          <a:stretch/>
+        </p:blipFill>
+        <p:spPr>
+          <a:xfrm>
+            <a:off x="822960" y="777240"/>
+            <a:ext cx="7498080" cy="3611880"/>
+          </a:xfrm>
+          <a:prstGeom prst="rect">
+            <a:avLst/>
+          </a:prstGeom>
+        </p:spPr>
+      </p:pic>
+      <p:sp>
+        <p:nvSpPr>
+          <p:cNvPr id="7" name="Text 4"/>
           <p:cNvSpPr/>
           <p:nvPr/>
         </p:nvSpPr>
         <p:spPr>
           <a:xfrm>
             <a:off x="457200" y="4709160"/>
-            <a:ext cx="6400800" cy="256032"/>
+            <a:ext cx="6583680" cy="256032"/>
           </a:xfrm>
           <a:prstGeom prst="rect">
             <a:avLst/>
@@ -3110,7 +3151,7 @@
                 <a:ea typeface="Arial" pitchFamily="34" charset="-122"/>
                 <a:cs typeface="Arial" pitchFamily="34" charset="-120"/>
               </a:rPr>
-              <a:t>BasedMarketLab · Built on Base</a:t>
+              <a:t>BasedMarketLab · Built on Base · Closed product</a:t>
             </a:r>
             <a:endParaRPr lang="en-US" sz="1000" dirty="0"/>
           </a:p>
@@ -3118,7 +3159,7 @@
       </p:sp>
       <p:sp>
         <p:nvSpPr>
-          <p:cNvPr id="24" name="Text 22"/>
+          <p:cNvPr id="8" name="Text 5"/>
           <p:cNvSpPr/>
           <p:nvPr/>
         </p:nvSpPr>
@@ -3149,7 +3190,7 @@
                 <a:ea typeface="Arial" pitchFamily="34" charset="-122"/>
                 <a:cs typeface="Arial" pitchFamily="34" charset="-120"/>
               </a:rPr>
-              <a:t>11 / 12</a:t>
+              <a:t>11 / 14</a:t>
             </a:r>
             <a:endParaRPr lang="en-US" sz="1000" dirty="0"/>
           </a:p>
@@ -3195,7 +3236,7 @@
             <a:avLst/>
           </a:prstGeom>
           <a:solidFill>
-            <a:srgbClr val="0A0B0D"/>
+            <a:srgbClr val="F4F5F7"/>
           </a:solidFill>
           <a:ln/>
         </p:spPr>
@@ -3209,7 +3250,7 @@
         <p:spPr>
           <a:xfrm>
             <a:off x="0" y="0"/>
-            <a:ext cx="9144000" cy="91440"/>
+            <a:ext cx="9144000" cy="73152"/>
           </a:xfrm>
           <a:prstGeom prst="rect">
             <a:avLst/>
@@ -3217,7 +3258,12 @@
           <a:solidFill>
             <a:srgbClr val="0052FF"/>
           </a:solidFill>
-          <a:ln/>
+          <a:ln w="12700">
+            <a:solidFill>
+              <a:srgbClr val="0052FF"/>
+            </a:solidFill>
+            <a:prstDash val="solid"/>
+          </a:ln>
         </p:spPr>
       </p:sp>
       <p:sp>
@@ -3228,7 +3274,892 @@
         </p:nvSpPr>
         <p:spPr>
           <a:xfrm>
-            <a:off x="640080" y="1371600"/>
+            <a:off x="365760" y="146304"/>
+            <a:ext cx="6858000" cy="256032"/>
+          </a:xfrm>
+          <a:prstGeom prst="rect">
+            <a:avLst/>
+          </a:prstGeom>
+          <a:noFill/>
+          <a:ln/>
+        </p:spPr>
+        <p:txBody>
+          <a:bodyPr wrap="square" rtlCol="0" anchor="ctr"/>
+          <a:lstStyle/>
+          <a:p>
+            <a:pPr indent="0" marL="0">
+              <a:buNone/>
+            </a:pPr>
+            <a:r>
+              <a:rPr lang="en-US" sz="1800" b="1" dirty="0">
+                <a:solidFill>
+                  <a:srgbClr val="18181B"/>
+                </a:solidFill>
+                <a:latin typeface="Arial" pitchFamily="34" charset="0"/>
+                <a:ea typeface="Arial" pitchFamily="34" charset="-122"/>
+                <a:cs typeface="Arial" pitchFamily="34" charset="-120"/>
+              </a:rPr>
+              <a:t>Price chart — context only</a:t>
+            </a:r>
+            <a:endParaRPr lang="en-US" sz="1800" dirty="0"/>
+          </a:p>
+        </p:txBody>
+      </p:sp>
+      <p:sp>
+        <p:nvSpPr>
+          <p:cNvPr id="5" name="Text 3"/>
+          <p:cNvSpPr/>
+          <p:nvPr/>
+        </p:nvSpPr>
+        <p:spPr>
+          <a:xfrm>
+            <a:off x="365760" y="384048"/>
+            <a:ext cx="8229600" cy="201168"/>
+          </a:xfrm>
+          <a:prstGeom prst="rect">
+            <a:avLst/>
+          </a:prstGeom>
+          <a:noFill/>
+          <a:ln/>
+        </p:spPr>
+        <p:txBody>
+          <a:bodyPr wrap="square" rtlCol="0" anchor="ctr"/>
+          <a:lstStyle/>
+          <a:p>
+            <a:pPr indent="0" marL="0">
+              <a:buNone/>
+            </a:pPr>
+            <a:r>
+              <a:rPr lang="en-US" sz="1100" dirty="0">
+                <a:solidFill>
+                  <a:srgbClr val="52525B"/>
+                </a:solidFill>
+                <a:latin typeface="Arial" pitchFamily="34" charset="0"/>
+                <a:ea typeface="Arial" pitchFamily="34" charset="-122"/>
+                <a:cs typeface="Arial" pitchFamily="34" charset="-120"/>
+              </a:rPr>
+              <a:t>Supports the company story — not a day-trading terminal</a:t>
+            </a:r>
+            <a:endParaRPr lang="en-US" sz="1100" dirty="0"/>
+          </a:p>
+        </p:txBody>
+      </p:sp>
+      <p:pic>
+        <p:nvPicPr>
+          <p:cNvPr id="6" name="Image 0" descr="C:\Users\Kevin\OneDrive\Desktop\BasedMarketLab\live\screenshots\pptx_crops\slide10_zoom.png">    </p:cNvPr>
+          <p:cNvPicPr>
+            <a:picLocks noChangeAspect="1"/>
+          </p:cNvPicPr>
+          <p:nvPr/>
+        </p:nvPicPr>
+        <p:blipFill>
+          <a:blip r:embed="rId1"/>
+          <a:srcRect l="0" r="0" t="0" b="0"/>
+          <a:stretch/>
+        </p:blipFill>
+        <p:spPr>
+          <a:xfrm>
+            <a:off x="320040" y="621792"/>
+            <a:ext cx="8503920" cy="3886200"/>
+          </a:xfrm>
+          <a:prstGeom prst="rect">
+            <a:avLst/>
+          </a:prstGeom>
+        </p:spPr>
+      </p:pic>
+      <p:sp>
+        <p:nvSpPr>
+          <p:cNvPr id="7" name="Text 4"/>
+          <p:cNvSpPr/>
+          <p:nvPr/>
+        </p:nvSpPr>
+        <p:spPr>
+          <a:xfrm>
+            <a:off x="457200" y="4709160"/>
+            <a:ext cx="6583680" cy="256032"/>
+          </a:xfrm>
+          <a:prstGeom prst="rect">
+            <a:avLst/>
+          </a:prstGeom>
+          <a:noFill/>
+          <a:ln/>
+        </p:spPr>
+        <p:txBody>
+          <a:bodyPr wrap="square" rtlCol="0" anchor="ctr"/>
+          <a:lstStyle/>
+          <a:p>
+            <a:pPr indent="0" marL="0">
+              <a:buNone/>
+            </a:pPr>
+            <a:r>
+              <a:rPr lang="en-US" sz="1000" dirty="0">
+                <a:solidFill>
+                  <a:srgbClr val="A1A1AA"/>
+                </a:solidFill>
+                <a:latin typeface="Arial" pitchFamily="34" charset="0"/>
+                <a:ea typeface="Arial" pitchFamily="34" charset="-122"/>
+                <a:cs typeface="Arial" pitchFamily="34" charset="-120"/>
+              </a:rPr>
+              <a:t>BasedMarketLab · Built on Base · Closed product</a:t>
+            </a:r>
+            <a:endParaRPr lang="en-US" sz="1000" dirty="0"/>
+          </a:p>
+        </p:txBody>
+      </p:sp>
+      <p:sp>
+        <p:nvSpPr>
+          <p:cNvPr id="8" name="Text 5"/>
+          <p:cNvSpPr/>
+          <p:nvPr/>
+        </p:nvSpPr>
+        <p:spPr>
+          <a:xfrm>
+            <a:off x="7772400" y="4709160"/>
+            <a:ext cx="914400" cy="256032"/>
+          </a:xfrm>
+          <a:prstGeom prst="rect">
+            <a:avLst/>
+          </a:prstGeom>
+          <a:noFill/>
+          <a:ln/>
+        </p:spPr>
+        <p:txBody>
+          <a:bodyPr wrap="square" rtlCol="0" anchor="ctr"/>
+          <a:lstStyle/>
+          <a:p>
+            <a:pPr algn="r" indent="0" marL="0">
+              <a:buNone/>
+            </a:pPr>
+            <a:r>
+              <a:rPr lang="en-US" sz="1000" dirty="0">
+                <a:solidFill>
+                  <a:srgbClr val="A1A1AA"/>
+                </a:solidFill>
+                <a:latin typeface="Arial" pitchFamily="34" charset="0"/>
+                <a:ea typeface="Arial" pitchFamily="34" charset="-122"/>
+                <a:cs typeface="Arial" pitchFamily="34" charset="-120"/>
+              </a:rPr>
+              <a:t>12 / 14</a:t>
+            </a:r>
+            <a:endParaRPr lang="en-US" sz="1000" dirty="0"/>
+          </a:p>
+        </p:txBody>
+      </p:sp>
+    </p:spTree>
+  </p:cSld>
+  <p:clrMapOvr>
+    <a:masterClrMapping/>
+  </p:clrMapOvr>
+</p:sld>
+</file>
+
+<file path=ppt/slides/slide13.xml><?xml version="1.0" encoding="utf-8"?>
+<p:sld xmlns:a="http://schemas.openxmlformats.org/drawingml/2006/main" xmlns:r="http://schemas.openxmlformats.org/officeDocument/2006/relationships" xmlns:p="http://schemas.openxmlformats.org/presentationml/2006/main">
+  <p:cSld name="Slide 13">
+    <p:spTree>
+      <p:nvGrpSpPr>
+        <p:cNvPr id="1" name=""/>
+        <p:cNvGrpSpPr/>
+        <p:nvPr/>
+      </p:nvGrpSpPr>
+      <p:grpSpPr>
+        <a:xfrm>
+          <a:off x="0" y="0"/>
+          <a:ext cx="0" cy="0"/>
+          <a:chOff x="0" y="0"/>
+          <a:chExt cx="0" cy="0"/>
+        </a:xfrm>
+      </p:grpSpPr>
+      <p:sp>
+        <p:nvSpPr>
+          <p:cNvPr id="2" name="Shape 0"/>
+          <p:cNvSpPr/>
+          <p:nvPr/>
+        </p:nvSpPr>
+        <p:spPr>
+          <a:xfrm>
+            <a:off x="0" y="0"/>
+            <a:ext cx="9144000" cy="5143500"/>
+          </a:xfrm>
+          <a:prstGeom prst="rect">
+            <a:avLst/>
+          </a:prstGeom>
+          <a:solidFill>
+            <a:srgbClr val="F4F5F7"/>
+          </a:solidFill>
+          <a:ln/>
+        </p:spPr>
+      </p:sp>
+      <p:sp>
+        <p:nvSpPr>
+          <p:cNvPr id="3" name="Shape 1"/>
+          <p:cNvSpPr/>
+          <p:nvPr/>
+        </p:nvSpPr>
+        <p:spPr>
+          <a:xfrm>
+            <a:off x="0" y="0"/>
+            <a:ext cx="9144000" cy="73152"/>
+          </a:xfrm>
+          <a:prstGeom prst="rect">
+            <a:avLst/>
+          </a:prstGeom>
+          <a:solidFill>
+            <a:srgbClr val="0052FF"/>
+          </a:solidFill>
+          <a:ln w="12700">
+            <a:solidFill>
+              <a:srgbClr val="0052FF"/>
+            </a:solidFill>
+            <a:prstDash val="solid"/>
+          </a:ln>
+        </p:spPr>
+      </p:sp>
+      <p:sp>
+        <p:nvSpPr>
+          <p:cNvPr id="4" name="Text 2"/>
+          <p:cNvSpPr/>
+          <p:nvPr/>
+        </p:nvSpPr>
+        <p:spPr>
+          <a:xfrm>
+            <a:off x="457200" y="274320"/>
+            <a:ext cx="8229600" cy="365760"/>
+          </a:xfrm>
+          <a:prstGeom prst="rect">
+            <a:avLst/>
+          </a:prstGeom>
+          <a:noFill/>
+          <a:ln/>
+        </p:spPr>
+        <p:txBody>
+          <a:bodyPr wrap="square" rtlCol="0" anchor="ctr"/>
+          <a:lstStyle/>
+          <a:p>
+            <a:pPr indent="0" marL="0">
+              <a:buNone/>
+            </a:pPr>
+            <a:r>
+              <a:rPr lang="en-US" sz="2400" b="1" dirty="0">
+                <a:solidFill>
+                  <a:srgbClr val="18181B"/>
+                </a:solidFill>
+                <a:latin typeface="Arial" pitchFamily="34" charset="0"/>
+                <a:ea typeface="Arial" pitchFamily="34" charset="-122"/>
+                <a:cs typeface="Arial" pitchFamily="34" charset="-120"/>
+              </a:rPr>
+              <a:t>Where it runs · closed source</a:t>
+            </a:r>
+            <a:endParaRPr lang="en-US" sz="2400" dirty="0"/>
+          </a:p>
+        </p:txBody>
+      </p:sp>
+      <p:sp>
+        <p:nvSpPr>
+          <p:cNvPr id="5" name="Shape 3"/>
+          <p:cNvSpPr/>
+          <p:nvPr/>
+        </p:nvSpPr>
+        <p:spPr>
+          <a:xfrm>
+            <a:off x="365760" y="960120"/>
+            <a:ext cx="2057400" cy="2286000"/>
+          </a:xfrm>
+          <a:prstGeom prst="roundRect">
+            <a:avLst>
+              <a:gd name="adj" fmla="val 4444"/>
+            </a:avLst>
+          </a:prstGeom>
+          <a:solidFill>
+            <a:srgbClr val="FFFFFF"/>
+          </a:solidFill>
+          <a:ln/>
+        </p:spPr>
+      </p:sp>
+      <p:sp>
+        <p:nvSpPr>
+          <p:cNvPr id="6" name="Text 4"/>
+          <p:cNvSpPr/>
+          <p:nvPr/>
+        </p:nvSpPr>
+        <p:spPr>
+          <a:xfrm>
+            <a:off x="457200" y="1143000"/>
+            <a:ext cx="1874520" cy="411480"/>
+          </a:xfrm>
+          <a:prstGeom prst="rect">
+            <a:avLst/>
+          </a:prstGeom>
+          <a:noFill/>
+          <a:ln/>
+        </p:spPr>
+        <p:txBody>
+          <a:bodyPr wrap="square" rtlCol="0" anchor="ctr"/>
+          <a:lstStyle/>
+          <a:p>
+            <a:pPr algn="ctr" indent="0" marL="0">
+              <a:buNone/>
+            </a:pPr>
+            <a:r>
+              <a:rPr lang="en-US" sz="1300" b="1" dirty="0">
+                <a:solidFill>
+                  <a:srgbClr val="0052FF"/>
+                </a:solidFill>
+                <a:latin typeface="Arial" pitchFamily="34" charset="0"/>
+                <a:ea typeface="Arial" pitchFamily="34" charset="-122"/>
+                <a:cs typeface="Arial" pitchFamily="34" charset="-120"/>
+              </a:rPr>
+              <a:t>Private engine</a:t>
+            </a:r>
+            <a:endParaRPr lang="en-US" sz="1300" dirty="0"/>
+          </a:p>
+        </p:txBody>
+      </p:sp>
+      <p:sp>
+        <p:nvSpPr>
+          <p:cNvPr id="7" name="Text 5"/>
+          <p:cNvSpPr/>
+          <p:nvPr/>
+        </p:nvSpPr>
+        <p:spPr>
+          <a:xfrm>
+            <a:off x="457200" y="1691640"/>
+            <a:ext cx="1874520" cy="1280160"/>
+          </a:xfrm>
+          <a:prstGeom prst="rect">
+            <a:avLst/>
+          </a:prstGeom>
+          <a:noFill/>
+          <a:ln/>
+        </p:spPr>
+        <p:txBody>
+          <a:bodyPr wrap="square" rtlCol="0" anchor="ctr"/>
+          <a:lstStyle/>
+          <a:p>
+            <a:pPr algn="ctr" indent="0" marL="0">
+              <a:buNone/>
+            </a:pPr>
+            <a:r>
+              <a:rPr lang="en-US" sz="1100" dirty="0">
+                <a:solidFill>
+                  <a:srgbClr val="52525B"/>
+                </a:solidFill>
+                <a:latin typeface="Arial" pitchFamily="34" charset="0"/>
+                <a:ea typeface="Arial" pitchFamily="34" charset="-122"/>
+                <a:cs typeface="Arial" pitchFamily="34" charset="-120"/>
+              </a:rPr>
+              <a:t>Python app (private)</a:t>
+            </a:r>
+            <a:endParaRPr lang="en-US" sz="1100" dirty="0"/>
+          </a:p>
+          <a:p>
+            <a:pPr algn="ctr" indent="0" marL="0">
+              <a:buNone/>
+            </a:pPr>
+            <a:r>
+              <a:rPr lang="en-US" sz="1100" dirty="0">
+                <a:solidFill>
+                  <a:srgbClr val="52525B"/>
+                </a:solidFill>
+                <a:latin typeface="Arial" pitchFamily="34" charset="0"/>
+                <a:ea typeface="Arial" pitchFamily="34" charset="-122"/>
+                <a:cs typeface="Arial" pitchFamily="34" charset="-120"/>
+              </a:rPr>
+              <a:t>Vercel proxies HTTPS</a:t>
+            </a:r>
+            <a:endParaRPr lang="en-US" sz="1100" dirty="0"/>
+          </a:p>
+          <a:p>
+            <a:pPr algn="ctr" indent="0" marL="0">
+              <a:buNone/>
+            </a:pPr>
+            <a:r>
+              <a:rPr lang="en-US" sz="1100" dirty="0">
+                <a:solidFill>
+                  <a:srgbClr val="52525B"/>
+                </a:solidFill>
+                <a:latin typeface="Arial" pitchFamily="34" charset="0"/>
+                <a:ea typeface="Arial" pitchFamily="34" charset="-122"/>
+                <a:cs typeface="Arial" pitchFamily="34" charset="-120"/>
+              </a:rPr>
+              <a:t>BasedSettler + SEC</a:t>
+            </a:r>
+            <a:endParaRPr lang="en-US" sz="1100" dirty="0"/>
+          </a:p>
+        </p:txBody>
+      </p:sp>
+      <p:sp>
+        <p:nvSpPr>
+          <p:cNvPr id="8" name="Shape 6"/>
+          <p:cNvSpPr/>
+          <p:nvPr/>
+        </p:nvSpPr>
+        <p:spPr>
+          <a:xfrm>
+            <a:off x="2560320" y="960120"/>
+            <a:ext cx="2057400" cy="2286000"/>
+          </a:xfrm>
+          <a:prstGeom prst="roundRect">
+            <a:avLst>
+              <a:gd name="adj" fmla="val 4444"/>
+            </a:avLst>
+          </a:prstGeom>
+          <a:solidFill>
+            <a:srgbClr val="FFFFFF"/>
+          </a:solidFill>
+          <a:ln/>
+        </p:spPr>
+      </p:sp>
+      <p:sp>
+        <p:nvSpPr>
+          <p:cNvPr id="9" name="Text 7"/>
+          <p:cNvSpPr/>
+          <p:nvPr/>
+        </p:nvSpPr>
+        <p:spPr>
+          <a:xfrm>
+            <a:off x="2651760" y="1143000"/>
+            <a:ext cx="1874520" cy="411480"/>
+          </a:xfrm>
+          <a:prstGeom prst="rect">
+            <a:avLst/>
+          </a:prstGeom>
+          <a:noFill/>
+          <a:ln/>
+        </p:spPr>
+        <p:txBody>
+          <a:bodyPr wrap="square" rtlCol="0" anchor="ctr"/>
+          <a:lstStyle/>
+          <a:p>
+            <a:pPr algn="ctr" indent="0" marL="0">
+              <a:buNone/>
+            </a:pPr>
+            <a:r>
+              <a:rPr lang="en-US" sz="1300" b="1" dirty="0">
+                <a:solidFill>
+                  <a:srgbClr val="0052FF"/>
+                </a:solidFill>
+                <a:latin typeface="Arial" pitchFamily="34" charset="0"/>
+                <a:ea typeface="Arial" pitchFamily="34" charset="-122"/>
+                <a:cs typeface="Arial" pitchFamily="34" charset="-120"/>
+              </a:rPr>
+              <a:t>Vercel (public URL)</a:t>
+            </a:r>
+            <a:endParaRPr lang="en-US" sz="1300" dirty="0"/>
+          </a:p>
+        </p:txBody>
+      </p:sp>
+      <p:sp>
+        <p:nvSpPr>
+          <p:cNvPr id="10" name="Text 8"/>
+          <p:cNvSpPr/>
+          <p:nvPr/>
+        </p:nvSpPr>
+        <p:spPr>
+          <a:xfrm>
+            <a:off x="2651760" y="1691640"/>
+            <a:ext cx="1874520" cy="1280160"/>
+          </a:xfrm>
+          <a:prstGeom prst="rect">
+            <a:avLst/>
+          </a:prstGeom>
+          <a:noFill/>
+          <a:ln/>
+        </p:spPr>
+        <p:txBody>
+          <a:bodyPr wrap="square" rtlCol="0" anchor="ctr"/>
+          <a:lstStyle/>
+          <a:p>
+            <a:pPr algn="ctr" indent="0" marL="0">
+              <a:buNone/>
+            </a:pPr>
+            <a:r>
+              <a:rPr lang="en-US" sz="1100" dirty="0">
+                <a:solidFill>
+                  <a:srgbClr val="52525B"/>
+                </a:solidFill>
+                <a:latin typeface="Arial" pitchFamily="34" charset="0"/>
+                <a:ea typeface="Arial" pitchFamily="34" charset="-122"/>
+                <a:cs typeface="Arial" pitchFamily="34" charset="-120"/>
+              </a:rPr>
+              <a:t>HTTPS + Farcaster</a:t>
+            </a:r>
+            <a:endParaRPr lang="en-US" sz="1100" dirty="0"/>
+          </a:p>
+          <a:p>
+            <a:pPr algn="ctr" indent="0" marL="0">
+              <a:buNone/>
+            </a:pPr>
+            <a:r>
+              <a:rPr lang="en-US" sz="1100" dirty="0">
+                <a:solidFill>
+                  <a:srgbClr val="52525B"/>
+                </a:solidFill>
+                <a:latin typeface="Arial" pitchFamily="34" charset="0"/>
+                <a:ea typeface="Arial" pitchFamily="34" charset="-122"/>
+                <a:cs typeface="Arial" pitchFamily="34" charset="-120"/>
+              </a:rPr>
+              <a:t>Opens straight into app</a:t>
+            </a:r>
+            <a:endParaRPr lang="en-US" sz="1100" dirty="0"/>
+          </a:p>
+          <a:p>
+            <a:pPr algn="ctr" indent="0" marL="0">
+              <a:buNone/>
+            </a:pPr>
+            <a:r>
+              <a:rPr lang="en-US" sz="1100" dirty="0">
+                <a:solidFill>
+                  <a:srgbClr val="52525B"/>
+                </a:solidFill>
+                <a:latin typeface="Arial" pitchFamily="34" charset="0"/>
+                <a:ea typeface="Arial" pitchFamily="34" charset="-122"/>
+                <a:cs typeface="Arial" pitchFamily="34" charset="-120"/>
+              </a:rPr>
+              <a:t>No public source repo</a:t>
+            </a:r>
+            <a:endParaRPr lang="en-US" sz="1100" dirty="0"/>
+          </a:p>
+        </p:txBody>
+      </p:sp>
+      <p:sp>
+        <p:nvSpPr>
+          <p:cNvPr id="11" name="Shape 9"/>
+          <p:cNvSpPr/>
+          <p:nvPr/>
+        </p:nvSpPr>
+        <p:spPr>
+          <a:xfrm>
+            <a:off x="4754880" y="960120"/>
+            <a:ext cx="2057400" cy="2286000"/>
+          </a:xfrm>
+          <a:prstGeom prst="roundRect">
+            <a:avLst>
+              <a:gd name="adj" fmla="val 4444"/>
+            </a:avLst>
+          </a:prstGeom>
+          <a:solidFill>
+            <a:srgbClr val="FFFFFF"/>
+          </a:solidFill>
+          <a:ln/>
+        </p:spPr>
+      </p:sp>
+      <p:sp>
+        <p:nvSpPr>
+          <p:cNvPr id="12" name="Text 10"/>
+          <p:cNvSpPr/>
+          <p:nvPr/>
+        </p:nvSpPr>
+        <p:spPr>
+          <a:xfrm>
+            <a:off x="4846320" y="1143000"/>
+            <a:ext cx="1874520" cy="411480"/>
+          </a:xfrm>
+          <a:prstGeom prst="rect">
+            <a:avLst/>
+          </a:prstGeom>
+          <a:noFill/>
+          <a:ln/>
+        </p:spPr>
+        <p:txBody>
+          <a:bodyPr wrap="square" rtlCol="0" anchor="ctr"/>
+          <a:lstStyle/>
+          <a:p>
+            <a:pPr algn="ctr" indent="0" marL="0">
+              <a:buNone/>
+            </a:pPr>
+            <a:r>
+              <a:rPr lang="en-US" sz="1300" b="1" dirty="0">
+                <a:solidFill>
+                  <a:srgbClr val="0052FF"/>
+                </a:solidFill>
+                <a:latin typeface="Arial" pitchFamily="34" charset="0"/>
+                <a:ea typeface="Arial" pitchFamily="34" charset="-122"/>
+                <a:cs typeface="Arial" pitchFamily="34" charset="-120"/>
+              </a:rPr>
+              <a:t>Farcaster</a:t>
+            </a:r>
+            <a:endParaRPr lang="en-US" sz="1300" dirty="0"/>
+          </a:p>
+        </p:txBody>
+      </p:sp>
+      <p:sp>
+        <p:nvSpPr>
+          <p:cNvPr id="13" name="Text 11"/>
+          <p:cNvSpPr/>
+          <p:nvPr/>
+        </p:nvSpPr>
+        <p:spPr>
+          <a:xfrm>
+            <a:off x="4846320" y="1691640"/>
+            <a:ext cx="1874520" cy="1280160"/>
+          </a:xfrm>
+          <a:prstGeom prst="rect">
+            <a:avLst/>
+          </a:prstGeom>
+          <a:noFill/>
+          <a:ln/>
+        </p:spPr>
+        <p:txBody>
+          <a:bodyPr wrap="square" rtlCol="0" anchor="ctr"/>
+          <a:lstStyle/>
+          <a:p>
+            <a:pPr algn="ctr" indent="0" marL="0">
+              <a:buNone/>
+            </a:pPr>
+            <a:r>
+              <a:rPr lang="en-US" sz="1100" dirty="0">
+                <a:solidFill>
+                  <a:srgbClr val="52525B"/>
+                </a:solidFill>
+                <a:latin typeface="Arial" pitchFamily="34" charset="0"/>
+                <a:ea typeface="Arial" pitchFamily="34" charset="-122"/>
+                <a:cs typeface="Arial" pitchFamily="34" charset="-120"/>
+              </a:rPr>
+              <a:t>Mini App / Frame</a:t>
+            </a:r>
+            <a:endParaRPr lang="en-US" sz="1100" dirty="0"/>
+          </a:p>
+          <a:p>
+            <a:pPr algn="ctr" indent="0" marL="0">
+              <a:buNone/>
+            </a:pPr>
+            <a:r>
+              <a:rPr lang="en-US" sz="1100" dirty="0">
+                <a:solidFill>
+                  <a:srgbClr val="52525B"/>
+                </a:solidFill>
+                <a:latin typeface="Arial" pitchFamily="34" charset="0"/>
+                <a:ea typeface="Arial" pitchFamily="34" charset="-122"/>
+                <a:cs typeface="Arial" pitchFamily="34" charset="-120"/>
+              </a:rPr>
+              <a:t>fc:miniapp meta</a:t>
+            </a:r>
+            <a:endParaRPr lang="en-US" sz="1100" dirty="0"/>
+          </a:p>
+          <a:p>
+            <a:pPr algn="ctr" indent="0" marL="0">
+              <a:buNone/>
+            </a:pPr>
+            <a:r>
+              <a:rPr lang="en-US" sz="1100" dirty="0">
+                <a:solidFill>
+                  <a:srgbClr val="52525B"/>
+                </a:solidFill>
+                <a:latin typeface="Arial" pitchFamily="34" charset="0"/>
+                <a:ea typeface="Arial" pitchFamily="34" charset="-122"/>
+                <a:cs typeface="Arial" pitchFamily="34" charset="-120"/>
+              </a:rPr>
+              <a:t>ready() splash · feed share</a:t>
+            </a:r>
+            <a:endParaRPr lang="en-US" sz="1100" dirty="0"/>
+          </a:p>
+        </p:txBody>
+      </p:sp>
+      <p:sp>
+        <p:nvSpPr>
+          <p:cNvPr id="14" name="Shape 12"/>
+          <p:cNvSpPr/>
+          <p:nvPr/>
+        </p:nvSpPr>
+        <p:spPr>
+          <a:xfrm>
+            <a:off x="6949440" y="960120"/>
+            <a:ext cx="2057400" cy="2286000"/>
+          </a:xfrm>
+          <a:prstGeom prst="roundRect">
+            <a:avLst>
+              <a:gd name="adj" fmla="val 4444"/>
+            </a:avLst>
+          </a:prstGeom>
+          <a:solidFill>
+            <a:srgbClr val="0A0B0D"/>
+          </a:solidFill>
+          <a:ln/>
+        </p:spPr>
+      </p:sp>
+      <p:sp>
+        <p:nvSpPr>
+          <p:cNvPr id="15" name="Text 13"/>
+          <p:cNvSpPr/>
+          <p:nvPr/>
+        </p:nvSpPr>
+        <p:spPr>
+          <a:xfrm>
+            <a:off x="7040880" y="1143000"/>
+            <a:ext cx="1874520" cy="411480"/>
+          </a:xfrm>
+          <a:prstGeom prst="rect">
+            <a:avLst/>
+          </a:prstGeom>
+          <a:noFill/>
+          <a:ln/>
+        </p:spPr>
+        <p:txBody>
+          <a:bodyPr wrap="square" rtlCol="0" anchor="ctr"/>
+          <a:lstStyle/>
+          <a:p>
+            <a:pPr algn="ctr" indent="0" marL="0">
+              <a:buNone/>
+            </a:pPr>
+            <a:r>
+              <a:rPr lang="en-US" sz="1300" b="1" dirty="0">
+                <a:solidFill>
+                  <a:srgbClr val="FFFFFF"/>
+                </a:solidFill>
+                <a:latin typeface="Arial" pitchFamily="34" charset="0"/>
+                <a:ea typeface="Arial" pitchFamily="34" charset="-122"/>
+                <a:cs typeface="Arial" pitchFamily="34" charset="-120"/>
+              </a:rPr>
+              <a:t>Closed product</a:t>
+            </a:r>
+            <a:endParaRPr lang="en-US" sz="1300" dirty="0"/>
+          </a:p>
+        </p:txBody>
+      </p:sp>
+      <p:sp>
+        <p:nvSpPr>
+          <p:cNvPr id="16" name="Text 14"/>
+          <p:cNvSpPr/>
+          <p:nvPr/>
+        </p:nvSpPr>
+        <p:spPr>
+          <a:xfrm>
+            <a:off x="7040880" y="1691640"/>
+            <a:ext cx="1874520" cy="1280160"/>
+          </a:xfrm>
+          <a:prstGeom prst="rect">
+            <a:avLst/>
+          </a:prstGeom>
+          <a:noFill/>
+          <a:ln/>
+        </p:spPr>
+        <p:txBody>
+          <a:bodyPr wrap="square" rtlCol="0" anchor="ctr"/>
+          <a:lstStyle/>
+          <a:p>
+            <a:pPr algn="ctr" indent="0" marL="0">
+              <a:buNone/>
+            </a:pPr>
+            <a:r>
+              <a:rPr lang="en-US" sz="1100" dirty="0">
+                <a:solidFill>
+                  <a:srgbClr val="E4E4E7"/>
+                </a:solidFill>
+                <a:latin typeface="Arial" pitchFamily="34" charset="0"/>
+                <a:ea typeface="Arial" pitchFamily="34" charset="-122"/>
+                <a:cs typeface="Arial" pitchFamily="34" charset="-120"/>
+              </a:rPr>
+              <a:t>CLI deploy only</a:t>
+            </a:r>
+            <a:endParaRPr lang="en-US" sz="1100" dirty="0"/>
+          </a:p>
+          <a:p>
+            <a:pPr algn="ctr" indent="0" marL="0">
+              <a:buNone/>
+            </a:pPr>
+            <a:r>
+              <a:rPr lang="en-US" sz="1100" dirty="0">
+                <a:solidFill>
+                  <a:srgbClr val="E4E4E7"/>
+                </a:solidFill>
+                <a:latin typeface="Arial" pitchFamily="34" charset="0"/>
+                <a:ea typeface="Arial" pitchFamily="34" charset="-122"/>
+                <a:cs typeface="Arial" pitchFamily="34" charset="-120"/>
+              </a:rPr>
+              <a:t>No public GitHub app code</a:t>
+            </a:r>
+            <a:endParaRPr lang="en-US" sz="1100" dirty="0"/>
+          </a:p>
+          <a:p>
+            <a:pPr algn="ctr" indent="0" marL="0">
+              <a:buNone/>
+            </a:pPr>
+            <a:r>
+              <a:rPr lang="en-US" sz="1100" dirty="0">
+                <a:solidFill>
+                  <a:srgbClr val="E4E4E7"/>
+                </a:solidFill>
+                <a:latin typeface="Arial" pitchFamily="34" charset="0"/>
+                <a:ea typeface="Arial" pitchFamily="34" charset="-122"/>
+                <a:cs typeface="Arial" pitchFamily="34" charset="-120"/>
+              </a:rPr>
+              <a:t>Presentations separate</a:t>
+            </a:r>
+            <a:endParaRPr lang="en-US" sz="1100" dirty="0"/>
+          </a:p>
+        </p:txBody>
+      </p:sp>
+      <p:sp>
+        <p:nvSpPr>
+          <p:cNvPr id="17" name="Shape 15"/>
+          <p:cNvSpPr/>
+          <p:nvPr/>
+        </p:nvSpPr>
+        <p:spPr>
+          <a:xfrm>
+            <a:off x="457200" y="3520440"/>
+            <a:ext cx="8229600" cy="868680"/>
+          </a:xfrm>
+          <a:prstGeom prst="roundRect">
+            <a:avLst>
+              <a:gd name="adj" fmla="val 10526"/>
+            </a:avLst>
+          </a:prstGeom>
+          <a:solidFill>
+            <a:srgbClr val="FFFFFF"/>
+          </a:solidFill>
+          <a:ln/>
+        </p:spPr>
+      </p:sp>
+      <p:sp>
+        <p:nvSpPr>
+          <p:cNvPr id="18" name="Text 16"/>
+          <p:cNvSpPr/>
+          <p:nvPr/>
+        </p:nvSpPr>
+        <p:spPr>
+          <a:xfrm>
+            <a:off x="685800" y="3611880"/>
+            <a:ext cx="7772400" cy="228600"/>
+          </a:xfrm>
+          <a:prstGeom prst="rect">
+            <a:avLst/>
+          </a:prstGeom>
+          <a:noFill/>
+          <a:ln/>
+        </p:spPr>
+        <p:txBody>
+          <a:bodyPr wrap="square" rtlCol="0" anchor="ctr"/>
+          <a:lstStyle/>
+          <a:p>
+            <a:pPr indent="0" marL="0">
+              <a:buNone/>
+            </a:pPr>
+            <a:r>
+              <a:rPr lang="en-US" sz="1200" b="1" dirty="0">
+                <a:solidFill>
+                  <a:srgbClr val="18181B"/>
+                </a:solidFill>
+                <a:latin typeface="Arial" pitchFamily="34" charset="0"/>
+                <a:ea typeface="Arial" pitchFamily="34" charset="-122"/>
+                <a:cs typeface="Arial" pitchFamily="34" charset="-120"/>
+              </a:rPr>
+              <a:t>Key design choices</a:t>
+            </a:r>
+            <a:endParaRPr lang="en-US" sz="1200" dirty="0"/>
+          </a:p>
+        </p:txBody>
+      </p:sp>
+      <p:sp>
+        <p:nvSpPr>
+          <p:cNvPr id="19" name="Text 17"/>
+          <p:cNvSpPr/>
+          <p:nvPr/>
+        </p:nvSpPr>
+        <p:spPr>
+          <a:xfrm>
+            <a:off x="685800" y="3886200"/>
             <a:ext cx="7772400" cy="365760"/>
           </a:xfrm>
           <a:prstGeom prst="rect">
@@ -3245,6 +4176,188 @@
               <a:buNone/>
             </a:pPr>
             <a:r>
+              <a:rPr lang="en-US" sz="1200" dirty="0">
+                <a:solidFill>
+                  <a:srgbClr val="52525B"/>
+                </a:solidFill>
+                <a:latin typeface="Arial" pitchFamily="34" charset="0"/>
+                <a:ea typeface="Arial" pitchFamily="34" charset="-122"/>
+                <a:cs typeface="Arial" pitchFamily="34" charset="-120"/>
+              </a:rPr>
+              <a:t>AI keys stay with the user · Research on server · BasedSettler verifies USDC · Free COIN example frozen · Product source private · GitHub (if any) is presentations only.</a:t>
+            </a:r>
+            <a:endParaRPr lang="en-US" sz="1200" dirty="0"/>
+          </a:p>
+        </p:txBody>
+      </p:sp>
+      <p:sp>
+        <p:nvSpPr>
+          <p:cNvPr id="20" name="Text 18"/>
+          <p:cNvSpPr/>
+          <p:nvPr/>
+        </p:nvSpPr>
+        <p:spPr>
+          <a:xfrm>
+            <a:off x="457200" y="4709160"/>
+            <a:ext cx="6583680" cy="256032"/>
+          </a:xfrm>
+          <a:prstGeom prst="rect">
+            <a:avLst/>
+          </a:prstGeom>
+          <a:noFill/>
+          <a:ln/>
+        </p:spPr>
+        <p:txBody>
+          <a:bodyPr wrap="square" rtlCol="0" anchor="ctr"/>
+          <a:lstStyle/>
+          <a:p>
+            <a:pPr indent="0" marL="0">
+              <a:buNone/>
+            </a:pPr>
+            <a:r>
+              <a:rPr lang="en-US" sz="1000" dirty="0">
+                <a:solidFill>
+                  <a:srgbClr val="A1A1AA"/>
+                </a:solidFill>
+                <a:latin typeface="Arial" pitchFamily="34" charset="0"/>
+                <a:ea typeface="Arial" pitchFamily="34" charset="-122"/>
+                <a:cs typeface="Arial" pitchFamily="34" charset="-120"/>
+              </a:rPr>
+              <a:t>BasedMarketLab · Built on Base · Closed product</a:t>
+            </a:r>
+            <a:endParaRPr lang="en-US" sz="1000" dirty="0"/>
+          </a:p>
+        </p:txBody>
+      </p:sp>
+      <p:sp>
+        <p:nvSpPr>
+          <p:cNvPr id="21" name="Text 19"/>
+          <p:cNvSpPr/>
+          <p:nvPr/>
+        </p:nvSpPr>
+        <p:spPr>
+          <a:xfrm>
+            <a:off x="7772400" y="4709160"/>
+            <a:ext cx="914400" cy="256032"/>
+          </a:xfrm>
+          <a:prstGeom prst="rect">
+            <a:avLst/>
+          </a:prstGeom>
+          <a:noFill/>
+          <a:ln/>
+        </p:spPr>
+        <p:txBody>
+          <a:bodyPr wrap="square" rtlCol="0" anchor="ctr"/>
+          <a:lstStyle/>
+          <a:p>
+            <a:pPr algn="r" indent="0" marL="0">
+              <a:buNone/>
+            </a:pPr>
+            <a:r>
+              <a:rPr lang="en-US" sz="1000" dirty="0">
+                <a:solidFill>
+                  <a:srgbClr val="A1A1AA"/>
+                </a:solidFill>
+                <a:latin typeface="Arial" pitchFamily="34" charset="0"/>
+                <a:ea typeface="Arial" pitchFamily="34" charset="-122"/>
+                <a:cs typeface="Arial" pitchFamily="34" charset="-120"/>
+              </a:rPr>
+              <a:t>13 / 14</a:t>
+            </a:r>
+            <a:endParaRPr lang="en-US" sz="1000" dirty="0"/>
+          </a:p>
+        </p:txBody>
+      </p:sp>
+    </p:spTree>
+  </p:cSld>
+  <p:clrMapOvr>
+    <a:masterClrMapping/>
+  </p:clrMapOvr>
+</p:sld>
+</file>
+
+<file path=ppt/slides/slide14.xml><?xml version="1.0" encoding="utf-8"?>
+<p:sld xmlns:a="http://schemas.openxmlformats.org/drawingml/2006/main" xmlns:r="http://schemas.openxmlformats.org/officeDocument/2006/relationships" xmlns:p="http://schemas.openxmlformats.org/presentationml/2006/main">
+  <p:cSld name="Slide 14">
+    <p:spTree>
+      <p:nvGrpSpPr>
+        <p:cNvPr id="1" name=""/>
+        <p:cNvGrpSpPr/>
+        <p:nvPr/>
+      </p:nvGrpSpPr>
+      <p:grpSpPr>
+        <a:xfrm>
+          <a:off x="0" y="0"/>
+          <a:ext cx="0" cy="0"/>
+          <a:chOff x="0" y="0"/>
+          <a:chExt cx="0" cy="0"/>
+        </a:xfrm>
+      </p:grpSpPr>
+      <p:sp>
+        <p:nvSpPr>
+          <p:cNvPr id="2" name="Shape 0"/>
+          <p:cNvSpPr/>
+          <p:nvPr/>
+        </p:nvSpPr>
+        <p:spPr>
+          <a:xfrm>
+            <a:off x="0" y="0"/>
+            <a:ext cx="9144000" cy="5143500"/>
+          </a:xfrm>
+          <a:prstGeom prst="rect">
+            <a:avLst/>
+          </a:prstGeom>
+          <a:solidFill>
+            <a:srgbClr val="0A0B0D"/>
+          </a:solidFill>
+          <a:ln/>
+        </p:spPr>
+      </p:sp>
+      <p:sp>
+        <p:nvSpPr>
+          <p:cNvPr id="3" name="Shape 1"/>
+          <p:cNvSpPr/>
+          <p:nvPr/>
+        </p:nvSpPr>
+        <p:spPr>
+          <a:xfrm>
+            <a:off x="0" y="0"/>
+            <a:ext cx="9144000" cy="91440"/>
+          </a:xfrm>
+          <a:prstGeom prst="rect">
+            <a:avLst/>
+          </a:prstGeom>
+          <a:solidFill>
+            <a:srgbClr val="0052FF"/>
+          </a:solidFill>
+          <a:ln/>
+        </p:spPr>
+      </p:sp>
+      <p:sp>
+        <p:nvSpPr>
+          <p:cNvPr id="4" name="Text 2"/>
+          <p:cNvSpPr/>
+          <p:nvPr/>
+        </p:nvSpPr>
+        <p:spPr>
+          <a:xfrm>
+            <a:off x="640080" y="1188720"/>
+            <a:ext cx="7772400" cy="365760"/>
+          </a:xfrm>
+          <a:prstGeom prst="rect">
+            <a:avLst/>
+          </a:prstGeom>
+          <a:noFill/>
+          <a:ln/>
+        </p:spPr>
+        <p:txBody>
+          <a:bodyPr wrap="square" rtlCol="0" anchor="ctr"/>
+          <a:lstStyle/>
+          <a:p>
+            <a:pPr indent="0" marL="0">
+              <a:buNone/>
+            </a:pPr>
+            <a:r>
               <a:rPr lang="en-US" sz="1400" b="1" spc="200" kern="0" dirty="0">
                 <a:solidFill>
                   <a:srgbClr val="0052FF"/>
@@ -3267,7 +4380,7 @@
         </p:nvSpPr>
         <p:spPr>
           <a:xfrm>
-            <a:off x="640080" y="1920240"/>
+            <a:off x="640080" y="1737360"/>
             <a:ext cx="7772400" cy="914400"/>
           </a:xfrm>
           <a:prstGeom prst="rect">
@@ -3284,7 +4397,7 @@
               <a:buNone/>
             </a:pPr>
             <a:r>
-              <a:rPr lang="en-US" sz="2600" b="1" dirty="0">
+              <a:rPr lang="en-US" sz="2400" b="1" dirty="0">
                 <a:solidFill>
                   <a:srgbClr val="FFFFFF"/>
                 </a:solidFill>
@@ -3294,7 +4407,7 @@
               </a:rPr>
               <a:t>BasedMarketLab is company research first, charts second, paid in USDC on Base.</a:t>
             </a:r>
-            <a:endParaRPr lang="en-US" sz="2600" dirty="0"/>
+            <a:endParaRPr lang="en-US" sz="2400" dirty="0"/>
           </a:p>
         </p:txBody>
       </p:sp>
@@ -3306,7 +4419,7 @@
         </p:nvSpPr>
         <p:spPr>
           <a:xfrm>
-            <a:off x="640080" y="3108960"/>
+            <a:off x="640080" y="2880360"/>
             <a:ext cx="7772400" cy="457200"/>
           </a:xfrm>
           <a:prstGeom prst="rect">
@@ -3331,7 +4444,7 @@
                 <a:ea typeface="Arial" pitchFamily="34" charset="-122"/>
                 <a:cs typeface="Arial" pitchFamily="34" charset="-120"/>
               </a:rPr>
-              <a:t>Path: ticker → research → confirm → pay $0.10 USDC on Base → Company / Full / Chart tabs.</a:t>
+              <a:t>Path: ticker → SEC + web/AI research → confirm → BasedSettler (test / $0.10 real / agent) → report.</a:t>
             </a:r>
             <a:endParaRPr lang="en-US" sz="1400" dirty="0"/>
           </a:p>
@@ -3345,7 +4458,7 @@
         </p:nvSpPr>
         <p:spPr>
           <a:xfrm>
-            <a:off x="640080" y="4114800"/>
+            <a:off x="640080" y="4023360"/>
             <a:ext cx="7772400" cy="320040"/>
           </a:xfrm>
           <a:prstGeom prst="rect">
@@ -3370,7 +4483,7 @@
                 <a:ea typeface="Arial" pitchFamily="34" charset="-122"/>
                 <a:cs typeface="Arial" pitchFamily="34" charset="-120"/>
               </a:rPr>
-              <a:t>Built on Base  ·  Closed product  ·  Public presentations only</a:t>
+              <a:t>Built on Base  ·  Closed product  ·  Vercel (public) · private engine  ·  Presentations public only</a:t>
             </a:r>
             <a:endParaRPr lang="en-US" sz="1300" dirty="0"/>
           </a:p>
@@ -3494,7 +4607,7 @@
         <p:spPr>
           <a:xfrm>
             <a:off x="457200" y="868680"/>
-            <a:ext cx="8229600" cy="640080"/>
+            <a:ext cx="8229600" cy="685800"/>
           </a:xfrm>
           <a:prstGeom prst="rect">
             <a:avLst/>
@@ -3518,7 +4631,7 @@
                 <a:ea typeface="Arial" pitchFamily="34" charset="-122"/>
                 <a:cs typeface="Arial" pitchFamily="34" charset="-120"/>
               </a:rPr>
-              <a:t>BasedMarketLab turns a stock ticker into a clear company research report — what the business does, strengths, risks, and longer-term story — then unlocks the full package for $0.10 USDC on Base.</a:t>
+              <a:t>BasedMarketLab turns a stock ticker into a clear company research report — business, strengths, risks, cash facts from SEC, longer-term story — then unlocks the full package with BasedSettler (real path: $0.10 USDC on Base).</a:t>
             </a:r>
             <a:endParaRPr lang="en-US" sz="1500" dirty="0"/>
           </a:p>
@@ -3645,7 +4758,7 @@
                 <a:ea typeface="Arial" pitchFamily="34" charset="-122"/>
                 <a:cs typeface="Arial" pitchFamily="34" charset="-120"/>
               </a:rPr>
-              <a:t>Business, health, opportunity, and watch-outs — not a day-trading terminal.</a:t>
+              <a:t>Business, health, opportunity, watch-outs — not a day-trading terminal.</a:t>
             </a:r>
             <a:endParaRPr lang="en-US" sz="1300" dirty="0"/>
           </a:p>
@@ -3733,7 +4846,7 @@
                 <a:ea typeface="Arial" pitchFamily="34" charset="-122"/>
                 <a:cs typeface="Arial" pitchFamily="34" charset="-120"/>
               </a:rPr>
-              <a:t>Charts as context</a:t>
+              <a:t>SEC + charts</a:t>
             </a:r>
             <a:endParaRPr lang="en-US" sz="1600" dirty="0"/>
           </a:p>
@@ -3772,7 +4885,7 @@
                 <a:ea typeface="Arial" pitchFamily="34" charset="-122"/>
                 <a:cs typeface="Arial" pitchFamily="34" charset="-120"/>
               </a:rPr>
-              <a:t>Price marks and structure live on a secondary tab. They support the story.</a:t>
+              <a:t>Latest 10-K + 10-Q only. Charts &amp; buy zones as secondary context.</a:t>
             </a:r>
             <a:endParaRPr lang="en-US" sz="1300" dirty="0"/>
           </a:p>
@@ -3899,7 +5012,7 @@
                 <a:ea typeface="Arial" pitchFamily="34" charset="-122"/>
                 <a:cs typeface="Arial" pitchFamily="34" charset="-120"/>
               </a:rPr>
-              <a:t>Pay $0.10 USDC on Base mainnet. Wallet connect · real on-chain unlock.</a:t>
+              <a:t>BasedSettler: test · real $0.10 · agent. Wallet connect · on-chain unlock.</a:t>
             </a:r>
             <a:endParaRPr lang="en-US" sz="1300" dirty="0"/>
           </a:p>
@@ -3914,7 +5027,7 @@
         <p:spPr>
           <a:xfrm>
             <a:off x="457200" y="4709160"/>
-            <a:ext cx="6400800" cy="256032"/>
+            <a:ext cx="6583680" cy="256032"/>
           </a:xfrm>
           <a:prstGeom prst="rect">
             <a:avLst/>
@@ -3938,7 +5051,7 @@
                 <a:ea typeface="Arial" pitchFamily="34" charset="-122"/>
                 <a:cs typeface="Arial" pitchFamily="34" charset="-120"/>
               </a:rPr>
-              <a:t>BasedMarketLab · Built on Base</a:t>
+              <a:t>BasedMarketLab · Built on Base · Closed product</a:t>
             </a:r>
             <a:endParaRPr lang="en-US" sz="1000" dirty="0"/>
           </a:p>
@@ -3977,7 +5090,7 @@
                 <a:ea typeface="Arial" pitchFamily="34" charset="-122"/>
                 <a:cs typeface="Arial" pitchFamily="34" charset="-120"/>
               </a:rPr>
-              <a:t>2 / 12</a:t>
+              <a:t>2 / 14</a:t>
             </a:r>
             <a:endParaRPr lang="en-US" sz="1000" dirty="0"/>
           </a:p>
@@ -4400,7 +5513,7 @@
                 <a:ea typeface="Arial" pitchFamily="34" charset="-122"/>
                 <a:cs typeface="Arial" pitchFamily="34" charset="-120"/>
               </a:rPr>
-              <a:t>Public web data, or your AI key for a deeper company write-up.</a:t>
+              <a:t>Public web + latest SEC 10-K/10-Q, or your AI key for a deeper write-up.</a:t>
             </a:r>
             <a:endParaRPr lang="en-US" sz="1400" dirty="0"/>
           </a:p>
@@ -4714,7 +5827,7 @@
                 <a:ea typeface="Arial" pitchFamily="34" charset="-122"/>
                 <a:cs typeface="Arial" pitchFamily="34" charset="-120"/>
               </a:rPr>
-              <a:t>$0.10 USDC on Base mainnet (real USDC only).</a:t>
+              <a:t>BasedSettler: test (Sepolia) · real $0.10 Base · or agent rail.</a:t>
             </a:r>
             <a:endParaRPr lang="en-US" sz="1400" dirty="0"/>
           </a:p>
@@ -4851,7 +5964,7 @@
                 <a:ea typeface="Arial" pitchFamily="34" charset="-122"/>
                 <a:cs typeface="Arial" pitchFamily="34" charset="-120"/>
               </a:rPr>
-              <a:t>Company · Full · one Price chart · Predictions · PDF / library.</a:t>
+              <a:t>Company · Full · Price chart · Predictions · PDF / library.</a:t>
             </a:r>
             <a:endParaRPr lang="en-US" sz="1400" dirty="0"/>
           </a:p>
@@ -4866,7 +5979,7 @@
         <p:spPr>
           <a:xfrm>
             <a:off x="457200" y="4709160"/>
-            <a:ext cx="6400800" cy="256032"/>
+            <a:ext cx="6583680" cy="256032"/>
           </a:xfrm>
           <a:prstGeom prst="rect">
             <a:avLst/>
@@ -4890,7 +6003,7 @@
                 <a:ea typeface="Arial" pitchFamily="34" charset="-122"/>
                 <a:cs typeface="Arial" pitchFamily="34" charset="-120"/>
               </a:rPr>
-              <a:t>BasedMarketLab · Built on Base</a:t>
+              <a:t>BasedMarketLab · Built on Base · Closed product</a:t>
             </a:r>
             <a:endParaRPr lang="en-US" sz="1000" dirty="0"/>
           </a:p>
@@ -4929,7 +6042,7 @@
                 <a:ea typeface="Arial" pitchFamily="34" charset="-122"/>
                 <a:cs typeface="Arial" pitchFamily="34" charset="-120"/>
               </a:rPr>
-              <a:t>3 / 12</a:t>
+              <a:t>3 / 14</a:t>
             </a:r>
             <a:endParaRPr lang="en-US" sz="1000" dirty="0"/>
           </a:p>
@@ -5106,7 +6219,7 @@
                 <a:ea typeface="Arial" pitchFamily="34" charset="-122"/>
                 <a:cs typeface="Arial" pitchFamily="34" charset="-120"/>
               </a:rPr>
-              <a:t>PUBLIC WEB (no AI key)</a:t>
+              <a:t>PUBLIC WEB + SEC (no AI key)</a:t>
             </a:r>
             <a:endParaRPr lang="en-US" sz="1200" dirty="0"/>
           </a:p>
@@ -5184,7 +6297,7 @@
                 <a:ea typeface="Arial" pitchFamily="34" charset="-122"/>
                 <a:cs typeface="Arial" pitchFamily="34" charset="-120"/>
               </a:rPr>
-              <a:t>•  Public market feeds + company context</a:t>
+              <a:t>•  Latest SEC 10-K + 10-Q only (auto)</a:t>
             </a:r>
             <a:endParaRPr lang="en-US" sz="1300" dirty="0"/>
           </a:p>
@@ -5223,7 +6336,7 @@
                 <a:ea typeface="Arial" pitchFamily="34" charset="-122"/>
                 <a:cs typeface="Arial" pitchFamily="34" charset="-120"/>
               </a:rPr>
-              <a:t>•  One full-history chart still builds</a:t>
+              <a:t>•  Real OCF / cash / revenue facts</a:t>
             </a:r>
             <a:endParaRPr lang="en-US" sz="1300" dirty="0"/>
           </a:p>
@@ -5262,7 +6375,7 @@
                 <a:ea typeface="Arial" pitchFamily="34" charset="-122"/>
                 <a:cs typeface="Arial" pitchFamily="34" charset="-120"/>
               </a:rPr>
-              <a:t>•  Honest warning: company text can be thinner</a:t>
+              <a:t>•  Public market feeds + company context</a:t>
             </a:r>
             <a:endParaRPr lang="en-US" sz="1300" dirty="0"/>
           </a:p>
@@ -5301,7 +6414,7 @@
                 <a:ea typeface="Arial" pitchFamily="34" charset="-122"/>
                 <a:cs typeface="Arial" pitchFamily="34" charset="-120"/>
               </a:rPr>
-              <a:t>•  User confirms “I understand” before generate</a:t>
+              <a:t>•  One full-history chart still builds</a:t>
             </a:r>
             <a:endParaRPr lang="en-US" sz="1300" dirty="0"/>
           </a:p>
@@ -5479,7 +6592,7 @@
                 <a:ea typeface="Arial" pitchFamily="34" charset="-122"/>
                 <a:cs typeface="Arial" pitchFamily="34" charset="-120"/>
               </a:rPr>
-              <a:t>•  Gemini, Groq, OpenRouter, OpenAI, …</a:t>
+              <a:t>•  Gemini, Groq, OpenRouter, OpenAI, xAI…</a:t>
             </a:r>
             <a:endParaRPr lang="en-US" sz="1300" dirty="0"/>
           </a:p>
@@ -5557,7 +6670,7 @@
                 <a:ea typeface="Arial" pitchFamily="34" charset="-122"/>
                 <a:cs typeface="Arial" pitchFamily="34" charset="-120"/>
               </a:rPr>
-              <a:t>•  Company products, risks, multi-year case</a:t>
+              <a:t>•  Professional evaluation, no CYA fluff</a:t>
             </a:r>
             <a:endParaRPr lang="en-US" sz="1300" dirty="0"/>
           </a:p>
@@ -5596,7 +6709,7 @@
                 <a:ea typeface="Arial" pitchFamily="34" charset="-122"/>
                 <a:cs typeface="Arial" pitchFamily="34" charset="-120"/>
               </a:rPr>
-              <a:t>•  If AI fails / quota: falls back to public web</a:t>
+              <a:t>•  If AI fails / quota: falls back to web+SEC</a:t>
             </a:r>
             <a:endParaRPr lang="en-US" sz="1300" dirty="0"/>
           </a:p>
@@ -5650,7 +6763,7 @@
         <p:spPr>
           <a:xfrm>
             <a:off x="457200" y="4709160"/>
-            <a:ext cx="6400800" cy="256032"/>
+            <a:ext cx="6583680" cy="256032"/>
           </a:xfrm>
           <a:prstGeom prst="rect">
             <a:avLst/>
@@ -5674,7 +6787,7 @@
                 <a:ea typeface="Arial" pitchFamily="34" charset="-122"/>
                 <a:cs typeface="Arial" pitchFamily="34" charset="-120"/>
               </a:rPr>
-              <a:t>BasedMarketLab · Built on Base</a:t>
+              <a:t>BasedMarketLab · Built on Base · Closed product</a:t>
             </a:r>
             <a:endParaRPr lang="en-US" sz="1000" dirty="0"/>
           </a:p>
@@ -5713,7 +6826,7 @@
                 <a:ea typeface="Arial" pitchFamily="34" charset="-122"/>
                 <a:cs typeface="Arial" pitchFamily="34" charset="-120"/>
               </a:rPr>
-              <a:t>4 / 12</a:t>
+              <a:t>4 / 14</a:t>
             </a:r>
             <a:endParaRPr lang="en-US" sz="1000" dirty="0"/>
           </a:p>
@@ -5797,8 +6910,108 @@
         </p:nvSpPr>
         <p:spPr>
           <a:xfrm>
-            <a:off x="365760" y="146304"/>
-            <a:ext cx="6858000" cy="256032"/>
+            <a:off x="457200" y="274320"/>
+            <a:ext cx="8229600" cy="365760"/>
+          </a:xfrm>
+          <a:prstGeom prst="rect">
+            <a:avLst/>
+          </a:prstGeom>
+          <a:noFill/>
+          <a:ln/>
+        </p:spPr>
+        <p:txBody>
+          <a:bodyPr wrap="square" rtlCol="0" anchor="ctr"/>
+          <a:lstStyle/>
+          <a:p>
+            <a:pPr indent="0" marL="0">
+              <a:buNone/>
+            </a:pPr>
+            <a:r>
+              <a:rPr lang="en-US" sz="2400" b="1" dirty="0">
+                <a:solidFill>
+                  <a:srgbClr val="18181B"/>
+                </a:solidFill>
+                <a:latin typeface="Arial" pitchFamily="34" charset="0"/>
+                <a:ea typeface="Arial" pitchFamily="34" charset="-122"/>
+                <a:cs typeface="Arial" pitchFamily="34" charset="-120"/>
+              </a:rPr>
+              <a:t>BasedSettler — three unlock modes</a:t>
+            </a:r>
+            <a:endParaRPr lang="en-US" sz="2400" dirty="0"/>
+          </a:p>
+        </p:txBody>
+      </p:sp>
+      <p:sp>
+        <p:nvSpPr>
+          <p:cNvPr id="5" name="Text 3"/>
+          <p:cNvSpPr/>
+          <p:nvPr/>
+        </p:nvSpPr>
+        <p:spPr>
+          <a:xfrm>
+            <a:off x="457200" y="685800"/>
+            <a:ext cx="8229600" cy="274320"/>
+          </a:xfrm>
+          <a:prstGeom prst="rect">
+            <a:avLst/>
+          </a:prstGeom>
+          <a:noFill/>
+          <a:ln/>
+        </p:spPr>
+        <p:txBody>
+          <a:bodyPr wrap="square" rtlCol="0" anchor="ctr"/>
+          <a:lstStyle/>
+          <a:p>
+            <a:pPr indent="0" marL="0">
+              <a:buNone/>
+            </a:pPr>
+            <a:r>
+              <a:rPr lang="en-US" sz="1300" dirty="0">
+                <a:solidFill>
+                  <a:srgbClr val="52525B"/>
+                </a:solidFill>
+                <a:latin typeface="Arial" pitchFamily="34" charset="0"/>
+                <a:ea typeface="Arial" pitchFamily="34" charset="-122"/>
+                <a:cs typeface="Arial" pitchFamily="34" charset="-120"/>
+              </a:rPr>
+              <a:t>Same product · pick test, real, or agent at checkout</a:t>
+            </a:r>
+            <a:endParaRPr lang="en-US" sz="1300" dirty="0"/>
+          </a:p>
+        </p:txBody>
+      </p:sp>
+      <p:sp>
+        <p:nvSpPr>
+          <p:cNvPr id="6" name="Shape 4"/>
+          <p:cNvSpPr/>
+          <p:nvPr/>
+        </p:nvSpPr>
+        <p:spPr>
+          <a:xfrm>
+            <a:off x="457200" y="1188720"/>
+            <a:ext cx="2697480" cy="2926080"/>
+          </a:xfrm>
+          <a:prstGeom prst="roundRect">
+            <a:avLst>
+              <a:gd name="adj" fmla="val 4068"/>
+            </a:avLst>
+          </a:prstGeom>
+          <a:solidFill>
+            <a:srgbClr val="FFFFFF"/>
+          </a:solidFill>
+          <a:ln/>
+        </p:spPr>
+      </p:sp>
+      <p:sp>
+        <p:nvSpPr>
+          <p:cNvPr id="7" name="Text 5"/>
+          <p:cNvSpPr/>
+          <p:nvPr/>
+        </p:nvSpPr>
+        <p:spPr>
+          <a:xfrm>
+            <a:off x="640080" y="1417320"/>
+            <a:ext cx="2331720" cy="365760"/>
           </a:xfrm>
           <a:prstGeom prst="rect">
             <a:avLst/>
@@ -5816,13 +7029,152 @@
             <a:r>
               <a:rPr lang="en-US" sz="1800" b="1" dirty="0">
                 <a:solidFill>
+                  <a:srgbClr val="0052FF"/>
+                </a:solidFill>
+                <a:latin typeface="Arial" pitchFamily="34" charset="0"/>
+                <a:ea typeface="Arial" pitchFamily="34" charset="-122"/>
+                <a:cs typeface="Arial" pitchFamily="34" charset="-120"/>
+              </a:rPr>
+              <a:t>Test</a:t>
+            </a:r>
+            <a:endParaRPr lang="en-US" sz="1800" dirty="0"/>
+          </a:p>
+        </p:txBody>
+      </p:sp>
+      <p:sp>
+        <p:nvSpPr>
+          <p:cNvPr id="8" name="Text 6"/>
+          <p:cNvSpPr/>
+          <p:nvPr/>
+        </p:nvSpPr>
+        <p:spPr>
+          <a:xfrm>
+            <a:off x="640080" y="1920240"/>
+            <a:ext cx="2331720" cy="365760"/>
+          </a:xfrm>
+          <a:prstGeom prst="rect">
+            <a:avLst/>
+          </a:prstGeom>
+          <a:noFill/>
+          <a:ln/>
+        </p:spPr>
+        <p:txBody>
+          <a:bodyPr wrap="square" rtlCol="0" anchor="ctr"/>
+          <a:lstStyle/>
+          <a:p>
+            <a:pPr indent="0" marL="0">
+              <a:buNone/>
+            </a:pPr>
+            <a:r>
+              <a:rPr lang="en-US" sz="1600" b="1" dirty="0">
+                <a:solidFill>
                   <a:srgbClr val="18181B"/>
                 </a:solidFill>
                 <a:latin typeface="Arial" pitchFamily="34" charset="0"/>
                 <a:ea typeface="Arial" pitchFamily="34" charset="-122"/>
                 <a:cs typeface="Arial" pitchFamily="34" charset="-120"/>
               </a:rPr>
-              <a:t>Step 1 — Choose a company</a:t>
+              <a:t>0.00001 USDC</a:t>
+            </a:r>
+            <a:endParaRPr lang="en-US" sz="1600" dirty="0"/>
+          </a:p>
+        </p:txBody>
+      </p:sp>
+      <p:sp>
+        <p:nvSpPr>
+          <p:cNvPr id="9" name="Text 7"/>
+          <p:cNvSpPr/>
+          <p:nvPr/>
+        </p:nvSpPr>
+        <p:spPr>
+          <a:xfrm>
+            <a:off x="640080" y="2468880"/>
+            <a:ext cx="2331720" cy="1280160"/>
+          </a:xfrm>
+          <a:prstGeom prst="rect">
+            <a:avLst/>
+          </a:prstGeom>
+          <a:noFill/>
+          <a:ln/>
+        </p:spPr>
+        <p:txBody>
+          <a:bodyPr wrap="square" rtlCol="0" anchor="ctr"/>
+          <a:lstStyle/>
+          <a:p>
+            <a:pPr indent="0" marL="0">
+              <a:buNone/>
+            </a:pPr>
+            <a:r>
+              <a:rPr lang="en-US" sz="1300" dirty="0">
+                <a:solidFill>
+                  <a:srgbClr val="52525B"/>
+                </a:solidFill>
+                <a:latin typeface="Arial" pitchFamily="34" charset="0"/>
+                <a:ea typeface="Arial" pitchFamily="34" charset="-122"/>
+                <a:cs typeface="Arial" pitchFamily="34" charset="-120"/>
+              </a:rPr>
+              <a:t>Base Sepolia (testnet). Free faucet coins. Safe to practice wallet flow.</a:t>
+            </a:r>
+            <a:endParaRPr lang="en-US" sz="1300" dirty="0"/>
+          </a:p>
+        </p:txBody>
+      </p:sp>
+      <p:sp>
+        <p:nvSpPr>
+          <p:cNvPr id="10" name="Shape 8"/>
+          <p:cNvSpPr/>
+          <p:nvPr/>
+        </p:nvSpPr>
+        <p:spPr>
+          <a:xfrm>
+            <a:off x="3291840" y="1188720"/>
+            <a:ext cx="2697480" cy="2926080"/>
+          </a:xfrm>
+          <a:prstGeom prst="roundRect">
+            <a:avLst>
+              <a:gd name="adj" fmla="val 4068"/>
+            </a:avLst>
+          </a:prstGeom>
+          <a:solidFill>
+            <a:srgbClr val="0A0B0D"/>
+          </a:solidFill>
+          <a:ln/>
+        </p:spPr>
+      </p:sp>
+      <p:sp>
+        <p:nvSpPr>
+          <p:cNvPr id="11" name="Text 9"/>
+          <p:cNvSpPr/>
+          <p:nvPr/>
+        </p:nvSpPr>
+        <p:spPr>
+          <a:xfrm>
+            <a:off x="3474720" y="1417320"/>
+            <a:ext cx="2331720" cy="365760"/>
+          </a:xfrm>
+          <a:prstGeom prst="rect">
+            <a:avLst/>
+          </a:prstGeom>
+          <a:noFill/>
+          <a:ln/>
+        </p:spPr>
+        <p:txBody>
+          <a:bodyPr wrap="square" rtlCol="0" anchor="ctr"/>
+          <a:lstStyle/>
+          <a:p>
+            <a:pPr indent="0" marL="0">
+              <a:buNone/>
+            </a:pPr>
+            <a:r>
+              <a:rPr lang="en-US" sz="1800" b="1" dirty="0">
+                <a:solidFill>
+                  <a:srgbClr val="FFFFFF"/>
+                </a:solidFill>
+                <a:latin typeface="Arial" pitchFamily="34" charset="0"/>
+                <a:ea typeface="Arial" pitchFamily="34" charset="-122"/>
+                <a:cs typeface="Arial" pitchFamily="34" charset="-120"/>
+              </a:rPr>
+              <a:t>Real</a:t>
             </a:r>
             <a:endParaRPr lang="en-US" sz="1800" dirty="0"/>
           </a:p>
@@ -5830,30 +7182,208 @@
       </p:sp>
       <p:sp>
         <p:nvSpPr>
-          <p:cNvPr id="5" name="Text 3"/>
-          <p:cNvSpPr/>
-          <p:nvPr/>
-        </p:nvSpPr>
-        <p:spPr>
-          <a:xfrm>
-            <a:off x="365760" y="384048"/>
-            <a:ext cx="8229600" cy="201168"/>
-          </a:xfrm>
-          <a:prstGeom prst="rect">
-            <a:avLst/>
-          </a:prstGeom>
-          <a:noFill/>
-          <a:ln/>
-        </p:spPr>
-        <p:txBody>
-          <a:bodyPr wrap="square" rtlCol="0" anchor="ctr"/>
-          <a:lstStyle/>
-          <a:p>
-            <a:pPr indent="0" marL="0">
-              <a:buNone/>
-            </a:pPr>
-            <a:r>
-              <a:rPr lang="en-US" sz="1100" dirty="0">
+          <p:cNvPr id="12" name="Text 10"/>
+          <p:cNvSpPr/>
+          <p:nvPr/>
+        </p:nvSpPr>
+        <p:spPr>
+          <a:xfrm>
+            <a:off x="3474720" y="1920240"/>
+            <a:ext cx="2331720" cy="365760"/>
+          </a:xfrm>
+          <a:prstGeom prst="rect">
+            <a:avLst/>
+          </a:prstGeom>
+          <a:noFill/>
+          <a:ln/>
+        </p:spPr>
+        <p:txBody>
+          <a:bodyPr wrap="square" rtlCol="0" anchor="ctr"/>
+          <a:lstStyle/>
+          <a:p>
+            <a:pPr indent="0" marL="0">
+              <a:buNone/>
+            </a:pPr>
+            <a:r>
+              <a:rPr lang="en-US" sz="1600" b="1" dirty="0">
+                <a:solidFill>
+                  <a:srgbClr val="0052FF"/>
+                </a:solidFill>
+                <a:latin typeface="Arial" pitchFamily="34" charset="0"/>
+                <a:ea typeface="Arial" pitchFamily="34" charset="-122"/>
+                <a:cs typeface="Arial" pitchFamily="34" charset="-120"/>
+              </a:rPr>
+              <a:t>$0.10 USDC</a:t>
+            </a:r>
+            <a:endParaRPr lang="en-US" sz="1600" dirty="0"/>
+          </a:p>
+        </p:txBody>
+      </p:sp>
+      <p:sp>
+        <p:nvSpPr>
+          <p:cNvPr id="13" name="Text 11"/>
+          <p:cNvSpPr/>
+          <p:nvPr/>
+        </p:nvSpPr>
+        <p:spPr>
+          <a:xfrm>
+            <a:off x="3474720" y="2468880"/>
+            <a:ext cx="2331720" cy="1280160"/>
+          </a:xfrm>
+          <a:prstGeom prst="rect">
+            <a:avLst/>
+          </a:prstGeom>
+          <a:noFill/>
+          <a:ln/>
+        </p:spPr>
+        <p:txBody>
+          <a:bodyPr wrap="square" rtlCol="0" anchor="ctr"/>
+          <a:lstStyle/>
+          <a:p>
+            <a:pPr indent="0" marL="0">
+              <a:buNone/>
+            </a:pPr>
+            <a:r>
+              <a:rPr lang="en-US" sz="1300" dirty="0">
+                <a:solidFill>
+                  <a:srgbClr val="E4E4E7"/>
+                </a:solidFill>
+                <a:latin typeface="Arial" pitchFamily="34" charset="0"/>
+                <a:ea typeface="Arial" pitchFamily="34" charset="-122"/>
+                <a:cs typeface="Arial" pitchFamily="34" charset="-120"/>
+              </a:rPr>
+              <a:t>Base mainnet. Real USDC to shop wallet. Production unlock for the full report.</a:t>
+            </a:r>
+            <a:endParaRPr lang="en-US" sz="1300" dirty="0"/>
+          </a:p>
+        </p:txBody>
+      </p:sp>
+      <p:sp>
+        <p:nvSpPr>
+          <p:cNvPr id="14" name="Shape 12"/>
+          <p:cNvSpPr/>
+          <p:nvPr/>
+        </p:nvSpPr>
+        <p:spPr>
+          <a:xfrm>
+            <a:off x="6126480" y="1188720"/>
+            <a:ext cx="2697480" cy="2926080"/>
+          </a:xfrm>
+          <a:prstGeom prst="roundRect">
+            <a:avLst>
+              <a:gd name="adj" fmla="val 4068"/>
+            </a:avLst>
+          </a:prstGeom>
+          <a:solidFill>
+            <a:srgbClr val="FFFFFF"/>
+          </a:solidFill>
+          <a:ln/>
+        </p:spPr>
+      </p:sp>
+      <p:sp>
+        <p:nvSpPr>
+          <p:cNvPr id="15" name="Text 13"/>
+          <p:cNvSpPr/>
+          <p:nvPr/>
+        </p:nvSpPr>
+        <p:spPr>
+          <a:xfrm>
+            <a:off x="6309360" y="1417320"/>
+            <a:ext cx="2331720" cy="365760"/>
+          </a:xfrm>
+          <a:prstGeom prst="rect">
+            <a:avLst/>
+          </a:prstGeom>
+          <a:noFill/>
+          <a:ln/>
+        </p:spPr>
+        <p:txBody>
+          <a:bodyPr wrap="square" rtlCol="0" anchor="ctr"/>
+          <a:lstStyle/>
+          <a:p>
+            <a:pPr indent="0" marL="0">
+              <a:buNone/>
+            </a:pPr>
+            <a:r>
+              <a:rPr lang="en-US" sz="1800" b="1" dirty="0">
+                <a:solidFill>
+                  <a:srgbClr val="0052FF"/>
+                </a:solidFill>
+                <a:latin typeface="Arial" pitchFamily="34" charset="0"/>
+                <a:ea typeface="Arial" pitchFamily="34" charset="-122"/>
+                <a:cs typeface="Arial" pitchFamily="34" charset="-120"/>
+              </a:rPr>
+              <a:t>Agent</a:t>
+            </a:r>
+            <a:endParaRPr lang="en-US" sz="1800" dirty="0"/>
+          </a:p>
+        </p:txBody>
+      </p:sp>
+      <p:sp>
+        <p:nvSpPr>
+          <p:cNvPr id="16" name="Text 14"/>
+          <p:cNvSpPr/>
+          <p:nvPr/>
+        </p:nvSpPr>
+        <p:spPr>
+          <a:xfrm>
+            <a:off x="6309360" y="1920240"/>
+            <a:ext cx="2331720" cy="365760"/>
+          </a:xfrm>
+          <a:prstGeom prst="rect">
+            <a:avLst/>
+          </a:prstGeom>
+          <a:noFill/>
+          <a:ln/>
+        </p:spPr>
+        <p:txBody>
+          <a:bodyPr wrap="square" rtlCol="0" anchor="ctr"/>
+          <a:lstStyle/>
+          <a:p>
+            <a:pPr indent="0" marL="0">
+              <a:buNone/>
+            </a:pPr>
+            <a:r>
+              <a:rPr lang="en-US" sz="1600" b="1" dirty="0">
+                <a:solidFill>
+                  <a:srgbClr val="18181B"/>
+                </a:solidFill>
+                <a:latin typeface="Arial" pitchFamily="34" charset="0"/>
+                <a:ea typeface="Arial" pitchFamily="34" charset="-122"/>
+                <a:cs typeface="Arial" pitchFamily="34" charset="-120"/>
+              </a:rPr>
+              <a:t>AgentKit rail</a:t>
+            </a:r>
+            <a:endParaRPr lang="en-US" sz="1600" dirty="0"/>
+          </a:p>
+        </p:txBody>
+      </p:sp>
+      <p:sp>
+        <p:nvSpPr>
+          <p:cNvPr id="17" name="Text 15"/>
+          <p:cNvSpPr/>
+          <p:nvPr/>
+        </p:nvSpPr>
+        <p:spPr>
+          <a:xfrm>
+            <a:off x="6309360" y="2468880"/>
+            <a:ext cx="2331720" cy="1280160"/>
+          </a:xfrm>
+          <a:prstGeom prst="rect">
+            <a:avLst/>
+          </a:prstGeom>
+          <a:noFill/>
+          <a:ln/>
+        </p:spPr>
+        <p:txBody>
+          <a:bodyPr wrap="square" rtlCol="0" anchor="ctr"/>
+          <a:lstStyle/>
+          <a:p>
+            <a:pPr indent="0" marL="0">
+              <a:buNone/>
+            </a:pPr>
+            <a:r>
+              <a:rPr lang="en-US" sz="1300" dirty="0">
                 <a:solidFill>
                   <a:srgbClr val="52525B"/>
                 </a:solidFill>
@@ -5861,45 +7391,22 @@
                 <a:ea typeface="Arial" pitchFamily="34" charset="-122"/>
                 <a:cs typeface="Arial" pitchFamily="34" charset="-120"/>
               </a:rPr>
-              <a:t>Ticker · optional AI key · Generate · $0.10 USDC</a:t>
-            </a:r>
-            <a:endParaRPr lang="en-US" sz="1100" dirty="0"/>
-          </a:p>
-        </p:txBody>
-      </p:sp>
-      <p:pic>
-        <p:nvPicPr>
-          <p:cNvPr id="6" name="Image 0" descr="C:\Users\Kevin\OneDrive\Desktop\BasedMarketLab\live\screenshots\pptx_crops\slide5_zoom.png">    </p:cNvPr>
-          <p:cNvPicPr>
-            <a:picLocks noChangeAspect="1"/>
-          </p:cNvPicPr>
-          <p:nvPr/>
-        </p:nvPicPr>
-        <p:blipFill>
-          <a:blip r:embed="rId1"/>
-          <a:srcRect l="0" r="0" t="0" b="0"/>
-          <a:stretch/>
-        </p:blipFill>
-        <p:spPr>
-          <a:xfrm>
-            <a:off x="320040" y="621792"/>
-            <a:ext cx="8503920" cy="3886200"/>
-          </a:xfrm>
-          <a:prstGeom prst="rect">
-            <a:avLst/>
-          </a:prstGeom>
-        </p:spPr>
-      </p:pic>
-      <p:sp>
-        <p:nvSpPr>
-          <p:cNvPr id="7" name="Text 4"/>
+              <a:t>BasedSettler agent path. Agent wallet pays USDC when configured.</a:t>
+            </a:r>
+            <a:endParaRPr lang="en-US" sz="1300" dirty="0"/>
+          </a:p>
+        </p:txBody>
+      </p:sp>
+      <p:sp>
+        <p:nvSpPr>
+          <p:cNvPr id="18" name="Text 16"/>
           <p:cNvSpPr/>
           <p:nvPr/>
         </p:nvSpPr>
         <p:spPr>
           <a:xfrm>
             <a:off x="457200" y="4709160"/>
-            <a:ext cx="6400800" cy="256032"/>
+            <a:ext cx="6583680" cy="256032"/>
           </a:xfrm>
           <a:prstGeom prst="rect">
             <a:avLst/>
@@ -5923,7 +7430,7 @@
                 <a:ea typeface="Arial" pitchFamily="34" charset="-122"/>
                 <a:cs typeface="Arial" pitchFamily="34" charset="-120"/>
               </a:rPr>
-              <a:t>BasedMarketLab · Built on Base</a:t>
+              <a:t>BasedMarketLab · Built on Base · Closed product</a:t>
             </a:r>
             <a:endParaRPr lang="en-US" sz="1000" dirty="0"/>
           </a:p>
@@ -5931,7 +7438,7 @@
       </p:sp>
       <p:sp>
         <p:nvSpPr>
-          <p:cNvPr id="8" name="Text 5"/>
+          <p:cNvPr id="19" name="Text 17"/>
           <p:cNvSpPr/>
           <p:nvPr/>
         </p:nvSpPr>
@@ -5962,7 +7469,7 @@
                 <a:ea typeface="Arial" pitchFamily="34" charset="-122"/>
                 <a:cs typeface="Arial" pitchFamily="34" charset="-120"/>
               </a:rPr>
-              <a:t>5 / 12</a:t>
+              <a:t>5 / 14</a:t>
             </a:r>
             <a:endParaRPr lang="en-US" sz="1000" dirty="0"/>
           </a:p>
@@ -6047,23 +7554,23 @@
         <p:spPr>
           <a:xfrm>
             <a:off x="457200" y="274320"/>
-            <a:ext cx="8229600" cy="320040"/>
-          </a:xfrm>
-          <a:prstGeom prst="rect">
-            <a:avLst/>
-          </a:prstGeom>
-          <a:noFill/>
-          <a:ln/>
-        </p:spPr>
-        <p:txBody>
-          <a:bodyPr wrap="square" rtlCol="0" anchor="ctr"/>
-          <a:lstStyle/>
-          <a:p>
-            <a:pPr indent="0" marL="0">
-              <a:buNone/>
-            </a:pPr>
-            <a:r>
-              <a:rPr lang="en-US" sz="2200" b="1" dirty="0">
+            <a:ext cx="8229600" cy="365760"/>
+          </a:xfrm>
+          <a:prstGeom prst="rect">
+            <a:avLst/>
+          </a:prstGeom>
+          <a:noFill/>
+          <a:ln/>
+        </p:spPr>
+        <p:txBody>
+          <a:bodyPr wrap="square" rtlCol="0" anchor="ctr"/>
+          <a:lstStyle/>
+          <a:p>
+            <a:pPr indent="0" marL="0">
+              <a:buNone/>
+            </a:pPr>
+            <a:r>
+              <a:rPr lang="en-US" sz="2400" b="1" dirty="0">
                 <a:solidFill>
                   <a:srgbClr val="18181B"/>
                 </a:solidFill>
@@ -6071,9 +7578,9 @@
                 <a:ea typeface="Arial" pitchFamily="34" charset="-122"/>
                 <a:cs typeface="Arial" pitchFamily="34" charset="-120"/>
               </a:rPr>
-              <a:t>Step 2 — Confirm company &amp; unlock</a:t>
-            </a:r>
-            <a:endParaRPr lang="en-US" sz="2200" dirty="0"/>
+              <a:t>Free example — frozen COIN</a:t>
+            </a:r>
+            <a:endParaRPr lang="en-US" sz="2400" dirty="0"/>
           </a:p>
         </p:txBody>
       </p:sp>
@@ -6086,24 +7593,17 @@
         <p:spPr>
           <a:xfrm>
             <a:off x="457200" y="868680"/>
-            <a:ext cx="4023360" cy="1508760"/>
+            <a:ext cx="8229600" cy="548640"/>
           </a:xfrm>
           <a:prstGeom prst="roundRect">
             <a:avLst>
-              <a:gd name="adj" fmla="val 6061"/>
+              <a:gd name="adj" fmla="val 13333"/>
             </a:avLst>
           </a:prstGeom>
           <a:solidFill>
             <a:srgbClr val="FFFFFF"/>
           </a:solidFill>
           <a:ln/>
-          <a:effectLst>
-            <a:outerShdw sx="100000" sy="100000" kx="0" ky="0" algn="bl" rotWithShape="0" blurRad="76200" dist="12700" dir="16200000">
-              <a:srgbClr val="000000">
-                <a:alpha val="7000"/>
-              </a:srgbClr>
-            </a:outerShdw>
-          </a:effectLst>
         </p:spPr>
       </p:sp>
       <p:sp>
@@ -6114,24 +7614,24 @@
         </p:nvSpPr>
         <p:spPr>
           <a:xfrm>
-            <a:off x="685800" y="1097280"/>
-            <a:ext cx="3566160" cy="320040"/>
-          </a:xfrm>
-          <a:prstGeom prst="rect">
-            <a:avLst/>
-          </a:prstGeom>
-          <a:noFill/>
-          <a:ln/>
-        </p:spPr>
-        <p:txBody>
-          <a:bodyPr wrap="square" rtlCol="0" anchor="ctr"/>
-          <a:lstStyle/>
-          <a:p>
-            <a:pPr indent="0" marL="0">
-              <a:buNone/>
-            </a:pPr>
-            <a:r>
-              <a:rPr lang="en-US" sz="1500" b="1" dirty="0">
+            <a:off x="640080" y="978408"/>
+            <a:ext cx="2011680" cy="320040"/>
+          </a:xfrm>
+          <a:prstGeom prst="rect">
+            <a:avLst/>
+          </a:prstGeom>
+          <a:noFill/>
+          <a:ln/>
+        </p:spPr>
+        <p:txBody>
+          <a:bodyPr wrap="square" rtlCol="0" anchor="ctr"/>
+          <a:lstStyle/>
+          <a:p>
+            <a:pPr indent="0" marL="0">
+              <a:buNone/>
+            </a:pPr>
+            <a:r>
+              <a:rPr lang="en-US" sz="1400" b="1" dirty="0">
                 <a:solidFill>
                   <a:srgbClr val="0052FF"/>
                 </a:solidFill>
@@ -6139,9 +7639,9 @@
                 <a:ea typeface="Arial" pitchFamily="34" charset="-122"/>
                 <a:cs typeface="Arial" pitchFamily="34" charset="-120"/>
               </a:rPr>
-              <a:t>Confirm company</a:t>
-            </a:r>
-            <a:endParaRPr lang="en-US" sz="1500" dirty="0"/>
+              <a:t>Symbol</a:t>
+            </a:r>
+            <a:endParaRPr lang="en-US" sz="1400" dirty="0"/>
           </a:p>
         </p:txBody>
       </p:sp>
@@ -6153,8 +7653,8 @@
         </p:nvSpPr>
         <p:spPr>
           <a:xfrm>
-            <a:off x="685800" y="1508760"/>
-            <a:ext cx="3566160" cy="640080"/>
+            <a:off x="2743200" y="978408"/>
+            <a:ext cx="5669280" cy="365760"/>
           </a:xfrm>
           <a:prstGeom prst="rect">
             <a:avLst/>
@@ -6178,7 +7678,7 @@
                 <a:ea typeface="Arial" pitchFamily="34" charset="-122"/>
                 <a:cs typeface="Arial" pitchFamily="34" charset="-120"/>
               </a:rPr>
-              <a:t>User must tick YES on ticker + resolved name (e.g. COIN → Coinbase Global).</a:t>
+              <a:t>COIN · Coinbase Global</a:t>
             </a:r>
             <a:endParaRPr lang="en-US" sz="1300" dirty="0"/>
           </a:p>
@@ -6192,53 +7692,146 @@
         </p:nvSpPr>
         <p:spPr>
           <a:xfrm>
-            <a:off x="4754880" y="868680"/>
-            <a:ext cx="4023360" cy="1508760"/>
+            <a:off x="457200" y="1508760"/>
+            <a:ext cx="8229600" cy="548640"/>
           </a:xfrm>
           <a:prstGeom prst="roundRect">
             <a:avLst>
-              <a:gd name="adj" fmla="val 6061"/>
+              <a:gd name="adj" fmla="val 13333"/>
+            </a:avLst>
+          </a:prstGeom>
+          <a:solidFill>
+            <a:srgbClr val="EEF2FF"/>
+          </a:solidFill>
+          <a:ln/>
+        </p:spPr>
+      </p:sp>
+      <p:sp>
+        <p:nvSpPr>
+          <p:cNvPr id="9" name="Text 7"/>
+          <p:cNvSpPr/>
+          <p:nvPr/>
+        </p:nvSpPr>
+        <p:spPr>
+          <a:xfrm>
+            <a:off x="640080" y="1618488"/>
+            <a:ext cx="2011680" cy="320040"/>
+          </a:xfrm>
+          <a:prstGeom prst="rect">
+            <a:avLst/>
+          </a:prstGeom>
+          <a:noFill/>
+          <a:ln/>
+        </p:spPr>
+        <p:txBody>
+          <a:bodyPr wrap="square" rtlCol="0" anchor="ctr"/>
+          <a:lstStyle/>
+          <a:p>
+            <a:pPr indent="0" marL="0">
+              <a:buNone/>
+            </a:pPr>
+            <a:r>
+              <a:rPr lang="en-US" sz="1400" b="1" dirty="0">
+                <a:solidFill>
+                  <a:srgbClr val="0052FF"/>
+                </a:solidFill>
+                <a:latin typeface="Arial" pitchFamily="34" charset="0"/>
+                <a:ea typeface="Arial" pitchFamily="34" charset="-122"/>
+                <a:cs typeface="Arial" pitchFamily="34" charset="-120"/>
+              </a:rPr>
+              <a:t>As of</a:t>
+            </a:r>
+            <a:endParaRPr lang="en-US" sz="1400" dirty="0"/>
+          </a:p>
+        </p:txBody>
+      </p:sp>
+      <p:sp>
+        <p:nvSpPr>
+          <p:cNvPr id="10" name="Text 8"/>
+          <p:cNvSpPr/>
+          <p:nvPr/>
+        </p:nvSpPr>
+        <p:spPr>
+          <a:xfrm>
+            <a:off x="2743200" y="1618488"/>
+            <a:ext cx="5669280" cy="365760"/>
+          </a:xfrm>
+          <a:prstGeom prst="rect">
+            <a:avLst/>
+          </a:prstGeom>
+          <a:noFill/>
+          <a:ln/>
+        </p:spPr>
+        <p:txBody>
+          <a:bodyPr wrap="square" rtlCol="0" anchor="ctr"/>
+          <a:lstStyle/>
+          <a:p>
+            <a:pPr indent="0" marL="0">
+              <a:buNone/>
+            </a:pPr>
+            <a:r>
+              <a:rPr lang="en-US" sz="1300" dirty="0">
+                <a:solidFill>
+                  <a:srgbClr val="52525B"/>
+                </a:solidFill>
+                <a:latin typeface="Arial" pitchFamily="34" charset="0"/>
+                <a:ea typeface="Arial" pitchFamily="34" charset="-122"/>
+                <a:cs typeface="Arial" pitchFamily="34" charset="-120"/>
+              </a:rPr>
+              <a:t>23 July 2026 — pack does not change when users generate COIN</a:t>
+            </a:r>
+            <a:endParaRPr lang="en-US" sz="1300" dirty="0"/>
+          </a:p>
+        </p:txBody>
+      </p:sp>
+      <p:sp>
+        <p:nvSpPr>
+          <p:cNvPr id="11" name="Shape 9"/>
+          <p:cNvSpPr/>
+          <p:nvPr/>
+        </p:nvSpPr>
+        <p:spPr>
+          <a:xfrm>
+            <a:off x="457200" y="2148840"/>
+            <a:ext cx="8229600" cy="548640"/>
+          </a:xfrm>
+          <a:prstGeom prst="roundRect">
+            <a:avLst>
+              <a:gd name="adj" fmla="val 13333"/>
             </a:avLst>
           </a:prstGeom>
           <a:solidFill>
             <a:srgbClr val="FFFFFF"/>
           </a:solidFill>
           <a:ln/>
-          <a:effectLst>
-            <a:outerShdw sx="100000" sy="100000" kx="0" ky="0" algn="bl" rotWithShape="0" blurRad="76200" dist="12700" dir="16200000">
-              <a:srgbClr val="000000">
-                <a:alpha val="7000"/>
-              </a:srgbClr>
-            </a:outerShdw>
-          </a:effectLst>
-        </p:spPr>
-      </p:sp>
-      <p:sp>
-        <p:nvSpPr>
-          <p:cNvPr id="9" name="Text 7"/>
-          <p:cNvSpPr/>
-          <p:nvPr/>
-        </p:nvSpPr>
-        <p:spPr>
-          <a:xfrm>
-            <a:off x="4983480" y="1097280"/>
-            <a:ext cx="3566160" cy="320040"/>
-          </a:xfrm>
-          <a:prstGeom prst="rect">
-            <a:avLst/>
-          </a:prstGeom>
-          <a:noFill/>
-          <a:ln/>
-        </p:spPr>
-        <p:txBody>
-          <a:bodyPr wrap="square" rtlCol="0" anchor="ctr"/>
-          <a:lstStyle/>
-          <a:p>
-            <a:pPr indent="0" marL="0">
-              <a:buNone/>
-            </a:pPr>
-            <a:r>
-              <a:rPr lang="en-US" sz="1500" b="1" dirty="0">
+        </p:spPr>
+      </p:sp>
+      <p:sp>
+        <p:nvSpPr>
+          <p:cNvPr id="12" name="Text 10"/>
+          <p:cNvSpPr/>
+          <p:nvPr/>
+        </p:nvSpPr>
+        <p:spPr>
+          <a:xfrm>
+            <a:off x="640080" y="2258568"/>
+            <a:ext cx="2011680" cy="320040"/>
+          </a:xfrm>
+          <a:prstGeom prst="rect">
+            <a:avLst/>
+          </a:prstGeom>
+          <a:noFill/>
+          <a:ln/>
+        </p:spPr>
+        <p:txBody>
+          <a:bodyPr wrap="square" rtlCol="0" anchor="ctr"/>
+          <a:lstStyle/>
+          <a:p>
+            <a:pPr indent="0" marL="0">
+              <a:buNone/>
+            </a:pPr>
+            <a:r>
+              <a:rPr lang="en-US" sz="1400" b="1" dirty="0">
                 <a:solidFill>
                   <a:srgbClr val="0052FF"/>
                 </a:solidFill>
@@ -6246,22 +7839,22 @@
                 <a:ea typeface="Arial" pitchFamily="34" charset="-122"/>
                 <a:cs typeface="Arial" pitchFamily="34" charset="-120"/>
               </a:rPr>
-              <a:t>Connect wallet</a:t>
-            </a:r>
-            <a:endParaRPr lang="en-US" sz="1500" dirty="0"/>
-          </a:p>
-        </p:txBody>
-      </p:sp>
-      <p:sp>
-        <p:nvSpPr>
-          <p:cNvPr id="10" name="Text 8"/>
-          <p:cNvSpPr/>
-          <p:nvPr/>
-        </p:nvSpPr>
-        <p:spPr>
-          <a:xfrm>
-            <a:off x="4983480" y="1508760"/>
-            <a:ext cx="3566160" cy="640080"/>
+              <a:t>Contents</a:t>
+            </a:r>
+            <a:endParaRPr lang="en-US" sz="1400" dirty="0"/>
+          </a:p>
+        </p:txBody>
+      </p:sp>
+      <p:sp>
+        <p:nvSpPr>
+          <p:cNvPr id="13" name="Text 11"/>
+          <p:cNvSpPr/>
+          <p:nvPr/>
+        </p:nvSpPr>
+        <p:spPr>
+          <a:xfrm>
+            <a:off x="2743200" y="2258568"/>
+            <a:ext cx="5669280" cy="365760"/>
           </a:xfrm>
           <a:prstGeom prst="rect">
             <a:avLst/>
@@ -6285,7 +7878,7 @@
                 <a:ea typeface="Arial" pitchFamily="34" charset="-122"/>
                 <a:cs typeface="Arial" pitchFamily="34" charset="-120"/>
               </a:rPr>
-              <a:t>MetaMask / Coinbase Wallet on Base mainnet (chain 8453).</a:t>
+              <a:t>Company report · chart · prediction markets · library-style sample</a:t>
             </a:r>
             <a:endParaRPr lang="en-US" sz="1300" dirty="0"/>
           </a:p>
@@ -6293,59 +7886,152 @@
       </p:sp>
       <p:sp>
         <p:nvSpPr>
-          <p:cNvPr id="11" name="Shape 9"/>
-          <p:cNvSpPr/>
-          <p:nvPr/>
-        </p:nvSpPr>
-        <p:spPr>
-          <a:xfrm>
-            <a:off x="457200" y="2560320"/>
-            <a:ext cx="4023360" cy="1508760"/>
+          <p:cNvPr id="14" name="Shape 12"/>
+          <p:cNvSpPr/>
+          <p:nvPr/>
+        </p:nvSpPr>
+        <p:spPr>
+          <a:xfrm>
+            <a:off x="457200" y="2788920"/>
+            <a:ext cx="8229600" cy="548640"/>
           </a:xfrm>
           <a:prstGeom prst="roundRect">
             <a:avLst>
-              <a:gd name="adj" fmla="val 6061"/>
+              <a:gd name="adj" fmla="val 13333"/>
+            </a:avLst>
+          </a:prstGeom>
+          <a:solidFill>
+            <a:srgbClr val="EEF2FF"/>
+          </a:solidFill>
+          <a:ln/>
+        </p:spPr>
+      </p:sp>
+      <p:sp>
+        <p:nvSpPr>
+          <p:cNvPr id="15" name="Text 13"/>
+          <p:cNvSpPr/>
+          <p:nvPr/>
+        </p:nvSpPr>
+        <p:spPr>
+          <a:xfrm>
+            <a:off x="640080" y="2898648"/>
+            <a:ext cx="2011680" cy="320040"/>
+          </a:xfrm>
+          <a:prstGeom prst="rect">
+            <a:avLst/>
+          </a:prstGeom>
+          <a:noFill/>
+          <a:ln/>
+        </p:spPr>
+        <p:txBody>
+          <a:bodyPr wrap="square" rtlCol="0" anchor="ctr"/>
+          <a:lstStyle/>
+          <a:p>
+            <a:pPr indent="0" marL="0">
+              <a:buNone/>
+            </a:pPr>
+            <a:r>
+              <a:rPr lang="en-US" sz="1400" b="1" dirty="0">
+                <a:solidFill>
+                  <a:srgbClr val="0052FF"/>
+                </a:solidFill>
+                <a:latin typeface="Arial" pitchFamily="34" charset="0"/>
+                <a:ea typeface="Arial" pitchFamily="34" charset="-122"/>
+                <a:cs typeface="Arial" pitchFamily="34" charset="-120"/>
+              </a:rPr>
+              <a:t>Why freeze</a:t>
+            </a:r>
+            <a:endParaRPr lang="en-US" sz="1400" dirty="0"/>
+          </a:p>
+        </p:txBody>
+      </p:sp>
+      <p:sp>
+        <p:nvSpPr>
+          <p:cNvPr id="16" name="Text 14"/>
+          <p:cNvSpPr/>
+          <p:nvPr/>
+        </p:nvSpPr>
+        <p:spPr>
+          <a:xfrm>
+            <a:off x="2743200" y="2898648"/>
+            <a:ext cx="5669280" cy="365760"/>
+          </a:xfrm>
+          <a:prstGeom prst="rect">
+            <a:avLst/>
+          </a:prstGeom>
+          <a:noFill/>
+          <a:ln/>
+        </p:spPr>
+        <p:txBody>
+          <a:bodyPr wrap="square" rtlCol="0" anchor="ctr"/>
+          <a:lstStyle/>
+          <a:p>
+            <a:pPr indent="0" marL="0">
+              <a:buNone/>
+            </a:pPr>
+            <a:r>
+              <a:rPr lang="en-US" sz="1300" dirty="0">
+                <a:solidFill>
+                  <a:srgbClr val="52525B"/>
+                </a:solidFill>
+                <a:latin typeface="Arial" pitchFamily="34" charset="0"/>
+                <a:ea typeface="Arial" pitchFamily="34" charset="-122"/>
+                <a:cs typeface="Arial" pitchFamily="34" charset="-120"/>
+              </a:rPr>
+              <a:t>Demo stays stable for presentations, Farcaster, and sales walkthroughs</a:t>
+            </a:r>
+            <a:endParaRPr lang="en-US" sz="1300" dirty="0"/>
+          </a:p>
+        </p:txBody>
+      </p:sp>
+      <p:sp>
+        <p:nvSpPr>
+          <p:cNvPr id="17" name="Shape 15"/>
+          <p:cNvSpPr/>
+          <p:nvPr/>
+        </p:nvSpPr>
+        <p:spPr>
+          <a:xfrm>
+            <a:off x="457200" y="3429000"/>
+            <a:ext cx="8229600" cy="548640"/>
+          </a:xfrm>
+          <a:prstGeom prst="roundRect">
+            <a:avLst>
+              <a:gd name="adj" fmla="val 13333"/>
             </a:avLst>
           </a:prstGeom>
           <a:solidFill>
             <a:srgbClr val="FFFFFF"/>
           </a:solidFill>
           <a:ln/>
-          <a:effectLst>
-            <a:outerShdw sx="100000" sy="100000" kx="0" ky="0" algn="bl" rotWithShape="0" blurRad="76200" dist="12700" dir="16200000">
-              <a:srgbClr val="000000">
-                <a:alpha val="7000"/>
-              </a:srgbClr>
-            </a:outerShdw>
-          </a:effectLst>
-        </p:spPr>
-      </p:sp>
-      <p:sp>
-        <p:nvSpPr>
-          <p:cNvPr id="12" name="Text 10"/>
-          <p:cNvSpPr/>
-          <p:nvPr/>
-        </p:nvSpPr>
-        <p:spPr>
-          <a:xfrm>
-            <a:off x="685800" y="2788920"/>
-            <a:ext cx="3566160" cy="320040"/>
-          </a:xfrm>
-          <a:prstGeom prst="rect">
-            <a:avLst/>
-          </a:prstGeom>
-          <a:noFill/>
-          <a:ln/>
-        </p:spPr>
-        <p:txBody>
-          <a:bodyPr wrap="square" rtlCol="0" anchor="ctr"/>
-          <a:lstStyle/>
-          <a:p>
-            <a:pPr indent="0" marL="0">
-              <a:buNone/>
-            </a:pPr>
-            <a:r>
-              <a:rPr lang="en-US" sz="1500" b="1" dirty="0">
+        </p:spPr>
+      </p:sp>
+      <p:sp>
+        <p:nvSpPr>
+          <p:cNvPr id="18" name="Text 16"/>
+          <p:cNvSpPr/>
+          <p:nvPr/>
+        </p:nvSpPr>
+        <p:spPr>
+          <a:xfrm>
+            <a:off x="640080" y="3538728"/>
+            <a:ext cx="2011680" cy="320040"/>
+          </a:xfrm>
+          <a:prstGeom prst="rect">
+            <a:avLst/>
+          </a:prstGeom>
+          <a:noFill/>
+          <a:ln/>
+        </p:spPr>
+        <p:txBody>
+          <a:bodyPr wrap="square" rtlCol="0" anchor="ctr"/>
+          <a:lstStyle/>
+          <a:p>
+            <a:pPr indent="0" marL="0">
+              <a:buNone/>
+            </a:pPr>
+            <a:r>
+              <a:rPr lang="en-US" sz="1400" b="1" dirty="0">
                 <a:solidFill>
                   <a:srgbClr val="0052FF"/>
                 </a:solidFill>
@@ -6353,22 +8039,22 @@
                 <a:ea typeface="Arial" pitchFamily="34" charset="-122"/>
                 <a:cs typeface="Arial" pitchFamily="34" charset="-120"/>
               </a:rPr>
-              <a:t>Pay $0.10 USDC</a:t>
-            </a:r>
-            <a:endParaRPr lang="en-US" sz="1500" dirty="0"/>
-          </a:p>
-        </p:txBody>
-      </p:sp>
-      <p:sp>
-        <p:nvSpPr>
-          <p:cNvPr id="13" name="Text 11"/>
-          <p:cNvSpPr/>
-          <p:nvPr/>
-        </p:nvSpPr>
-        <p:spPr>
-          <a:xfrm>
-            <a:off x="685800" y="3200400"/>
-            <a:ext cx="3566160" cy="640080"/>
+              <a:t>Paid path</a:t>
+            </a:r>
+            <a:endParaRPr lang="en-US" sz="1400" dirty="0"/>
+          </a:p>
+        </p:txBody>
+      </p:sp>
+      <p:sp>
+        <p:nvSpPr>
+          <p:cNvPr id="19" name="Text 17"/>
+          <p:cNvSpPr/>
+          <p:nvPr/>
+        </p:nvSpPr>
+        <p:spPr>
+          <a:xfrm>
+            <a:off x="2743200" y="3538728"/>
+            <a:ext cx="5669280" cy="365760"/>
           </a:xfrm>
           <a:prstGeom prst="rect">
             <a:avLst/>
@@ -6392,7 +8078,7 @@
                 <a:ea typeface="Arial" pitchFamily="34" charset="-122"/>
                 <a:cs typeface="Arial" pitchFamily="34" charset="-120"/>
               </a:rPr>
-              <a:t>Real USDC transfer to your shop address. App verifies the tx on Base, then unlocks.</a:t>
+              <a:t>Generate any ticker after BasedSettler unlock (test / real / agent)</a:t>
             </a:r>
             <a:endParaRPr lang="en-US" sz="1300" dirty="0"/>
           </a:p>
@@ -6400,121 +8086,14 @@
       </p:sp>
       <p:sp>
         <p:nvSpPr>
-          <p:cNvPr id="14" name="Shape 12"/>
-          <p:cNvSpPr/>
-          <p:nvPr/>
-        </p:nvSpPr>
-        <p:spPr>
-          <a:xfrm>
-            <a:off x="4754880" y="2560320"/>
-            <a:ext cx="4023360" cy="1508760"/>
-          </a:xfrm>
-          <a:prstGeom prst="roundRect">
-            <a:avLst>
-              <a:gd name="adj" fmla="val 6061"/>
-            </a:avLst>
-          </a:prstGeom>
-          <a:solidFill>
-            <a:srgbClr val="FFFFFF"/>
-          </a:solidFill>
-          <a:ln/>
-          <a:effectLst>
-            <a:outerShdw sx="100000" sy="100000" kx="0" ky="0" algn="bl" rotWithShape="0" blurRad="76200" dist="12700" dir="16200000">
-              <a:srgbClr val="000000">
-                <a:alpha val="7000"/>
-              </a:srgbClr>
-            </a:outerShdw>
-          </a:effectLst>
-        </p:spPr>
-      </p:sp>
-      <p:sp>
-        <p:nvSpPr>
-          <p:cNvPr id="15" name="Text 13"/>
-          <p:cNvSpPr/>
-          <p:nvPr/>
-        </p:nvSpPr>
-        <p:spPr>
-          <a:xfrm>
-            <a:off x="4983480" y="2788920"/>
-            <a:ext cx="3566160" cy="320040"/>
-          </a:xfrm>
-          <a:prstGeom prst="rect">
-            <a:avLst/>
-          </a:prstGeom>
-          <a:noFill/>
-          <a:ln/>
-        </p:spPr>
-        <p:txBody>
-          <a:bodyPr wrap="square" rtlCol="0" anchor="ctr"/>
-          <a:lstStyle/>
-          <a:p>
-            <a:pPr indent="0" marL="0">
-              <a:buNone/>
-            </a:pPr>
-            <a:r>
-              <a:rPr lang="en-US" sz="1500" b="1" dirty="0">
-                <a:solidFill>
-                  <a:srgbClr val="0052FF"/>
-                </a:solidFill>
-                <a:latin typeface="Arial" pitchFamily="34" charset="0"/>
-                <a:ea typeface="Arial" pitchFamily="34" charset="-122"/>
-                <a:cs typeface="Arial" pitchFamily="34" charset="-120"/>
-              </a:rPr>
-              <a:t>No free skip</a:t>
-            </a:r>
-            <a:endParaRPr lang="en-US" sz="1500" dirty="0"/>
-          </a:p>
-        </p:txBody>
-      </p:sp>
-      <p:sp>
-        <p:nvSpPr>
-          <p:cNvPr id="16" name="Text 14"/>
-          <p:cNvSpPr/>
-          <p:nvPr/>
-        </p:nvSpPr>
-        <p:spPr>
-          <a:xfrm>
-            <a:off x="4983480" y="3200400"/>
-            <a:ext cx="3566160" cy="640080"/>
-          </a:xfrm>
-          <a:prstGeom prst="rect">
-            <a:avLst/>
-          </a:prstGeom>
-          <a:noFill/>
-          <a:ln/>
-        </p:spPr>
-        <p:txBody>
-          <a:bodyPr wrap="square" rtlCol="0" anchor="ctr"/>
-          <a:lstStyle/>
-          <a:p>
-            <a:pPr indent="0" marL="0">
-              <a:buNone/>
-            </a:pPr>
-            <a:r>
-              <a:rPr lang="en-US" sz="1300" dirty="0">
-                <a:solidFill>
-                  <a:srgbClr val="52525B"/>
-                </a:solidFill>
-                <a:latin typeface="Arial" pitchFamily="34" charset="0"/>
-                <a:ea typeface="Arial" pitchFamily="34" charset="-122"/>
-                <a:cs typeface="Arial" pitchFamily="34" charset="-120"/>
-              </a:rPr>
-              <a:t>Testnet and free unlock are off — production path is mainnet USDC only.</a:t>
-            </a:r>
-            <a:endParaRPr lang="en-US" sz="1300" dirty="0"/>
-          </a:p>
-        </p:txBody>
-      </p:sp>
-      <p:sp>
-        <p:nvSpPr>
-          <p:cNvPr id="17" name="Text 15"/>
+          <p:cNvPr id="20" name="Text 18"/>
           <p:cNvSpPr/>
           <p:nvPr/>
         </p:nvSpPr>
         <p:spPr>
           <a:xfrm>
             <a:off x="457200" y="4709160"/>
-            <a:ext cx="6400800" cy="256032"/>
+            <a:ext cx="6583680" cy="256032"/>
           </a:xfrm>
           <a:prstGeom prst="rect">
             <a:avLst/>
@@ -6538,7 +8117,7 @@
                 <a:ea typeface="Arial" pitchFamily="34" charset="-122"/>
                 <a:cs typeface="Arial" pitchFamily="34" charset="-120"/>
               </a:rPr>
-              <a:t>BasedMarketLab · Built on Base</a:t>
+              <a:t>BasedMarketLab · Built on Base · Closed product</a:t>
             </a:r>
             <a:endParaRPr lang="en-US" sz="1000" dirty="0"/>
           </a:p>
@@ -6546,7 +8125,7 @@
       </p:sp>
       <p:sp>
         <p:nvSpPr>
-          <p:cNvPr id="18" name="Text 16"/>
+          <p:cNvPr id="21" name="Text 19"/>
           <p:cNvSpPr/>
           <p:nvPr/>
         </p:nvSpPr>
@@ -6577,7 +8156,7 @@
                 <a:ea typeface="Arial" pitchFamily="34" charset="-122"/>
                 <a:cs typeface="Arial" pitchFamily="34" charset="-120"/>
               </a:rPr>
-              <a:t>6 / 12</a:t>
+              <a:t>6 / 14</a:t>
             </a:r>
             <a:endParaRPr lang="en-US" sz="1000" dirty="0"/>
           </a:p>
@@ -6661,24 +8240,24 @@
         </p:nvSpPr>
         <p:spPr>
           <a:xfrm>
-            <a:off x="457200" y="201168"/>
-            <a:ext cx="8229600" cy="292608"/>
-          </a:xfrm>
-          <a:prstGeom prst="rect">
-            <a:avLst/>
-          </a:prstGeom>
-          <a:noFill/>
-          <a:ln/>
-        </p:spPr>
-        <p:txBody>
-          <a:bodyPr wrap="square" rtlCol="0" anchor="ctr"/>
-          <a:lstStyle/>
-          <a:p>
-            <a:pPr indent="0" marL="0">
-              <a:buNone/>
-            </a:pPr>
-            <a:r>
-              <a:rPr lang="en-US" sz="2200" b="1" dirty="0">
+            <a:off x="365760" y="146304"/>
+            <a:ext cx="6858000" cy="256032"/>
+          </a:xfrm>
+          <a:prstGeom prst="rect">
+            <a:avLst/>
+          </a:prstGeom>
+          <a:noFill/>
+          <a:ln/>
+        </p:spPr>
+        <p:txBody>
+          <a:bodyPr wrap="square" rtlCol="0" anchor="ctr"/>
+          <a:lstStyle/>
+          <a:p>
+            <a:pPr indent="0" marL="0">
+              <a:buNone/>
+            </a:pPr>
+            <a:r>
+              <a:rPr lang="en-US" sz="1800" b="1" dirty="0">
                 <a:solidFill>
                   <a:srgbClr val="18181B"/>
                 </a:solidFill>
@@ -6686,9 +8265,9 @@
                 <a:ea typeface="Arial" pitchFamily="34" charset="-122"/>
                 <a:cs typeface="Arial" pitchFamily="34" charset="-120"/>
               </a:rPr>
-              <a:t>Unlock UI — wallet checkout</a:t>
-            </a:r>
-            <a:endParaRPr lang="en-US" sz="2200" dirty="0"/>
+              <a:t>Step 1 — Choose a company</a:t>
+            </a:r>
+            <a:endParaRPr lang="en-US" sz="1800" dirty="0"/>
           </a:p>
         </p:txBody>
       </p:sp>
@@ -6700,24 +8279,24 @@
         </p:nvSpPr>
         <p:spPr>
           <a:xfrm>
-            <a:off x="457200" y="475488"/>
-            <a:ext cx="8229600" cy="228600"/>
-          </a:xfrm>
-          <a:prstGeom prst="rect">
-            <a:avLst/>
-          </a:prstGeom>
-          <a:noFill/>
-          <a:ln/>
-        </p:spPr>
-        <p:txBody>
-          <a:bodyPr wrap="square" rtlCol="0" anchor="ctr"/>
-          <a:lstStyle/>
-          <a:p>
-            <a:pPr indent="0" marL="0">
-              <a:buNone/>
-            </a:pPr>
-            <a:r>
-              <a:rPr lang="en-US" sz="1200" dirty="0">
+            <a:off x="365760" y="384048"/>
+            <a:ext cx="8229600" cy="201168"/>
+          </a:xfrm>
+          <a:prstGeom prst="rect">
+            <a:avLst/>
+          </a:prstGeom>
+          <a:noFill/>
+          <a:ln/>
+        </p:spPr>
+        <p:txBody>
+          <a:bodyPr wrap="square" rtlCol="0" anchor="ctr"/>
+          <a:lstStyle/>
+          <a:p>
+            <a:pPr indent="0" marL="0">
+              <a:buNone/>
+            </a:pPr>
+            <a:r>
+              <a:rPr lang="en-US" sz="1100" dirty="0">
                 <a:solidFill>
                   <a:srgbClr val="52525B"/>
                 </a:solidFill>
@@ -6725,15 +8304,15 @@
                 <a:ea typeface="Arial" pitchFamily="34" charset="-122"/>
                 <a:cs typeface="Arial" pitchFamily="34" charset="-120"/>
               </a:rPr>
-              <a:t>Confirm company → connect MetaMask / Coinbase Wallet → pay $0.10 USDC on Base</a:t>
-            </a:r>
-            <a:endParaRPr lang="en-US" sz="1200" dirty="0"/>
+              <a:t>Ticker · optional AI key · Generate · BasedSettler unlock</a:t>
+            </a:r>
+            <a:endParaRPr lang="en-US" sz="1100" dirty="0"/>
           </a:p>
         </p:txBody>
       </p:sp>
       <p:pic>
         <p:nvPicPr>
-          <p:cNvPr id="6" name="Image 0" descr="C:\Users\Kevin\OneDrive\Desktop\BasedMarketLab\live\screenshots\202_wallet_checkout_card.png">    </p:cNvPr>
+          <p:cNvPr id="6" name="Image 0" descr="C:\Users\Kevin\OneDrive\Desktop\BasedMarketLab\live\screenshots\pptx_crops\slide5_zoom.png">    </p:cNvPr>
           <p:cNvPicPr>
             <a:picLocks noChangeAspect="1"/>
           </p:cNvPicPr>
@@ -6746,8 +8325,8 @@
         </p:blipFill>
         <p:spPr>
           <a:xfrm>
-            <a:off x="1005840" y="777240"/>
-            <a:ext cx="7132320" cy="3611880"/>
+            <a:off x="320040" y="621792"/>
+            <a:ext cx="8503920" cy="3886200"/>
           </a:xfrm>
           <a:prstGeom prst="rect">
             <a:avLst/>
@@ -6763,7 +8342,7 @@
         <p:spPr>
           <a:xfrm>
             <a:off x="457200" y="4709160"/>
-            <a:ext cx="6400800" cy="256032"/>
+            <a:ext cx="6583680" cy="256032"/>
           </a:xfrm>
           <a:prstGeom prst="rect">
             <a:avLst/>
@@ -6787,7 +8366,7 @@
                 <a:ea typeface="Arial" pitchFamily="34" charset="-122"/>
                 <a:cs typeface="Arial" pitchFamily="34" charset="-120"/>
               </a:rPr>
-              <a:t>BasedMarketLab · Built on Base</a:t>
+              <a:t>BasedMarketLab · Built on Base · Closed product</a:t>
             </a:r>
             <a:endParaRPr lang="en-US" sz="1000" dirty="0"/>
           </a:p>
@@ -6826,7 +8405,7 @@
                 <a:ea typeface="Arial" pitchFamily="34" charset="-122"/>
                 <a:cs typeface="Arial" pitchFamily="34" charset="-120"/>
               </a:rPr>
-              <a:t>7 / 12</a:t>
+              <a:t>7 / 14</a:t>
             </a:r>
             <a:endParaRPr lang="en-US" sz="1000" dirty="0"/>
           </a:p>
@@ -6911,23 +8490,23 @@
         <p:spPr>
           <a:xfrm>
             <a:off x="457200" y="274320"/>
-            <a:ext cx="8229600" cy="365760"/>
-          </a:xfrm>
-          <a:prstGeom prst="rect">
-            <a:avLst/>
-          </a:prstGeom>
-          <a:noFill/>
-          <a:ln/>
-        </p:spPr>
-        <p:txBody>
-          <a:bodyPr wrap="square" rtlCol="0" anchor="ctr"/>
-          <a:lstStyle/>
-          <a:p>
-            <a:pPr indent="0" marL="0">
-              <a:buNone/>
-            </a:pPr>
-            <a:r>
-              <a:rPr lang="en-US" sz="2600" b="1" dirty="0">
+            <a:ext cx="8229600" cy="320040"/>
+          </a:xfrm>
+          <a:prstGeom prst="rect">
+            <a:avLst/>
+          </a:prstGeom>
+          <a:noFill/>
+          <a:ln/>
+        </p:spPr>
+        <p:txBody>
+          <a:bodyPr wrap="square" rtlCol="0" anchor="ctr"/>
+          <a:lstStyle/>
+          <a:p>
+            <a:pPr indent="0" marL="0">
+              <a:buNone/>
+            </a:pPr>
+            <a:r>
+              <a:rPr lang="en-US" sz="2200" b="1" dirty="0">
                 <a:solidFill>
                   <a:srgbClr val="18181B"/>
                 </a:solidFill>
@@ -6935,9 +8514,9 @@
                 <a:ea typeface="Arial" pitchFamily="34" charset="-122"/>
                 <a:cs typeface="Arial" pitchFamily="34" charset="-120"/>
               </a:rPr>
-              <a:t>What the buyer gets</a:t>
-            </a:r>
-            <a:endParaRPr lang="en-US" sz="2600" dirty="0"/>
+              <a:t>Step 2 — Confirm company &amp; unlock</a:t>
+            </a:r>
+            <a:endParaRPr lang="en-US" sz="2200" dirty="0"/>
           </a:p>
         </p:txBody>
       </p:sp>
@@ -6949,18 +8528,25 @@
         </p:nvSpPr>
         <p:spPr>
           <a:xfrm>
-            <a:off x="457200" y="822960"/>
-            <a:ext cx="8229600" cy="594360"/>
+            <a:off x="457200" y="868680"/>
+            <a:ext cx="4023360" cy="1508760"/>
           </a:xfrm>
           <a:prstGeom prst="roundRect">
             <a:avLst>
-              <a:gd name="adj" fmla="val 12308"/>
+              <a:gd name="adj" fmla="val 6061"/>
             </a:avLst>
           </a:prstGeom>
           <a:solidFill>
             <a:srgbClr val="FFFFFF"/>
           </a:solidFill>
           <a:ln/>
+          <a:effectLst>
+            <a:outerShdw sx="100000" sy="100000" kx="0" ky="0" algn="bl" rotWithShape="0" blurRad="76200" dist="12700" dir="16200000">
+              <a:srgbClr val="000000">
+                <a:alpha val="7000"/>
+              </a:srgbClr>
+            </a:outerShdw>
+          </a:effectLst>
         </p:spPr>
       </p:sp>
       <p:sp>
@@ -6971,24 +8557,24 @@
         </p:nvSpPr>
         <p:spPr>
           <a:xfrm>
-            <a:off x="640080" y="932688"/>
-            <a:ext cx="2377440" cy="365760"/>
-          </a:xfrm>
-          <a:prstGeom prst="rect">
-            <a:avLst/>
-          </a:prstGeom>
-          <a:noFill/>
-          <a:ln/>
-        </p:spPr>
-        <p:txBody>
-          <a:bodyPr wrap="square" rtlCol="0" anchor="ctr"/>
-          <a:lstStyle/>
-          <a:p>
-            <a:pPr indent="0" marL="0">
-              <a:buNone/>
-            </a:pPr>
-            <a:r>
-              <a:rPr lang="en-US" sz="1400" b="1" dirty="0">
+            <a:off x="685800" y="1097280"/>
+            <a:ext cx="3566160" cy="320040"/>
+          </a:xfrm>
+          <a:prstGeom prst="rect">
+            <a:avLst/>
+          </a:prstGeom>
+          <a:noFill/>
+          <a:ln/>
+        </p:spPr>
+        <p:txBody>
+          <a:bodyPr wrap="square" rtlCol="0" anchor="ctr"/>
+          <a:lstStyle/>
+          <a:p>
+            <a:pPr indent="0" marL="0">
+              <a:buNone/>
+            </a:pPr>
+            <a:r>
+              <a:rPr lang="en-US" sz="1500" b="1" dirty="0">
                 <a:solidFill>
                   <a:srgbClr val="0052FF"/>
                 </a:solidFill>
@@ -6996,9 +8582,9 @@
                 <a:ea typeface="Arial" pitchFamily="34" charset="-122"/>
                 <a:cs typeface="Arial" pitchFamily="34" charset="-120"/>
               </a:rPr>
-              <a:t>Company</a:t>
-            </a:r>
-            <a:endParaRPr lang="en-US" sz="1400" dirty="0"/>
+              <a:t>Confirm company</a:t>
+            </a:r>
+            <a:endParaRPr lang="en-US" sz="1500" dirty="0"/>
           </a:p>
         </p:txBody>
       </p:sp>
@@ -7010,8 +8596,8 @@
         </p:nvSpPr>
         <p:spPr>
           <a:xfrm>
-            <a:off x="3108960" y="932688"/>
-            <a:ext cx="5394960" cy="411480"/>
+            <a:off x="685800" y="1508760"/>
+            <a:ext cx="3566160" cy="640080"/>
           </a:xfrm>
           <a:prstGeom prst="rect">
             <a:avLst/>
@@ -7035,7 +8621,7 @@
                 <a:ea typeface="Arial" pitchFamily="34" charset="-122"/>
                 <a:cs typeface="Arial" pitchFamily="34" charset="-120"/>
               </a:rPr>
-              <a:t>Bottom line, business, strong / weak, watch-outs, market phase, word guide.</a:t>
+              <a:t>User ticks YES on ticker + resolved name (e.g. COIN → Coinbase Global).</a:t>
             </a:r>
             <a:endParaRPr lang="en-US" sz="1300" dirty="0"/>
           </a:p>
@@ -7049,146 +8635,53 @@
         </p:nvSpPr>
         <p:spPr>
           <a:xfrm>
-            <a:off x="457200" y="1508760"/>
-            <a:ext cx="8229600" cy="594360"/>
+            <a:off x="4754880" y="868680"/>
+            <a:ext cx="4023360" cy="1508760"/>
           </a:xfrm>
           <a:prstGeom prst="roundRect">
             <a:avLst>
-              <a:gd name="adj" fmla="val 12308"/>
-            </a:avLst>
-          </a:prstGeom>
-          <a:solidFill>
-            <a:srgbClr val="EEF2FF"/>
-          </a:solidFill>
-          <a:ln/>
-        </p:spPr>
-      </p:sp>
-      <p:sp>
-        <p:nvSpPr>
-          <p:cNvPr id="9" name="Text 7"/>
-          <p:cNvSpPr/>
-          <p:nvPr/>
-        </p:nvSpPr>
-        <p:spPr>
-          <a:xfrm>
-            <a:off x="640080" y="1618488"/>
-            <a:ext cx="2377440" cy="365760"/>
-          </a:xfrm>
-          <a:prstGeom prst="rect">
-            <a:avLst/>
-          </a:prstGeom>
-          <a:noFill/>
-          <a:ln/>
-        </p:spPr>
-        <p:txBody>
-          <a:bodyPr wrap="square" rtlCol="0" anchor="ctr"/>
-          <a:lstStyle/>
-          <a:p>
-            <a:pPr indent="0" marL="0">
-              <a:buNone/>
-            </a:pPr>
-            <a:r>
-              <a:rPr lang="en-US" sz="1400" b="1" dirty="0">
-                <a:solidFill>
-                  <a:srgbClr val="0052FF"/>
-                </a:solidFill>
-                <a:latin typeface="Arial" pitchFamily="34" charset="0"/>
-                <a:ea typeface="Arial" pitchFamily="34" charset="-122"/>
-                <a:cs typeface="Arial" pitchFamily="34" charset="-120"/>
-              </a:rPr>
-              <a:t>Full company report</a:t>
-            </a:r>
-            <a:endParaRPr lang="en-US" sz="1400" dirty="0"/>
-          </a:p>
-        </p:txBody>
-      </p:sp>
-      <p:sp>
-        <p:nvSpPr>
-          <p:cNvPr id="10" name="Text 8"/>
-          <p:cNvSpPr/>
-          <p:nvPr/>
-        </p:nvSpPr>
-        <p:spPr>
-          <a:xfrm>
-            <a:off x="3108960" y="1618488"/>
-            <a:ext cx="5394960" cy="411480"/>
-          </a:xfrm>
-          <a:prstGeom prst="rect">
-            <a:avLst/>
-          </a:prstGeom>
-          <a:noFill/>
-          <a:ln/>
-        </p:spPr>
-        <p:txBody>
-          <a:bodyPr wrap="square" rtlCol="0" anchor="ctr"/>
-          <a:lstStyle/>
-          <a:p>
-            <a:pPr indent="0" marL="0">
-              <a:buNone/>
-            </a:pPr>
-            <a:r>
-              <a:rPr lang="en-US" sz="1300" dirty="0">
-                <a:solidFill>
-                  <a:srgbClr val="52525B"/>
-                </a:solidFill>
-                <a:latin typeface="Arial" pitchFamily="34" charset="0"/>
-                <a:ea typeface="Arial" pitchFamily="34" charset="-122"/>
-                <a:cs typeface="Arial" pitchFamily="34" charset="-120"/>
-              </a:rPr>
-              <a:t>Numbered sections: glance → what they do → opportunity → how business is doing → risks → put-together.</a:t>
-            </a:r>
-            <a:endParaRPr lang="en-US" sz="1300" dirty="0"/>
-          </a:p>
-        </p:txBody>
-      </p:sp>
-      <p:sp>
-        <p:nvSpPr>
-          <p:cNvPr id="11" name="Shape 9"/>
-          <p:cNvSpPr/>
-          <p:nvPr/>
-        </p:nvSpPr>
-        <p:spPr>
-          <a:xfrm>
-            <a:off x="457200" y="2194560"/>
-            <a:ext cx="8229600" cy="594360"/>
-          </a:xfrm>
-          <a:prstGeom prst="roundRect">
-            <a:avLst>
-              <a:gd name="adj" fmla="val 12308"/>
+              <a:gd name="adj" fmla="val 6061"/>
             </a:avLst>
           </a:prstGeom>
           <a:solidFill>
             <a:srgbClr val="FFFFFF"/>
           </a:solidFill>
           <a:ln/>
-        </p:spPr>
-      </p:sp>
-      <p:sp>
-        <p:nvSpPr>
-          <p:cNvPr id="12" name="Text 10"/>
-          <p:cNvSpPr/>
-          <p:nvPr/>
-        </p:nvSpPr>
-        <p:spPr>
-          <a:xfrm>
-            <a:off x="640080" y="2304288"/>
-            <a:ext cx="2377440" cy="365760"/>
-          </a:xfrm>
-          <a:prstGeom prst="rect">
-            <a:avLst/>
-          </a:prstGeom>
-          <a:noFill/>
-          <a:ln/>
-        </p:spPr>
-        <p:txBody>
-          <a:bodyPr wrap="square" rtlCol="0" anchor="ctr"/>
-          <a:lstStyle/>
-          <a:p>
-            <a:pPr indent="0" marL="0">
-              <a:buNone/>
-            </a:pPr>
-            <a:r>
-              <a:rPr lang="en-US" sz="1400" b="1" dirty="0">
+          <a:effectLst>
+            <a:outerShdw sx="100000" sy="100000" kx="0" ky="0" algn="bl" rotWithShape="0" blurRad="76200" dist="12700" dir="16200000">
+              <a:srgbClr val="000000">
+                <a:alpha val="7000"/>
+              </a:srgbClr>
+            </a:outerShdw>
+          </a:effectLst>
+        </p:spPr>
+      </p:sp>
+      <p:sp>
+        <p:nvSpPr>
+          <p:cNvPr id="9" name="Text 7"/>
+          <p:cNvSpPr/>
+          <p:nvPr/>
+        </p:nvSpPr>
+        <p:spPr>
+          <a:xfrm>
+            <a:off x="4983480" y="1097280"/>
+            <a:ext cx="3566160" cy="320040"/>
+          </a:xfrm>
+          <a:prstGeom prst="rect">
+            <a:avLst/>
+          </a:prstGeom>
+          <a:noFill/>
+          <a:ln/>
+        </p:spPr>
+        <p:txBody>
+          <a:bodyPr wrap="square" rtlCol="0" anchor="ctr"/>
+          <a:lstStyle/>
+          <a:p>
+            <a:pPr indent="0" marL="0">
+              <a:buNone/>
+            </a:pPr>
+            <a:r>
+              <a:rPr lang="en-US" sz="1500" b="1" dirty="0">
                 <a:solidFill>
                   <a:srgbClr val="0052FF"/>
                 </a:solidFill>
@@ -7196,22 +8689,22 @@
                 <a:ea typeface="Arial" pitchFamily="34" charset="-122"/>
                 <a:cs typeface="Arial" pitchFamily="34" charset="-120"/>
               </a:rPr>
-              <a:t>Price chart</a:t>
-            </a:r>
-            <a:endParaRPr lang="en-US" sz="1400" dirty="0"/>
-          </a:p>
-        </p:txBody>
-      </p:sp>
-      <p:sp>
-        <p:nvSpPr>
-          <p:cNvPr id="13" name="Text 11"/>
-          <p:cNvSpPr/>
-          <p:nvPr/>
-        </p:nvSpPr>
-        <p:spPr>
-          <a:xfrm>
-            <a:off x="3108960" y="2304288"/>
-            <a:ext cx="5394960" cy="411480"/>
+              <a:t>Connect wallet</a:t>
+            </a:r>
+            <a:endParaRPr lang="en-US" sz="1500" dirty="0"/>
+          </a:p>
+        </p:txBody>
+      </p:sp>
+      <p:sp>
+        <p:nvSpPr>
+          <p:cNvPr id="10" name="Text 8"/>
+          <p:cNvSpPr/>
+          <p:nvPr/>
+        </p:nvSpPr>
+        <p:spPr>
+          <a:xfrm>
+            <a:off x="4983480" y="1508760"/>
+            <a:ext cx="3566160" cy="640080"/>
           </a:xfrm>
           <a:prstGeom prst="rect">
             <a:avLst/>
@@ -7235,7 +8728,7 @@
                 <a:ea typeface="Arial" pitchFamily="34" charset="-122"/>
                 <a:cs typeface="Arial" pitchFamily="34" charset="-120"/>
               </a:rPr>
-              <a:t>One full-history chart with buy/sell marks — secondary context, not the main product.</a:t>
+              <a:t>MetaMask / Coinbase Wallet — Base mainnet (8453) or Sepolia for test.</a:t>
             </a:r>
             <a:endParaRPr lang="en-US" sz="1300" dirty="0"/>
           </a:p>
@@ -7243,246 +8736,260 @@
       </p:sp>
       <p:sp>
         <p:nvSpPr>
-          <p:cNvPr id="14" name="Shape 12"/>
-          <p:cNvSpPr/>
-          <p:nvPr/>
-        </p:nvSpPr>
-        <p:spPr>
-          <a:xfrm>
-            <a:off x="457200" y="2880360"/>
-            <a:ext cx="8229600" cy="594360"/>
+          <p:cNvPr id="11" name="Shape 9"/>
+          <p:cNvSpPr/>
+          <p:nvPr/>
+        </p:nvSpPr>
+        <p:spPr>
+          <a:xfrm>
+            <a:off x="457200" y="2560320"/>
+            <a:ext cx="4023360" cy="1508760"/>
           </a:xfrm>
           <a:prstGeom prst="roundRect">
             <a:avLst>
-              <a:gd name="adj" fmla="val 12308"/>
-            </a:avLst>
-          </a:prstGeom>
-          <a:solidFill>
-            <a:srgbClr val="EEF2FF"/>
-          </a:solidFill>
-          <a:ln/>
-        </p:spPr>
-      </p:sp>
-      <p:sp>
-        <p:nvSpPr>
-          <p:cNvPr id="15" name="Text 13"/>
-          <p:cNvSpPr/>
-          <p:nvPr/>
-        </p:nvSpPr>
-        <p:spPr>
-          <a:xfrm>
-            <a:off x="640080" y="2990088"/>
-            <a:ext cx="2377440" cy="365760"/>
-          </a:xfrm>
-          <a:prstGeom prst="rect">
-            <a:avLst/>
-          </a:prstGeom>
-          <a:noFill/>
-          <a:ln/>
-        </p:spPr>
-        <p:txBody>
-          <a:bodyPr wrap="square" rtlCol="0" anchor="ctr"/>
-          <a:lstStyle/>
-          <a:p>
-            <a:pPr indent="0" marL="0">
-              <a:buNone/>
-            </a:pPr>
-            <a:r>
-              <a:rPr lang="en-US" sz="1400" b="1" dirty="0">
-                <a:solidFill>
-                  <a:srgbClr val="0052FF"/>
-                </a:solidFill>
-                <a:latin typeface="Arial" pitchFamily="34" charset="0"/>
-                <a:ea typeface="Arial" pitchFamily="34" charset="-122"/>
-                <a:cs typeface="Arial" pitchFamily="34" charset="-120"/>
-              </a:rPr>
-              <a:t>Prediction markets</a:t>
-            </a:r>
-            <a:endParaRPr lang="en-US" sz="1400" dirty="0"/>
-          </a:p>
-        </p:txBody>
-      </p:sp>
-      <p:sp>
-        <p:nvSpPr>
-          <p:cNvPr id="16" name="Text 14"/>
-          <p:cNvSpPr/>
-          <p:nvPr/>
-        </p:nvSpPr>
-        <p:spPr>
-          <a:xfrm>
-            <a:off x="3108960" y="2990088"/>
-            <a:ext cx="5394960" cy="411480"/>
-          </a:xfrm>
-          <a:prstGeom prst="rect">
-            <a:avLst/>
-          </a:prstGeom>
-          <a:noFill/>
-          <a:ln/>
-        </p:spPr>
-        <p:txBody>
-          <a:bodyPr wrap="square" rtlCol="0" anchor="ctr"/>
-          <a:lstStyle/>
-          <a:p>
-            <a:pPr indent="0" marL="0">
-              <a:buNone/>
-            </a:pPr>
-            <a:r>
-              <a:rPr lang="en-US" sz="1300" dirty="0">
-                <a:solidFill>
-                  <a:srgbClr val="52525B"/>
-                </a:solidFill>
-                <a:latin typeface="Arial" pitchFamily="34" charset="0"/>
-                <a:ea typeface="Arial" pitchFamily="34" charset="-122"/>
-                <a:cs typeface="Arial" pitchFamily="34" charset="-120"/>
-              </a:rPr>
-              <a:t>Side context cards (company / macro-style questions).</a:t>
-            </a:r>
-            <a:endParaRPr lang="en-US" sz="1300" dirty="0"/>
-          </a:p>
-        </p:txBody>
-      </p:sp>
-      <p:sp>
-        <p:nvSpPr>
-          <p:cNvPr id="17" name="Shape 15"/>
-          <p:cNvSpPr/>
-          <p:nvPr/>
-        </p:nvSpPr>
-        <p:spPr>
-          <a:xfrm>
-            <a:off x="457200" y="3566160"/>
-            <a:ext cx="8229600" cy="594360"/>
-          </a:xfrm>
-          <a:prstGeom prst="roundRect">
-            <a:avLst>
-              <a:gd name="adj" fmla="val 12308"/>
+              <a:gd name="adj" fmla="val 6061"/>
             </a:avLst>
           </a:prstGeom>
           <a:solidFill>
             <a:srgbClr val="FFFFFF"/>
           </a:solidFill>
           <a:ln/>
-        </p:spPr>
+          <a:effectLst>
+            <a:outerShdw sx="100000" sy="100000" kx="0" ky="0" algn="bl" rotWithShape="0" blurRad="76200" dist="12700" dir="16200000">
+              <a:srgbClr val="000000">
+                <a:alpha val="7000"/>
+              </a:srgbClr>
+            </a:outerShdw>
+          </a:effectLst>
+        </p:spPr>
+      </p:sp>
+      <p:sp>
+        <p:nvSpPr>
+          <p:cNvPr id="12" name="Text 10"/>
+          <p:cNvSpPr/>
+          <p:nvPr/>
+        </p:nvSpPr>
+        <p:spPr>
+          <a:xfrm>
+            <a:off x="685800" y="2788920"/>
+            <a:ext cx="3566160" cy="320040"/>
+          </a:xfrm>
+          <a:prstGeom prst="rect">
+            <a:avLst/>
+          </a:prstGeom>
+          <a:noFill/>
+          <a:ln/>
+        </p:spPr>
+        <p:txBody>
+          <a:bodyPr wrap="square" rtlCol="0" anchor="ctr"/>
+          <a:lstStyle/>
+          <a:p>
+            <a:pPr indent="0" marL="0">
+              <a:buNone/>
+            </a:pPr>
+            <a:r>
+              <a:rPr lang="en-US" sz="1500" b="1" dirty="0">
+                <a:solidFill>
+                  <a:srgbClr val="0052FF"/>
+                </a:solidFill>
+                <a:latin typeface="Arial" pitchFamily="34" charset="0"/>
+                <a:ea typeface="Arial" pitchFamily="34" charset="-122"/>
+                <a:cs typeface="Arial" pitchFamily="34" charset="-120"/>
+              </a:rPr>
+              <a:t>Pay via BasedSettler</a:t>
+            </a:r>
+            <a:endParaRPr lang="en-US" sz="1500" dirty="0"/>
+          </a:p>
+        </p:txBody>
+      </p:sp>
+      <p:sp>
+        <p:nvSpPr>
+          <p:cNvPr id="13" name="Text 11"/>
+          <p:cNvSpPr/>
+          <p:nvPr/>
+        </p:nvSpPr>
+        <p:spPr>
+          <a:xfrm>
+            <a:off x="685800" y="3200400"/>
+            <a:ext cx="3566160" cy="640080"/>
+          </a:xfrm>
+          <a:prstGeom prst="rect">
+            <a:avLst/>
+          </a:prstGeom>
+          <a:noFill/>
+          <a:ln/>
+        </p:spPr>
+        <p:txBody>
+          <a:bodyPr wrap="square" rtlCol="0" anchor="ctr"/>
+          <a:lstStyle/>
+          <a:p>
+            <a:pPr indent="0" marL="0">
+              <a:buNone/>
+            </a:pPr>
+            <a:r>
+              <a:rPr lang="en-US" sz="1300" dirty="0">
+                <a:solidFill>
+                  <a:srgbClr val="52525B"/>
+                </a:solidFill>
+                <a:latin typeface="Arial" pitchFamily="34" charset="0"/>
+                <a:ea typeface="Arial" pitchFamily="34" charset="-122"/>
+                <a:cs typeface="Arial" pitchFamily="34" charset="-120"/>
+              </a:rPr>
+              <a:t>Real: $0.10 USDC on Base. Test: 0.00001 Sepolia. Agent: AgentKit rail.</a:t>
+            </a:r>
+            <a:endParaRPr lang="en-US" sz="1300" dirty="0"/>
+          </a:p>
+        </p:txBody>
+      </p:sp>
+      <p:sp>
+        <p:nvSpPr>
+          <p:cNvPr id="14" name="Shape 12"/>
+          <p:cNvSpPr/>
+          <p:nvPr/>
+        </p:nvSpPr>
+        <p:spPr>
+          <a:xfrm>
+            <a:off x="4754880" y="2560320"/>
+            <a:ext cx="4023360" cy="1508760"/>
+          </a:xfrm>
+          <a:prstGeom prst="roundRect">
+            <a:avLst>
+              <a:gd name="adj" fmla="val 6061"/>
+            </a:avLst>
+          </a:prstGeom>
+          <a:solidFill>
+            <a:srgbClr val="FFFFFF"/>
+          </a:solidFill>
+          <a:ln/>
+          <a:effectLst>
+            <a:outerShdw sx="100000" sy="100000" kx="0" ky="0" algn="bl" rotWithShape="0" blurRad="76200" dist="12700" dir="16200000">
+              <a:srgbClr val="000000">
+                <a:alpha val="7000"/>
+              </a:srgbClr>
+            </a:outerShdw>
+          </a:effectLst>
+        </p:spPr>
+      </p:sp>
+      <p:sp>
+        <p:nvSpPr>
+          <p:cNvPr id="15" name="Text 13"/>
+          <p:cNvSpPr/>
+          <p:nvPr/>
+        </p:nvSpPr>
+        <p:spPr>
+          <a:xfrm>
+            <a:off x="4983480" y="2788920"/>
+            <a:ext cx="3566160" cy="320040"/>
+          </a:xfrm>
+          <a:prstGeom prst="rect">
+            <a:avLst/>
+          </a:prstGeom>
+          <a:noFill/>
+          <a:ln/>
+        </p:spPr>
+        <p:txBody>
+          <a:bodyPr wrap="square" rtlCol="0" anchor="ctr"/>
+          <a:lstStyle/>
+          <a:p>
+            <a:pPr indent="0" marL="0">
+              <a:buNone/>
+            </a:pPr>
+            <a:r>
+              <a:rPr lang="en-US" sz="1500" b="1" dirty="0">
+                <a:solidFill>
+                  <a:srgbClr val="0052FF"/>
+                </a:solidFill>
+                <a:latin typeface="Arial" pitchFamily="34" charset="0"/>
+                <a:ea typeface="Arial" pitchFamily="34" charset="-122"/>
+                <a:cs typeface="Arial" pitchFamily="34" charset="-120"/>
+              </a:rPr>
+              <a:t>On-chain verify</a:t>
+            </a:r>
+            <a:endParaRPr lang="en-US" sz="1500" dirty="0"/>
+          </a:p>
+        </p:txBody>
+      </p:sp>
+      <p:sp>
+        <p:nvSpPr>
+          <p:cNvPr id="16" name="Text 14"/>
+          <p:cNvSpPr/>
+          <p:nvPr/>
+        </p:nvSpPr>
+        <p:spPr>
+          <a:xfrm>
+            <a:off x="4983480" y="3200400"/>
+            <a:ext cx="3566160" cy="640080"/>
+          </a:xfrm>
+          <a:prstGeom prst="rect">
+            <a:avLst/>
+          </a:prstGeom>
+          <a:noFill/>
+          <a:ln/>
+        </p:spPr>
+        <p:txBody>
+          <a:bodyPr wrap="square" rtlCol="0" anchor="ctr"/>
+          <a:lstStyle/>
+          <a:p>
+            <a:pPr indent="0" marL="0">
+              <a:buNone/>
+            </a:pPr>
+            <a:r>
+              <a:rPr lang="en-US" sz="1300" dirty="0">
+                <a:solidFill>
+                  <a:srgbClr val="52525B"/>
+                </a:solidFill>
+                <a:latin typeface="Arial" pitchFamily="34" charset="0"/>
+                <a:ea typeface="Arial" pitchFamily="34" charset="-122"/>
+                <a:cs typeface="Arial" pitchFamily="34" charset="-120"/>
+              </a:rPr>
+              <a:t>App verifies the tx, then unlocks generate → full report package.</a:t>
+            </a:r>
+            <a:endParaRPr lang="en-US" sz="1300" dirty="0"/>
+          </a:p>
+        </p:txBody>
+      </p:sp>
+      <p:sp>
+        <p:nvSpPr>
+          <p:cNvPr id="17" name="Text 15"/>
+          <p:cNvSpPr/>
+          <p:nvPr/>
+        </p:nvSpPr>
+        <p:spPr>
+          <a:xfrm>
+            <a:off x="457200" y="4709160"/>
+            <a:ext cx="6583680" cy="256032"/>
+          </a:xfrm>
+          <a:prstGeom prst="rect">
+            <a:avLst/>
+          </a:prstGeom>
+          <a:noFill/>
+          <a:ln/>
+        </p:spPr>
+        <p:txBody>
+          <a:bodyPr wrap="square" rtlCol="0" anchor="ctr"/>
+          <a:lstStyle/>
+          <a:p>
+            <a:pPr indent="0" marL="0">
+              <a:buNone/>
+            </a:pPr>
+            <a:r>
+              <a:rPr lang="en-US" sz="1000" dirty="0">
+                <a:solidFill>
+                  <a:srgbClr val="A1A1AA"/>
+                </a:solidFill>
+                <a:latin typeface="Arial" pitchFamily="34" charset="0"/>
+                <a:ea typeface="Arial" pitchFamily="34" charset="-122"/>
+                <a:cs typeface="Arial" pitchFamily="34" charset="-120"/>
+              </a:rPr>
+              <a:t>BasedMarketLab · Built on Base · Closed product</a:t>
+            </a:r>
+            <a:endParaRPr lang="en-US" sz="1000" dirty="0"/>
+          </a:p>
+        </p:txBody>
       </p:sp>
       <p:sp>
         <p:nvSpPr>
           <p:cNvPr id="18" name="Text 16"/>
-          <p:cNvSpPr/>
-          <p:nvPr/>
-        </p:nvSpPr>
-        <p:spPr>
-          <a:xfrm>
-            <a:off x="640080" y="3675888"/>
-            <a:ext cx="2377440" cy="365760"/>
-          </a:xfrm>
-          <a:prstGeom prst="rect">
-            <a:avLst/>
-          </a:prstGeom>
-          <a:noFill/>
-          <a:ln/>
-        </p:spPr>
-        <p:txBody>
-          <a:bodyPr wrap="square" rtlCol="0" anchor="ctr"/>
-          <a:lstStyle/>
-          <a:p>
-            <a:pPr indent="0" marL="0">
-              <a:buNone/>
-            </a:pPr>
-            <a:r>
-              <a:rPr lang="en-US" sz="1400" b="1" dirty="0">
-                <a:solidFill>
-                  <a:srgbClr val="0052FF"/>
-                </a:solidFill>
-                <a:latin typeface="Arial" pitchFamily="34" charset="0"/>
-                <a:ea typeface="Arial" pitchFamily="34" charset="-122"/>
-                <a:cs typeface="Arial" pitchFamily="34" charset="-120"/>
-              </a:rPr>
-              <a:t>PDF &amp; library</a:t>
-            </a:r>
-            <a:endParaRPr lang="en-US" sz="1400" dirty="0"/>
-          </a:p>
-        </p:txBody>
-      </p:sp>
-      <p:sp>
-        <p:nvSpPr>
-          <p:cNvPr id="19" name="Text 17"/>
-          <p:cNvSpPr/>
-          <p:nvPr/>
-        </p:nvSpPr>
-        <p:spPr>
-          <a:xfrm>
-            <a:off x="3108960" y="3675888"/>
-            <a:ext cx="5394960" cy="411480"/>
-          </a:xfrm>
-          <a:prstGeom prst="rect">
-            <a:avLst/>
-          </a:prstGeom>
-          <a:noFill/>
-          <a:ln/>
-        </p:spPr>
-        <p:txBody>
-          <a:bodyPr wrap="square" rtlCol="0" anchor="ctr"/>
-          <a:lstStyle/>
-          <a:p>
-            <a:pPr indent="0" marL="0">
-              <a:buNone/>
-            </a:pPr>
-            <a:r>
-              <a:rPr lang="en-US" sz="1300" dirty="0">
-                <a:solidFill>
-                  <a:srgbClr val="52525B"/>
-                </a:solidFill>
-                <a:latin typeface="Arial" pitchFamily="34" charset="0"/>
-                <a:ea typeface="Arial" pitchFamily="34" charset="-122"/>
-                <a:cs typeface="Arial" pitchFamily="34" charset="-120"/>
-              </a:rPr>
-              <a:t>Download PDF; re-open saved reports anytime from Your reports.</a:t>
-            </a:r>
-            <a:endParaRPr lang="en-US" sz="1300" dirty="0"/>
-          </a:p>
-        </p:txBody>
-      </p:sp>
-      <p:sp>
-        <p:nvSpPr>
-          <p:cNvPr id="20" name="Text 18"/>
-          <p:cNvSpPr/>
-          <p:nvPr/>
-        </p:nvSpPr>
-        <p:spPr>
-          <a:xfrm>
-            <a:off x="457200" y="4709160"/>
-            <a:ext cx="6400800" cy="256032"/>
-          </a:xfrm>
-          <a:prstGeom prst="rect">
-            <a:avLst/>
-          </a:prstGeom>
-          <a:noFill/>
-          <a:ln/>
-        </p:spPr>
-        <p:txBody>
-          <a:bodyPr wrap="square" rtlCol="0" anchor="ctr"/>
-          <a:lstStyle/>
-          <a:p>
-            <a:pPr indent="0" marL="0">
-              <a:buNone/>
-            </a:pPr>
-            <a:r>
-              <a:rPr lang="en-US" sz="1000" dirty="0">
-                <a:solidFill>
-                  <a:srgbClr val="A1A1AA"/>
-                </a:solidFill>
-                <a:latin typeface="Arial" pitchFamily="34" charset="0"/>
-                <a:ea typeface="Arial" pitchFamily="34" charset="-122"/>
-                <a:cs typeface="Arial" pitchFamily="34" charset="-120"/>
-              </a:rPr>
-              <a:t>BasedMarketLab · Built on Base</a:t>
-            </a:r>
-            <a:endParaRPr lang="en-US" sz="1000" dirty="0"/>
-          </a:p>
-        </p:txBody>
-      </p:sp>
-      <p:sp>
-        <p:nvSpPr>
-          <p:cNvPr id="21" name="Text 19"/>
           <p:cNvSpPr/>
           <p:nvPr/>
         </p:nvSpPr>
@@ -7513,7 +9020,7 @@
                 <a:ea typeface="Arial" pitchFamily="34" charset="-122"/>
                 <a:cs typeface="Arial" pitchFamily="34" charset="-120"/>
               </a:rPr>
-              <a:t>8 / 12</a:t>
+              <a:t>8 / 14</a:t>
             </a:r>
             <a:endParaRPr lang="en-US" sz="1000" dirty="0"/>
           </a:p>
@@ -7598,23 +9105,23 @@
         <p:spPr>
           <a:xfrm>
             <a:off x="457200" y="201168"/>
-            <a:ext cx="5943600" cy="292608"/>
-          </a:xfrm>
-          <a:prstGeom prst="rect">
-            <a:avLst/>
-          </a:prstGeom>
-          <a:noFill/>
-          <a:ln/>
-        </p:spPr>
-        <p:txBody>
-          <a:bodyPr wrap="square" rtlCol="0" anchor="ctr"/>
-          <a:lstStyle/>
-          <a:p>
-            <a:pPr indent="0" marL="0">
-              <a:buNone/>
-            </a:pPr>
-            <a:r>
-              <a:rPr lang="en-US" sz="2000" b="1" dirty="0">
+            <a:ext cx="8229600" cy="292608"/>
+          </a:xfrm>
+          <a:prstGeom prst="rect">
+            <a:avLst/>
+          </a:prstGeom>
+          <a:noFill/>
+          <a:ln/>
+        </p:spPr>
+        <p:txBody>
+          <a:bodyPr wrap="square" rtlCol="0" anchor="ctr"/>
+          <a:lstStyle/>
+          <a:p>
+            <a:pPr indent="0" marL="0">
+              <a:buNone/>
+            </a:pPr>
+            <a:r>
+              <a:rPr lang="en-US" sz="2200" b="1" dirty="0">
                 <a:solidFill>
                   <a:srgbClr val="18181B"/>
                 </a:solidFill>
@@ -7622,9 +9129,9 @@
                 <a:ea typeface="Arial" pitchFamily="34" charset="-122"/>
                 <a:cs typeface="Arial" pitchFamily="34" charset="-120"/>
               </a:rPr>
-              <a:t>Sample report — Company tab</a:t>
-            </a:r>
-            <a:endParaRPr lang="en-US" sz="2000" dirty="0"/>
+              <a:t>Unlock UI — wallet checkout</a:t>
+            </a:r>
+            <a:endParaRPr lang="en-US" sz="2200" dirty="0"/>
           </a:p>
         </p:txBody>
       </p:sp>
@@ -7661,7 +9168,7 @@
                 <a:ea typeface="Arial" pitchFamily="34" charset="-122"/>
                 <a:cs typeface="Arial" pitchFamily="34" charset="-120"/>
               </a:rPr>
-              <a:t>Bottom line · business · strengths / watch-outs · market phase</a:t>
+              <a:t>Confirm company → connect wallet → test / real $0.10 / agent on BasedSettler</a:t>
             </a:r>
             <a:endParaRPr lang="en-US" sz="1200" dirty="0"/>
           </a:p>
@@ -7669,7 +9176,7 @@
       </p:sp>
       <p:pic>
         <p:nvPicPr>
-          <p:cNvPr id="6" name="Image 0" descr="C:\Users\Kevin\OneDrive\Desktop\BasedMarketLab\live\screenshots\101_report_api_top.png">    </p:cNvPr>
+          <p:cNvPr id="6" name="Image 0" descr="C:\Users\Kevin\OneDrive\Desktop\BasedMarketLab\live\screenshots\202_wallet_checkout_card.png">    </p:cNvPr>
           <p:cNvPicPr>
             <a:picLocks noChangeAspect="1"/>
           </p:cNvPicPr>
@@ -7682,8 +9189,8 @@
         </p:blipFill>
         <p:spPr>
           <a:xfrm>
-            <a:off x="822960" y="777240"/>
-            <a:ext cx="7498080" cy="3611880"/>
+            <a:off x="1005840" y="777240"/>
+            <a:ext cx="7132320" cy="3611880"/>
           </a:xfrm>
           <a:prstGeom prst="rect">
             <a:avLst/>
@@ -7699,7 +9206,7 @@
         <p:spPr>
           <a:xfrm>
             <a:off x="457200" y="4709160"/>
-            <a:ext cx="6400800" cy="256032"/>
+            <a:ext cx="6583680" cy="256032"/>
           </a:xfrm>
           <a:prstGeom prst="rect">
             <a:avLst/>
@@ -7723,7 +9230,7 @@
                 <a:ea typeface="Arial" pitchFamily="34" charset="-122"/>
                 <a:cs typeface="Arial" pitchFamily="34" charset="-120"/>
               </a:rPr>
-              <a:t>BasedMarketLab · Built on Base</a:t>
+              <a:t>BasedMarketLab · Built on Base · Closed product</a:t>
             </a:r>
             <a:endParaRPr lang="en-US" sz="1000" dirty="0"/>
           </a:p>
@@ -7762,7 +9269,7 @@
                 <a:ea typeface="Arial" pitchFamily="34" charset="-122"/>
                 <a:cs typeface="Arial" pitchFamily="34" charset="-120"/>
               </a:rPr>
-              <a:t>9 / 12</a:t>
+              <a:t>9 / 14</a:t>
             </a:r>
             <a:endParaRPr lang="en-US" sz="1000" dirty="0"/>
           </a:p>
